--- a/deliverables/process_overview.pptx
+++ b/deliverables/process_overview.pptx
@@ -19,6 +19,8 @@
     <p:sldId id="267" r:id="rId18"/>
     <p:sldId id="268" r:id="rId19"/>
     <p:sldId id="269" r:id="rId20"/>
+    <p:sldId id="270" r:id="rId21"/>
+    <p:sldId id="271" r:id="rId22"/>
   </p:sldIdLst>
   <p:sldSz cx="12191695" cy="6858000" type="screen4x3"/>
   <p:notesSz cx="6858000" cy="9144000"/>
@@ -3152,8 +3154,8 @@
         </p:nvSpPr>
         <p:spPr>
           <a:xfrm>
-            <a:off x="731520" y="1920240"/>
-            <a:ext cx="10698480" cy="1371600"/>
+            <a:off x="731520" y="1554480"/>
+            <a:ext cx="10698480" cy="1280160"/>
           </a:xfrm>
           <a:prstGeom prst="rect">
             <a:avLst/>
@@ -3168,7 +3170,7 @@
           <a:p>
             <a:pPr algn="l"/>
             <a:r>
-              <a:rPr sz="4400" b="1">
+              <a:rPr sz="4200" b="1">
                 <a:solidFill>
                   <a:srgbClr val="FFFFFF"/>
                 </a:solidFill>
@@ -3187,8 +3189,8 @@
         </p:nvSpPr>
         <p:spPr>
           <a:xfrm>
-            <a:off x="731520" y="3200400"/>
-            <a:ext cx="10698480" cy="731520"/>
+            <a:off x="731520" y="2834640"/>
+            <a:ext cx="10698480" cy="640080"/>
           </a:xfrm>
           <a:prstGeom prst="rect">
             <a:avLst/>
@@ -3223,7 +3225,7 @@
         <p:spPr>
           <a:xfrm>
             <a:off x="731520" y="5029200"/>
-            <a:ext cx="10698480" cy="1097280"/>
+            <a:ext cx="10698480" cy="1188720"/>
           </a:xfrm>
           <a:prstGeom prst="rect">
             <a:avLst/>
@@ -3264,7 +3266,7 @@
                 </a:solidFill>
                 <a:latin typeface="Calibri"/>
               </a:rPr>
-              <a:t>• Projet ML PoC — fork du template `thom1100/ml-poc-project`</a:t>
+              <a:t>• Projet ML PoC — fork du template thom1100/ml-poc-project</a:t>
             </a:r>
           </a:p>
           <a:p>
@@ -3280,7 +3282,7 @@
                 </a:solidFill>
                 <a:latin typeface="Calibri"/>
               </a:rPr>
-              <a:t>• Repo : https://github.com/manechcarriou-lab/ml-poc-project</a:t>
+              <a:t>• Repo : github.com/manechcarriou-lab/ml-poc-project</a:t>
             </a:r>
           </a:p>
         </p:txBody>
@@ -3312,7 +3314,7 @@
         <p:spPr>
           <a:xfrm>
             <a:off x="0" y="0"/>
-            <a:ext cx="12191695" cy="822960"/>
+            <a:ext cx="12191695" cy="777240"/>
           </a:xfrm>
           <a:prstGeom prst="rect">
             <a:avLst/>
@@ -3354,8 +3356,8 @@
         </p:nvSpPr>
         <p:spPr>
           <a:xfrm>
-            <a:off x="457200" y="164592"/>
-            <a:ext cx="11247120" cy="548640"/>
+            <a:off x="457200" y="146304"/>
+            <a:ext cx="11247120" cy="502920"/>
           </a:xfrm>
           <a:prstGeom prst="rect">
             <a:avLst/>
@@ -3370,7 +3372,7 @@
           <a:p>
             <a:pPr algn="l"/>
             <a:r>
-              <a:rPr sz="2600" b="1">
+              <a:rPr sz="2400" b="1">
                 <a:solidFill>
                   <a:srgbClr val="FFFFFF"/>
                 </a:solidFill>
@@ -3389,8 +3391,8 @@
         </p:nvSpPr>
         <p:spPr>
           <a:xfrm>
-            <a:off x="457200" y="868680"/>
-            <a:ext cx="11247120" cy="365760"/>
+            <a:off x="457200" y="566928"/>
+            <a:ext cx="11247120" cy="274320"/>
           </a:xfrm>
           <a:prstGeom prst="rect">
             <a:avLst/>
@@ -3405,9 +3407,9 @@
           <a:p>
             <a:pPr algn="l"/>
             <a:r>
-              <a:rPr sz="1400" b="0">
-                <a:solidFill>
-                  <a:srgbClr val="7F8C8D"/>
+              <a:rPr sz="1200" b="0">
+                <a:solidFill>
+                  <a:srgbClr val="CFDCE7"/>
                 </a:solidFill>
                 <a:latin typeface="Calibri"/>
               </a:rPr>
@@ -3424,8 +3426,8 @@
         </p:nvSpPr>
         <p:spPr>
           <a:xfrm>
-            <a:off x="10698480" y="228600"/>
-            <a:ext cx="1188720" cy="457200"/>
+            <a:off x="10698480" y="201168"/>
+            <a:ext cx="1188720" cy="411480"/>
           </a:xfrm>
           <a:prstGeom prst="rect">
             <a:avLst/>
@@ -3440,13 +3442,13 @@
           <a:p>
             <a:pPr algn="r"/>
             <a:r>
-              <a:rPr sz="1200" b="0">
+              <a:rPr sz="1100" b="0">
                 <a:solidFill>
                   <a:srgbClr val="FFFFFF"/>
                 </a:solidFill>
                 <a:latin typeface="Calibri"/>
               </a:rPr>
-              <a:t>10 / 14</a:t>
+              <a:t>10 / 16</a:t>
             </a:r>
           </a:p>
         </p:txBody>
@@ -3459,8 +3461,8 @@
         </p:nvSpPr>
         <p:spPr>
           <a:xfrm>
-            <a:off x="457200" y="1280160"/>
-            <a:ext cx="5486400" cy="4572000"/>
+            <a:off x="365760" y="1005840"/>
+            <a:ext cx="5486400" cy="457200"/>
           </a:xfrm>
           <a:prstGeom prst="rect">
             <a:avLst/>
@@ -3475,7 +3477,7 @@
           <a:p>
             <a:pPr algn="l"/>
             <a:r>
-              <a:rPr sz="1800" b="1">
+              <a:rPr sz="1600" b="1">
                 <a:solidFill>
                   <a:srgbClr val="1F3A5F"/>
                 </a:solidFill>
@@ -3494,8 +3496,8 @@
         </p:nvSpPr>
         <p:spPr>
           <a:xfrm>
-            <a:off x="457200" y="1737360"/>
-            <a:ext cx="5486400" cy="4114800"/>
+            <a:off x="365760" y="1463040"/>
+            <a:ext cx="5486400" cy="4389120"/>
           </a:xfrm>
           <a:prstGeom prst="rect">
             <a:avLst/>
@@ -3510,11 +3512,11 @@
           <a:p>
             <a:pPr algn="l">
               <a:spcAft>
-                <a:spcPts val="600"/>
+                <a:spcPts val="400"/>
               </a:spcAft>
             </a:pPr>
             <a:r>
-              <a:rPr sz="1400">
+              <a:rPr sz="1300">
                 <a:solidFill>
                   <a:srgbClr val="2C3E50"/>
                 </a:solidFill>
@@ -3526,11 +3528,11 @@
           <a:p>
             <a:pPr algn="l">
               <a:spcAft>
-                <a:spcPts val="600"/>
+                <a:spcPts val="400"/>
               </a:spcAft>
             </a:pPr>
             <a:r>
-              <a:rPr sz="1400">
+              <a:rPr sz="1300">
                 <a:solidFill>
                   <a:srgbClr val="2C3E50"/>
                 </a:solidFill>
@@ -3542,11 +3544,11 @@
           <a:p>
             <a:pPr algn="l">
               <a:spcAft>
-                <a:spcPts val="600"/>
+                <a:spcPts val="400"/>
               </a:spcAft>
             </a:pPr>
             <a:r>
-              <a:rPr sz="1400">
+              <a:rPr sz="1300">
                 <a:solidFill>
                   <a:srgbClr val="2C3E50"/>
                 </a:solidFill>
@@ -3558,33 +3560,17 @@
           <a:p>
             <a:pPr algn="l">
               <a:spcAft>
-                <a:spcPts val="600"/>
+                <a:spcPts val="400"/>
               </a:spcAft>
             </a:pPr>
             <a:r>
-              <a:rPr sz="1400">
+              <a:rPr sz="1300">
                 <a:solidFill>
                   <a:srgbClr val="2C3E50"/>
                 </a:solidFill>
                 <a:latin typeface="Calibri"/>
               </a:rPr>
-              <a:t>• 15 trials Optuna ≈ 100 trials Grid</a:t>
-            </a:r>
-          </a:p>
-          <a:p>
-            <a:pPr algn="l">
-              <a:spcAft>
-                <a:spcPts val="600"/>
-              </a:spcAft>
-            </a:pPr>
-            <a:r>
-              <a:rPr sz="1400">
-                <a:solidFill>
-                  <a:srgbClr val="2C3E50"/>
-                </a:solidFill>
-                <a:latin typeface="Calibri"/>
-              </a:rPr>
-              <a:t>• Convergence rapide sur des espaces de 5-10 hyperparamètres</a:t>
+              <a:t>• 15 trials Optuna ≈ 100 trials Grid Search</a:t>
             </a:r>
           </a:p>
         </p:txBody>
@@ -3597,8 +3583,8 @@
         </p:nvSpPr>
         <p:spPr>
           <a:xfrm>
-            <a:off x="6217920" y="1280160"/>
-            <a:ext cx="5486400" cy="4572000"/>
+            <a:off x="6309360" y="1005840"/>
+            <a:ext cx="5486400" cy="457200"/>
           </a:xfrm>
           <a:prstGeom prst="rect">
             <a:avLst/>
@@ -3613,7 +3599,7 @@
           <a:p>
             <a:pPr algn="l"/>
             <a:r>
-              <a:rPr sz="1800" b="1">
+              <a:rPr sz="1600" b="1">
                 <a:solidFill>
                   <a:srgbClr val="1F3A5F"/>
                 </a:solidFill>
@@ -3632,8 +3618,8 @@
         </p:nvSpPr>
         <p:spPr>
           <a:xfrm>
-            <a:off x="6217920" y="1737360"/>
-            <a:ext cx="5486400" cy="4114800"/>
+            <a:off x="6309360" y="1463040"/>
+            <a:ext cx="5486400" cy="4389120"/>
           </a:xfrm>
           <a:prstGeom prst="rect">
             <a:avLst/>
@@ -3648,81 +3634,100 @@
           <a:p>
             <a:pPr algn="l">
               <a:spcAft>
-                <a:spcPts val="600"/>
+                <a:spcPts val="400"/>
               </a:spcAft>
             </a:pPr>
             <a:r>
-              <a:rPr sz="1400">
+              <a:rPr sz="1300">
                 <a:solidFill>
                   <a:srgbClr val="2C3E50"/>
                 </a:solidFill>
                 <a:latin typeface="Calibri"/>
               </a:rPr>
-              <a:t>• Trace persistante des essais</a:t>
+              <a:t>• Trace persistante des essais (comparable J+15)</a:t>
             </a:r>
           </a:p>
           <a:p>
             <a:pPr algn="l">
               <a:spcAft>
-                <a:spcPts val="600"/>
+                <a:spcPts val="400"/>
               </a:spcAft>
             </a:pPr>
             <a:r>
-              <a:rPr sz="1400">
+              <a:rPr sz="1300">
                 <a:solidFill>
                   <a:srgbClr val="2C3E50"/>
                 </a:solidFill>
                 <a:latin typeface="Calibri"/>
               </a:rPr>
-              <a:t>• Compare 2 runs séparés de plusieurs jours</a:t>
+              <a:t>• Log auto : params + métriques + artefacts</a:t>
             </a:r>
           </a:p>
           <a:p>
             <a:pPr algn="l">
               <a:spcAft>
-                <a:spcPts val="600"/>
+                <a:spcPts val="400"/>
               </a:spcAft>
             </a:pPr>
             <a:r>
-              <a:rPr sz="1400">
+              <a:rPr sz="1300">
                 <a:solidFill>
                   <a:srgbClr val="2C3E50"/>
                 </a:solidFill>
                 <a:latin typeface="Calibri"/>
               </a:rPr>
-              <a:t>• Log auto : params + métriques + artefacts</a:t>
+              <a:t>• UI web : mlflow ui --backend-store-uri ./mlruns</a:t>
             </a:r>
           </a:p>
           <a:p>
             <a:pPr algn="l">
               <a:spcAft>
-                <a:spcPts val="600"/>
+                <a:spcPts val="400"/>
               </a:spcAft>
             </a:pPr>
             <a:r>
-              <a:rPr sz="1400">
+              <a:rPr sz="1300">
                 <a:solidFill>
                   <a:srgbClr val="2C3E50"/>
                 </a:solidFill>
                 <a:latin typeface="Calibri"/>
               </a:rPr>
-              <a:t>• UI web : mlflow ui --backend-store-uri ./mlruns</a:t>
-            </a:r>
-          </a:p>
-          <a:p>
-            <a:pPr algn="l">
-              <a:spcAft>
-                <a:spcPts val="600"/>
-              </a:spcAft>
-            </a:pPr>
-            <a:r>
-              <a:rPr sz="1400">
-                <a:solidFill>
-                  <a:srgbClr val="2C3E50"/>
-                </a:solidFill>
-                <a:latin typeface="Calibri"/>
-              </a:rPr>
               <a:t>• Artefact = le joblib du pipeline final</a:t>
+            </a:r>
+          </a:p>
+        </p:txBody>
+      </p:sp>
+      <p:sp>
+        <p:nvSpPr>
+          <p:cNvPr id="10" name="TextBox 9"/>
+          <p:cNvSpPr txBox="1"/>
+          <p:nvPr/>
+        </p:nvSpPr>
+        <p:spPr>
+          <a:xfrm>
+            <a:off x="457200" y="5943600"/>
+            <a:ext cx="11247120" cy="457200"/>
+          </a:xfrm>
+          <a:prstGeom prst="rect">
+            <a:avLst/>
+          </a:prstGeom>
+          <a:noFill/>
+        </p:spPr>
+        <p:txBody>
+          <a:bodyPr wrap="square">
+            <a:spAutoFit/>
+          </a:bodyPr>
+          <a:lstStyle/>
+          <a:p>
+            <a:pPr algn="ctr"/>
+            <a:r>
+              <a:rPr sz="1200" b="0">
+                <a:solidFill>
+                  <a:srgbClr val="E67E22"/>
+                </a:solidFill>
+                <a:latin typeface="Calibri"/>
+              </a:rPr>
+              <a:t>→ 52 runs trackés dans cette étude (3 studies + 45 trials + 3 finals + extras)</a:t>
             </a:r>
           </a:p>
         </p:txBody>
@@ -3754,7 +3759,7 @@
         <p:spPr>
           <a:xfrm>
             <a:off x="0" y="0"/>
-            <a:ext cx="12191695" cy="822960"/>
+            <a:ext cx="12191695" cy="777240"/>
           </a:xfrm>
           <a:prstGeom prst="rect">
             <a:avLst/>
@@ -3796,8 +3801,8 @@
         </p:nvSpPr>
         <p:spPr>
           <a:xfrm>
-            <a:off x="457200" y="164592"/>
-            <a:ext cx="11247120" cy="548640"/>
+            <a:off x="457200" y="146304"/>
+            <a:ext cx="11247120" cy="502920"/>
           </a:xfrm>
           <a:prstGeom prst="rect">
             <a:avLst/>
@@ -3812,13 +3817,13 @@
           <a:p>
             <a:pPr algn="l"/>
             <a:r>
-              <a:rPr sz="2600" b="1">
+              <a:rPr sz="2400" b="1">
                 <a:solidFill>
                   <a:srgbClr val="FFFFFF"/>
                 </a:solidFill>
                 <a:latin typeface="Calibri"/>
               </a:rPr>
-              <a:t>Résultats</a:t>
+              <a:t>Résultats finaux</a:t>
             </a:r>
           </a:p>
         </p:txBody>
@@ -3831,8 +3836,8 @@
         </p:nvSpPr>
         <p:spPr>
           <a:xfrm>
-            <a:off x="457200" y="868680"/>
-            <a:ext cx="11247120" cy="365760"/>
+            <a:off x="457200" y="566928"/>
+            <a:ext cx="11247120" cy="274320"/>
           </a:xfrm>
           <a:prstGeom prst="rect">
             <a:avLst/>
@@ -3847,13 +3852,13 @@
           <a:p>
             <a:pPr algn="l"/>
             <a:r>
-              <a:rPr sz="1400" b="0">
-                <a:solidFill>
-                  <a:srgbClr val="7F8C8D"/>
-                </a:solidFill>
-                <a:latin typeface="Calibri"/>
-              </a:rPr>
-              <a:t>Test set 2 466 sessions, 15 trials par famille</a:t>
+              <a:rPr sz="1200" b="0">
+                <a:solidFill>
+                  <a:srgbClr val="CFDCE7"/>
+                </a:solidFill>
+                <a:latin typeface="Calibri"/>
+              </a:rPr>
+              <a:t>Test set 2 466 sessions — pipeline avec threshold tuning intégré</a:t>
             </a:r>
           </a:p>
         </p:txBody>
@@ -3866,8 +3871,8 @@
         </p:nvSpPr>
         <p:spPr>
           <a:xfrm>
-            <a:off x="10698480" y="228600"/>
-            <a:ext cx="1188720" cy="457200"/>
+            <a:off x="10698480" y="201168"/>
+            <a:ext cx="1188720" cy="411480"/>
           </a:xfrm>
           <a:prstGeom prst="rect">
             <a:avLst/>
@@ -3882,13 +3887,13 @@
           <a:p>
             <a:pPr algn="r"/>
             <a:r>
-              <a:rPr sz="1200" b="0">
+              <a:rPr sz="1100" b="0">
                 <a:solidFill>
                   <a:srgbClr val="FFFFFF"/>
                 </a:solidFill>
                 <a:latin typeface="Calibri"/>
               </a:rPr>
-              <a:t>11 / 14</a:t>
+              <a:t>11 / 16</a:t>
             </a:r>
           </a:p>
         </p:txBody>
@@ -3902,8 +3907,8 @@
           <p:nvPr/>
         </p:nvGraphicFramePr>
         <p:xfrm>
-          <a:off x="457200" y="1280160"/>
-          <a:ext cx="11247120" cy="2560320"/>
+          <a:off x="274320" y="1005840"/>
+          <a:ext cx="11612880" cy="2560320"/>
         </p:xfrm>
         <a:graphic>
           <a:graphicData uri="http://schemas.openxmlformats.org/drawingml/2006/table">
@@ -3912,12 +3917,13 @@
                 <a:tableStyleId>{5C22544A-7EE6-4342-B048-85BDC9FD1C3A}</a:tableStyleId>
               </a:tblPr>
               <a:tblGrid>
-                <a:gridCol w="1874520"/>
-                <a:gridCol w="1874520"/>
-                <a:gridCol w="1874520"/>
-                <a:gridCol w="1874520"/>
-                <a:gridCol w="1874520"/>
-                <a:gridCol w="1874520"/>
+                <a:gridCol w="1658982"/>
+                <a:gridCol w="1658982"/>
+                <a:gridCol w="1658982"/>
+                <a:gridCol w="1658982"/>
+                <a:gridCol w="1658982"/>
+                <a:gridCol w="1658982"/>
+                <a:gridCol w="1658988"/>
               </a:tblGrid>
               <a:tr h="640080">
                 <a:tc>
@@ -3927,7 +3933,7 @@
                     <a:p>
                       <a:pPr algn="ctr"/>
                       <a:r>
-                        <a:rPr b="1" sz="1300">
+                        <a:rPr b="1" sz="1100">
                           <a:solidFill>
                             <a:srgbClr val="FFFFFF"/>
                           </a:solidFill>
@@ -3949,12 +3955,12 @@
                     <a:p>
                       <a:pPr algn="ctr"/>
                       <a:r>
-                        <a:rPr b="1" sz="1300">
+                        <a:rPr b="1" sz="1100">
                           <a:solidFill>
                             <a:srgbClr val="FFFFFF"/>
                           </a:solidFill>
                         </a:rPr>
-                        <a:t>CV F1</a:t>
+                        <a:t>Encoder</a:t>
                       </a:r>
                     </a:p>
                   </a:txBody>
@@ -3971,12 +3977,12 @@
                     <a:p>
                       <a:pPr algn="ctr"/>
                       <a:r>
-                        <a:rPr b="1" sz="1300">
+                        <a:rPr b="1" sz="1100">
                           <a:solidFill>
                             <a:srgbClr val="FFFFFF"/>
                           </a:solidFill>
                         </a:rPr>
-                        <a:t>Test F1</a:t>
+                        <a:t>Threshold</a:t>
                       </a:r>
                     </a:p>
                   </a:txBody>
@@ -3993,11 +3999,33 @@
                     <a:p>
                       <a:pPr algn="ctr"/>
                       <a:r>
-                        <a:rPr b="1" sz="1300">
+                        <a:rPr b="1" sz="1100">
                           <a:solidFill>
                             <a:srgbClr val="FFFFFF"/>
                           </a:solidFill>
                         </a:rPr>
+                        <a:t>F1</a:t>
+                      </a:r>
+                    </a:p>
+                  </a:txBody>
+                  <a:tcPr>
+                    <a:solidFill>
+                      <a:srgbClr val="1F3A5F"/>
+                    </a:solidFill>
+                  </a:tcPr>
+                </a:tc>
+                <a:tc>
+                  <a:txBody>
+                    <a:bodyPr/>
+                    <a:lstStyle/>
+                    <a:p>
+                      <a:pPr algn="ctr"/>
+                      <a:r>
+                        <a:rPr b="1" sz="1100">
+                          <a:solidFill>
+                            <a:srgbClr val="FFFFFF"/>
+                          </a:solidFill>
+                        </a:rPr>
                         <a:t>Precision</a:t>
                       </a:r>
                     </a:p>
@@ -4015,7 +4043,7 @@
                     <a:p>
                       <a:pPr algn="ctr"/>
                       <a:r>
-                        <a:rPr b="1" sz="1300">
+                        <a:rPr b="1" sz="1100">
                           <a:solidFill>
                             <a:srgbClr val="FFFFFF"/>
                           </a:solidFill>
@@ -4037,7 +4065,7 @@
                     <a:p>
                       <a:pPr algn="ctr"/>
                       <a:r>
-                        <a:rPr b="1" sz="1300">
+                        <a:rPr b="1" sz="1100">
                           <a:solidFill>
                             <a:srgbClr val="FFFFFF"/>
                           </a:solidFill>
@@ -4061,7 +4089,7 @@
                     <a:p>
                       <a:pPr algn="l"/>
                       <a:r>
-                        <a:rPr sz="1200" b="1">
+                        <a:rPr sz="1100" b="1">
                           <a:solidFill>
                             <a:srgbClr val="2C3E50"/>
                           </a:solidFill>
@@ -4083,12 +4111,12 @@
                     <a:p>
                       <a:pPr algn="ctr"/>
                       <a:r>
-                        <a:rPr sz="1200">
+                        <a:rPr sz="1100">
                           <a:solidFill>
                             <a:srgbClr val="2C3E50"/>
                           </a:solidFill>
                         </a:rPr>
-                        <a:t>0.6737</a:t>
+                        <a:t>OneHot</a:t>
                       </a:r>
                     </a:p>
                   </a:txBody>
@@ -4105,12 +4133,12 @@
                     <a:p>
                       <a:pPr algn="ctr"/>
                       <a:r>
-                        <a:rPr sz="1200">
+                        <a:rPr sz="1100">
                           <a:solidFill>
                             <a:srgbClr val="2C3E50"/>
                           </a:solidFill>
                         </a:rPr>
-                        <a:t>0.5994</a:t>
+                        <a:t>0.244</a:t>
                       </a:r>
                     </a:p>
                   </a:txBody>
@@ -4127,12 +4155,12 @@
                     <a:p>
                       <a:pPr algn="ctr"/>
                       <a:r>
-                        <a:rPr sz="1200">
+                        <a:rPr sz="1100">
                           <a:solidFill>
                             <a:srgbClr val="2C3E50"/>
                           </a:solidFill>
                         </a:rPr>
-                        <a:t>0.7206</a:t>
+                        <a:t>0.6426</a:t>
                       </a:r>
                     </a:p>
                   </a:txBody>
@@ -4149,12 +4177,12 @@
                     <a:p>
                       <a:pPr algn="ctr"/>
                       <a:r>
-                        <a:rPr sz="1200">
+                        <a:rPr sz="1100">
                           <a:solidFill>
                             <a:srgbClr val="2C3E50"/>
                           </a:solidFill>
                         </a:rPr>
-                        <a:t>0.5131</a:t>
+                        <a:t>0.5786</a:t>
                       </a:r>
                     </a:p>
                   </a:txBody>
@@ -4171,7 +4199,29 @@
                     <a:p>
                       <a:pPr algn="ctr"/>
                       <a:r>
-                        <a:rPr sz="1200">
+                        <a:rPr sz="1100">
+                          <a:solidFill>
+                            <a:srgbClr val="2C3E50"/>
+                          </a:solidFill>
+                        </a:rPr>
+                        <a:t>0.7225</a:t>
+                      </a:r>
+                    </a:p>
+                  </a:txBody>
+                  <a:tcPr>
+                    <a:solidFill>
+                      <a:srgbClr val="FFFFFF"/>
+                    </a:solidFill>
+                  </a:tcPr>
+                </a:tc>
+                <a:tc>
+                  <a:txBody>
+                    <a:bodyPr/>
+                    <a:lstStyle/>
+                    <a:p>
+                      <a:pPr algn="ctr"/>
+                      <a:r>
+                        <a:rPr sz="1100">
                           <a:solidFill>
                             <a:srgbClr val="2C3E50"/>
                           </a:solidFill>
@@ -4195,7 +4245,7 @@
                     <a:p>
                       <a:pPr algn="l"/>
                       <a:r>
-                        <a:rPr sz="1200" b="1">
+                        <a:rPr sz="1100" b="1">
                           <a:solidFill>
                             <a:srgbClr val="2C3E50"/>
                           </a:solidFill>
@@ -4217,12 +4267,12 @@
                     <a:p>
                       <a:pPr algn="ctr"/>
                       <a:r>
-                        <a:rPr sz="1200">
+                        <a:rPr sz="1100">
                           <a:solidFill>
                             <a:srgbClr val="2C3E50"/>
                           </a:solidFill>
                         </a:rPr>
-                        <a:t>0.6843</a:t>
+                        <a:t>OneHot</a:t>
                       </a:r>
                     </a:p>
                   </a:txBody>
@@ -4239,12 +4289,12 @@
                     <a:p>
                       <a:pPr algn="ctr"/>
                       <a:r>
-                        <a:rPr sz="1200">
+                        <a:rPr sz="1100">
                           <a:solidFill>
                             <a:srgbClr val="2C3E50"/>
                           </a:solidFill>
                         </a:rPr>
-                        <a:t>0.6292</a:t>
+                        <a:t>0.360</a:t>
                       </a:r>
                     </a:p>
                   </a:txBody>
@@ -4261,12 +4311,12 @@
                     <a:p>
                       <a:pPr algn="ctr"/>
                       <a:r>
-                        <a:rPr sz="1200">
+                        <a:rPr sz="1100">
                           <a:solidFill>
                             <a:srgbClr val="2C3E50"/>
                           </a:solidFill>
                         </a:rPr>
-                        <a:t>0.7500</a:t>
+                        <a:t>0.6683</a:t>
                       </a:r>
                     </a:p>
                   </a:txBody>
@@ -4283,12 +4333,12 @@
                     <a:p>
                       <a:pPr algn="ctr"/>
                       <a:r>
-                        <a:rPr sz="1200">
+                        <a:rPr sz="1100">
                           <a:solidFill>
                             <a:srgbClr val="2C3E50"/>
                           </a:solidFill>
                         </a:rPr>
-                        <a:t>0.5419</a:t>
+                        <a:t>0.6403</a:t>
                       </a:r>
                     </a:p>
                   </a:txBody>
@@ -4305,12 +4355,34 @@
                     <a:p>
                       <a:pPr algn="ctr"/>
                       <a:r>
-                        <a:rPr sz="1200">
+                        <a:rPr sz="1100">
                           <a:solidFill>
                             <a:srgbClr val="2C3E50"/>
                           </a:solidFill>
                         </a:rPr>
-                        <a:t>0.9202</a:t>
+                        <a:t>0.6990</a:t>
+                      </a:r>
+                    </a:p>
+                  </a:txBody>
+                  <a:tcPr>
+                    <a:solidFill>
+                      <a:srgbClr val="F4F6F8"/>
+                    </a:solidFill>
+                  </a:tcPr>
+                </a:tc>
+                <a:tc>
+                  <a:txBody>
+                    <a:bodyPr/>
+                    <a:lstStyle/>
+                    <a:p>
+                      <a:pPr algn="ctr"/>
+                      <a:r>
+                        <a:rPr sz="1100">
+                          <a:solidFill>
+                            <a:srgbClr val="2C3E50"/>
+                          </a:solidFill>
+                        </a:rPr>
+                        <a:t>0.9204</a:t>
                       </a:r>
                     </a:p>
                   </a:txBody>
@@ -4329,7 +4401,7 @@
                     <a:p>
                       <a:pPr algn="l"/>
                       <a:r>
-                        <a:rPr sz="1200" b="1">
+                        <a:rPr sz="1100" b="1">
                           <a:solidFill>
                             <a:srgbClr val="2C3E50"/>
                           </a:solidFill>
@@ -4351,12 +4423,12 @@
                     <a:p>
                       <a:pPr algn="ctr"/>
                       <a:r>
-                        <a:rPr sz="1200">
+                        <a:rPr sz="1100">
                           <a:solidFill>
                             <a:srgbClr val="2C3E50"/>
                           </a:solidFill>
                         </a:rPr>
-                        <a:t>0.6858</a:t>
+                        <a:t>Ordinal</a:t>
                       </a:r>
                     </a:p>
                   </a:txBody>
@@ -4373,12 +4445,12 @@
                     <a:p>
                       <a:pPr algn="ctr"/>
                       <a:r>
-                        <a:rPr sz="1200">
+                        <a:rPr sz="1100">
                           <a:solidFill>
                             <a:srgbClr val="2C3E50"/>
                           </a:solidFill>
                         </a:rPr>
-                        <a:t>0.6542</a:t>
+                        <a:t>0.305</a:t>
                       </a:r>
                     </a:p>
                   </a:txBody>
@@ -4395,12 +4467,12 @@
                     <a:p>
                       <a:pPr algn="ctr"/>
                       <a:r>
-                        <a:rPr sz="1200">
+                        <a:rPr sz="1100">
                           <a:solidFill>
                             <a:srgbClr val="2C3E50"/>
                           </a:solidFill>
                         </a:rPr>
-                        <a:t>0.7238</a:t>
+                        <a:t>0.6731</a:t>
                       </a:r>
                     </a:p>
                   </a:txBody>
@@ -4417,12 +4489,12 @@
                     <a:p>
                       <a:pPr algn="ctr"/>
                       <a:r>
-                        <a:rPr sz="1200">
+                        <a:rPr sz="1100">
                           <a:solidFill>
                             <a:srgbClr val="2C3E50"/>
                           </a:solidFill>
                         </a:rPr>
-                        <a:t>0.5969</a:t>
+                        <a:t>0.6203</a:t>
                       </a:r>
                     </a:p>
                   </a:txBody>
@@ -4439,12 +4511,34 @@
                     <a:p>
                       <a:pPr algn="ctr"/>
                       <a:r>
-                        <a:rPr sz="1200">
+                        <a:rPr sz="1100">
                           <a:solidFill>
                             <a:srgbClr val="2C3E50"/>
                           </a:solidFill>
                         </a:rPr>
-                        <a:t>0.9303</a:t>
+                        <a:t>0.7356</a:t>
+                      </a:r>
+                    </a:p>
+                  </a:txBody>
+                  <a:tcPr>
+                    <a:solidFill>
+                      <a:srgbClr val="FFFFFF"/>
+                    </a:solidFill>
+                  </a:tcPr>
+                </a:tc>
+                <a:tc>
+                  <a:txBody>
+                    <a:bodyPr/>
+                    <a:lstStyle/>
+                    <a:p>
+                      <a:pPr algn="ctr"/>
+                      <a:r>
+                        <a:rPr sz="1100">
+                          <a:solidFill>
+                            <a:srgbClr val="2C3E50"/>
+                          </a:solidFill>
+                        </a:rPr>
+                        <a:t>0.9292</a:t>
                       </a:r>
                     </a:p>
                   </a:txBody>
@@ -4467,8 +4561,8 @@
         </p:nvSpPr>
         <p:spPr>
           <a:xfrm>
-            <a:off x="3200400" y="4297680"/>
-            <a:ext cx="5760720" cy="1097280"/>
+            <a:off x="3200400" y="3840480"/>
+            <a:ext cx="5760720" cy="914400"/>
           </a:xfrm>
           <a:prstGeom prst="roundRect">
             <a:avLst/>
@@ -4500,12 +4594,12 @@
           <a:p>
             <a:pPr algn="ctr"/>
             <a:r>
-              <a:rPr sz="1800" b="1">
+              <a:rPr sz="1600" b="1">
                 <a:solidFill>
                   <a:srgbClr val="FFFFFF"/>
                 </a:solidFill>
               </a:rPr>
-              <a:t>Critère atteint — F1 &gt; 0.60 visé, 0.6542 obtenu (XGBoost) → +9 %</a:t>
+              <a:t>Critère atteint — F1 &gt; 0.60 visé, 0.6731 obtenu (XGBoost) → +12 %</a:t>
             </a:r>
           </a:p>
         </p:txBody>
@@ -4518,8 +4612,8 @@
         </p:nvSpPr>
         <p:spPr>
           <a:xfrm>
-            <a:off x="731520" y="5577840"/>
-            <a:ext cx="10698480" cy="914400"/>
+            <a:off x="457200" y="5029200"/>
+            <a:ext cx="11247120" cy="548640"/>
           </a:xfrm>
           <a:prstGeom prst="rect">
             <a:avLst/>
@@ -4540,7 +4634,7 @@
                 </a:solidFill>
                 <a:latin typeface="Calibri"/>
               </a:rPr>
-              <a:t>Lecture business : sur 100 sessions classées 'achat probable', ~72 sont vraiment des acheteurs (precision 0.72).</a:t>
+              <a:t>Lecture business : sur 100 acheteurs réels, on en attrape 74 (recall 0.74). On gagne +14 pts vs threshold 0.5.</a:t>
             </a:r>
           </a:p>
         </p:txBody>
@@ -4572,7 +4666,7 @@
         <p:spPr>
           <a:xfrm>
             <a:off x="0" y="0"/>
-            <a:ext cx="12191695" cy="822960"/>
+            <a:ext cx="12191695" cy="777240"/>
           </a:xfrm>
           <a:prstGeom prst="rect">
             <a:avLst/>
@@ -4614,8 +4708,8 @@
         </p:nvSpPr>
         <p:spPr>
           <a:xfrm>
-            <a:off x="457200" y="164592"/>
-            <a:ext cx="11247120" cy="548640"/>
+            <a:off x="457200" y="146304"/>
+            <a:ext cx="11247120" cy="502920"/>
           </a:xfrm>
           <a:prstGeom prst="rect">
             <a:avLst/>
@@ -4630,13 +4724,13 @@
           <a:p>
             <a:pPr algn="l"/>
             <a:r>
-              <a:rPr sz="2600" b="1">
+              <a:rPr sz="2400" b="1">
                 <a:solidFill>
                   <a:srgbClr val="FFFFFF"/>
                 </a:solidFill>
                 <a:latin typeface="Calibri"/>
               </a:rPr>
-              <a:t>Lecture business du modèle</a:t>
+              <a:t>Résultats — courbes ROC et Precision-Recall</a:t>
             </a:r>
           </a:p>
         </p:txBody>
@@ -4649,8 +4743,8 @@
         </p:nvSpPr>
         <p:spPr>
           <a:xfrm>
-            <a:off x="457200" y="868680"/>
-            <a:ext cx="11247120" cy="365760"/>
+            <a:off x="457200" y="566928"/>
+            <a:ext cx="11247120" cy="274320"/>
           </a:xfrm>
           <a:prstGeom prst="rect">
             <a:avLst/>
@@ -4665,13 +4759,13 @@
           <a:p>
             <a:pPr algn="l"/>
             <a:r>
-              <a:rPr sz="1400" b="0">
-                <a:solidFill>
-                  <a:srgbClr val="7F8C8D"/>
-                </a:solidFill>
-                <a:latin typeface="Calibri"/>
-              </a:rPr>
-              <a:t>XGBoost en exploitation</a:t>
+              <a:rPr sz="1200" b="0">
+                <a:solidFill>
+                  <a:srgbClr val="CFDCE7"/>
+                </a:solidFill>
+                <a:latin typeface="Calibri"/>
+              </a:rPr>
+              <a:t>Comparaison des 3 modèles sur le test</a:t>
             </a:r>
           </a:p>
         </p:txBody>
@@ -4684,8 +4778,8 @@
         </p:nvSpPr>
         <p:spPr>
           <a:xfrm>
-            <a:off x="10698480" y="228600"/>
-            <a:ext cx="1188720" cy="457200"/>
+            <a:off x="10698480" y="201168"/>
+            <a:ext cx="1188720" cy="411480"/>
           </a:xfrm>
           <a:prstGeom prst="rect">
             <a:avLst/>
@@ -4700,27 +4794,75 @@
           <a:p>
             <a:pPr algn="r"/>
             <a:r>
-              <a:rPr sz="1200" b="0">
+              <a:rPr sz="1100" b="0">
                 <a:solidFill>
                   <a:srgbClr val="FFFFFF"/>
                 </a:solidFill>
                 <a:latin typeface="Calibri"/>
               </a:rPr>
-              <a:t>12 / 14</a:t>
-            </a:r>
-          </a:p>
-        </p:txBody>
-      </p:sp>
-      <p:sp>
-        <p:nvSpPr>
-          <p:cNvPr id="6" name="TextBox 5"/>
+              <a:t>12 / 16</a:t>
+            </a:r>
+          </a:p>
+        </p:txBody>
+      </p:sp>
+      <p:pic>
+        <p:nvPicPr>
+          <p:cNvPr id="6" name="Picture 5" descr="roc_curves.png"/>
+          <p:cNvPicPr>
+            <a:picLocks noChangeAspect="1"/>
+          </p:cNvPicPr>
+          <p:nvPr/>
+        </p:nvPicPr>
+        <p:blipFill>
+          <a:blip r:embed="rId2"/>
+          <a:stretch>
+            <a:fillRect/>
+          </a:stretch>
+        </p:blipFill>
+        <p:spPr>
+          <a:xfrm>
+            <a:off x="457200" y="1005840"/>
+            <a:ext cx="5669280" cy="4797083"/>
+          </a:xfrm>
+          <a:prstGeom prst="rect">
+            <a:avLst/>
+          </a:prstGeom>
+        </p:spPr>
+      </p:pic>
+      <p:pic>
+        <p:nvPicPr>
+          <p:cNvPr id="7" name="Picture 6" descr="pr_curves.png"/>
+          <p:cNvPicPr>
+            <a:picLocks noChangeAspect="1"/>
+          </p:cNvPicPr>
+          <p:nvPr/>
+        </p:nvPicPr>
+        <p:blipFill>
+          <a:blip r:embed="rId3"/>
+          <a:stretch>
+            <a:fillRect/>
+          </a:stretch>
+        </p:blipFill>
+        <p:spPr>
+          <a:xfrm>
+            <a:off x="6217920" y="1005840"/>
+            <a:ext cx="5669280" cy="4797083"/>
+          </a:xfrm>
+          <a:prstGeom prst="rect">
+            <a:avLst/>
+          </a:prstGeom>
+        </p:spPr>
+      </p:pic>
+      <p:sp>
+        <p:nvSpPr>
+          <p:cNvPr id="8" name="TextBox 7"/>
           <p:cNvSpPr txBox="1"/>
           <p:nvPr/>
         </p:nvSpPr>
         <p:spPr>
           <a:xfrm>
-            <a:off x="731520" y="1280160"/>
-            <a:ext cx="10698480" cy="4572000"/>
+            <a:off x="457200" y="5852160"/>
+            <a:ext cx="11247120" cy="365760"/>
           </a:xfrm>
           <a:prstGeom prst="rect">
             <a:avLst/>
@@ -4733,83 +4875,15 @@
           </a:bodyPr>
           <a:lstStyle/>
           <a:p>
-            <a:pPr algn="l">
-              <a:spcAft>
-                <a:spcPts val="600"/>
-              </a:spcAft>
-            </a:pPr>
-            <a:r>
-              <a:rPr sz="1600">
+            <a:pPr algn="ctr"/>
+            <a:r>
+              <a:rPr sz="1200" b="0">
                 <a:solidFill>
                   <a:srgbClr val="2C3E50"/>
                 </a:solidFill>
                 <a:latin typeface="Calibri"/>
               </a:rPr>
-              <a:t>• Precision = 0.72 → 72 % des sessions ciblées sont vraiment des acheteurs (peu de gaspillage marketing)</a:t>
-            </a:r>
-          </a:p>
-          <a:p>
-            <a:pPr algn="l">
-              <a:spcAft>
-                <a:spcPts val="600"/>
-              </a:spcAft>
-            </a:pPr>
-            <a:r>
-              <a:rPr sz="1600">
-                <a:solidFill>
-                  <a:srgbClr val="2C3E50"/>
-                </a:solidFill>
-                <a:latin typeface="Calibri"/>
-              </a:rPr>
-              <a:t>• Recall = 0.60 → on attrape 60 % des acheteurs réels (on en rate 40 %)</a:t>
-            </a:r>
-          </a:p>
-          <a:p>
-            <a:pPr algn="l">
-              <a:spcAft>
-                <a:spcPts val="600"/>
-              </a:spcAft>
-            </a:pPr>
-            <a:r>
-              <a:rPr sz="1600">
-                <a:solidFill>
-                  <a:srgbClr val="2C3E50"/>
-                </a:solidFill>
-                <a:latin typeface="Calibri"/>
-              </a:rPr>
-              <a:t>• ROC-AUC = 0.93 → excellent ranking : le modèle distingue bien acheteurs et non-acheteurs</a:t>
-            </a:r>
-          </a:p>
-          <a:p>
-            <a:pPr algn="l">
-              <a:spcAft>
-                <a:spcPts val="600"/>
-              </a:spcAft>
-            </a:pPr>
-            <a:r>
-              <a:rPr sz="1600">
-                <a:solidFill>
-                  <a:srgbClr val="2C3E50"/>
-                </a:solidFill>
-                <a:latin typeface="Calibri"/>
-              </a:rPr>
-              <a:t>• Le seuil de 0.5 peut être abaissé pour viser plus de recall (plus d'acheteurs captés, plus de FP)</a:t>
-            </a:r>
-          </a:p>
-          <a:p>
-            <a:pPr algn="l">
-              <a:spcAft>
-                <a:spcPts val="600"/>
-              </a:spcAft>
-            </a:pPr>
-            <a:r>
-              <a:rPr sz="1600">
-                <a:solidFill>
-                  <a:srgbClr val="2C3E50"/>
-                </a:solidFill>
-                <a:latin typeface="Calibri"/>
-              </a:rPr>
-              <a:t>• Le seuil optimal dépend du coût d'une action marketing vs la valeur d'une conversion</a:t>
+              <a:t>ROC : XGBoost domine avec AUC=0.93. PR : précision &gt;0.7 jusqu'à recall ~0.6 — modèle utilisable en pratique.</a:t>
             </a:r>
           </a:p>
         </p:txBody>
@@ -4841,7 +4915,7 @@
         <p:spPr>
           <a:xfrm>
             <a:off x="0" y="0"/>
-            <a:ext cx="12191695" cy="822960"/>
+            <a:ext cx="12191695" cy="777240"/>
           </a:xfrm>
           <a:prstGeom prst="rect">
             <a:avLst/>
@@ -4883,8 +4957,8 @@
         </p:nvSpPr>
         <p:spPr>
           <a:xfrm>
-            <a:off x="457200" y="164592"/>
-            <a:ext cx="11247120" cy="548640"/>
+            <a:off x="457200" y="146304"/>
+            <a:ext cx="11247120" cy="502920"/>
           </a:xfrm>
           <a:prstGeom prst="rect">
             <a:avLst/>
@@ -4899,13 +4973,13 @@
           <a:p>
             <a:pPr algn="l"/>
             <a:r>
-              <a:rPr sz="2600" b="1">
+              <a:rPr sz="2400" b="1">
                 <a:solidFill>
                   <a:srgbClr val="FFFFFF"/>
                 </a:solidFill>
                 <a:latin typeface="Calibri"/>
               </a:rPr>
-              <a:t>Prochaines étapes</a:t>
+              <a:t>Le modèle XGBoost en détail</a:t>
             </a:r>
           </a:p>
         </p:txBody>
@@ -4918,8 +4992,8 @@
         </p:nvSpPr>
         <p:spPr>
           <a:xfrm>
-            <a:off x="457200" y="868680"/>
-            <a:ext cx="11247120" cy="365760"/>
+            <a:off x="457200" y="566928"/>
+            <a:ext cx="11247120" cy="274320"/>
           </a:xfrm>
           <a:prstGeom prst="rect">
             <a:avLst/>
@@ -4934,13 +5008,13 @@
           <a:p>
             <a:pPr algn="l"/>
             <a:r>
-              <a:rPr sz="1400" b="0">
-                <a:solidFill>
-                  <a:srgbClr val="7F8C8D"/>
-                </a:solidFill>
-                <a:latin typeface="Calibri"/>
-              </a:rPr>
-              <a:t>Ce qui reste à faire</a:t>
+              <a:rPr sz="1200" b="0">
+                <a:solidFill>
+                  <a:srgbClr val="CFDCE7"/>
+                </a:solidFill>
+                <a:latin typeface="Calibri"/>
+              </a:rPr>
+              <a:t>Erreurs et features importantes</a:t>
             </a:r>
           </a:p>
         </p:txBody>
@@ -4953,8 +5027,8 @@
         </p:nvSpPr>
         <p:spPr>
           <a:xfrm>
-            <a:off x="10698480" y="228600"/>
-            <a:ext cx="1188720" cy="457200"/>
+            <a:off x="10698480" y="201168"/>
+            <a:ext cx="1188720" cy="411480"/>
           </a:xfrm>
           <a:prstGeom prst="rect">
             <a:avLst/>
@@ -4969,27 +5043,75 @@
           <a:p>
             <a:pPr algn="r"/>
             <a:r>
-              <a:rPr sz="1200" b="0">
+              <a:rPr sz="1100" b="0">
                 <a:solidFill>
                   <a:srgbClr val="FFFFFF"/>
                 </a:solidFill>
                 <a:latin typeface="Calibri"/>
               </a:rPr>
-              <a:t>13 / 14</a:t>
-            </a:r>
-          </a:p>
-        </p:txBody>
-      </p:sp>
-      <p:sp>
-        <p:nvSpPr>
-          <p:cNvPr id="6" name="TextBox 5"/>
+              <a:t>13 / 16</a:t>
+            </a:r>
+          </a:p>
+        </p:txBody>
+      </p:sp>
+      <p:pic>
+        <p:nvPicPr>
+          <p:cNvPr id="6" name="Picture 5" descr="confusion_matrix_xgboost.png"/>
+          <p:cNvPicPr>
+            <a:picLocks noChangeAspect="1"/>
+          </p:cNvPicPr>
+          <p:nvPr/>
+        </p:nvPicPr>
+        <p:blipFill>
+          <a:blip r:embed="rId2"/>
+          <a:stretch>
+            <a:fillRect/>
+          </a:stretch>
+        </p:blipFill>
+        <p:spPr>
+          <a:xfrm>
+            <a:off x="457200" y="1005840"/>
+            <a:ext cx="5120640" cy="4632960"/>
+          </a:xfrm>
+          <a:prstGeom prst="rect">
+            <a:avLst/>
+          </a:prstGeom>
+        </p:spPr>
+      </p:pic>
+      <p:pic>
+        <p:nvPicPr>
+          <p:cNvPr id="7" name="Picture 6" descr="feature_importance_xgb.png"/>
+          <p:cNvPicPr>
+            <a:picLocks noChangeAspect="1"/>
+          </p:cNvPicPr>
+          <p:nvPr/>
+        </p:nvPicPr>
+        <p:blipFill>
+          <a:blip r:embed="rId3"/>
+          <a:stretch>
+            <a:fillRect/>
+          </a:stretch>
+        </p:blipFill>
+        <p:spPr>
+          <a:xfrm>
+            <a:off x="5943600" y="1005840"/>
+            <a:ext cx="5852160" cy="4681728"/>
+          </a:xfrm>
+          <a:prstGeom prst="rect">
+            <a:avLst/>
+          </a:prstGeom>
+        </p:spPr>
+      </p:pic>
+      <p:sp>
+        <p:nvSpPr>
+          <p:cNvPr id="8" name="TextBox 7"/>
           <p:cNvSpPr txBox="1"/>
           <p:nvPr/>
         </p:nvSpPr>
         <p:spPr>
           <a:xfrm>
-            <a:off x="731520" y="1280160"/>
-            <a:ext cx="10698480" cy="5029200"/>
+            <a:off x="457200" y="5852160"/>
+            <a:ext cx="5120640" cy="365760"/>
           </a:xfrm>
           <a:prstGeom prst="rect">
             <a:avLst/>
@@ -5002,83 +5124,50 @@
           </a:bodyPr>
           <a:lstStyle/>
           <a:p>
-            <a:pPr algn="l">
-              <a:spcAft>
-                <a:spcPts val="600"/>
-              </a:spcAft>
-            </a:pPr>
-            <a:r>
-              <a:rPr sz="1700">
-                <a:solidFill>
-                  <a:srgbClr val="2C3E50"/>
-                </a:solidFill>
-                <a:latin typeface="Calibri"/>
-              </a:rPr>
-              <a:t>• src/app.py — Streamlit : contexte business + EDA + démo interactive XGBoost</a:t>
-            </a:r>
-          </a:p>
-          <a:p>
-            <a:pPr algn="l">
-              <a:spcAft>
-                <a:spcPts val="600"/>
-              </a:spcAft>
-            </a:pPr>
-            <a:r>
-              <a:rPr sz="1700">
-                <a:solidFill>
-                  <a:srgbClr val="2C3E50"/>
-                </a:solidFill>
-                <a:latin typeface="Calibri"/>
-              </a:rPr>
-              <a:t>• Threshold tuning — choisir un seuil métier au lieu de 0.5</a:t>
-            </a:r>
-          </a:p>
-          <a:p>
-            <a:pPr algn="l">
-              <a:spcAft>
-                <a:spcPts val="600"/>
-              </a:spcAft>
-            </a:pPr>
-            <a:r>
-              <a:rPr sz="1700">
-                <a:solidFill>
-                  <a:srgbClr val="2C3E50"/>
-                </a:solidFill>
-                <a:latin typeface="Calibri"/>
-              </a:rPr>
-              <a:t>• Ajouter PR-AUC dans le panel de métriques (plus informatif sur dataset déséquilibré)</a:t>
-            </a:r>
-          </a:p>
-          <a:p>
-            <a:pPr algn="l">
-              <a:spcAft>
-                <a:spcPts val="600"/>
-              </a:spcAft>
-            </a:pPr>
-            <a:r>
-              <a:rPr sz="1700">
-                <a:solidFill>
-                  <a:srgbClr val="2C3E50"/>
-                </a:solidFill>
-                <a:latin typeface="Calibri"/>
-              </a:rPr>
-              <a:t>• Tests unitaires sur le pipeline de preprocessing (tests/)</a:t>
-            </a:r>
-          </a:p>
-          <a:p>
-            <a:pPr algn="l">
-              <a:spcAft>
-                <a:spcPts val="600"/>
-              </a:spcAft>
-            </a:pPr>
-            <a:r>
-              <a:rPr sz="1700">
-                <a:solidFill>
-                  <a:srgbClr val="2C3E50"/>
-                </a:solidFill>
-                <a:latin typeface="Calibri"/>
-              </a:rPr>
-              <a:t>• Affiner XGBoost avec un budget Optuna plus large (~50-100 trials)</a:t>
+            <a:pPr algn="ctr"/>
+            <a:r>
+              <a:rPr sz="1100" b="0">
+                <a:solidFill>
+                  <a:srgbClr val="7F8C8D"/>
+                </a:solidFill>
+                <a:latin typeface="Calibri"/>
+              </a:rPr>
+              <a:t>Matrice de confusion (gauche) — TP / FP / FN / TN sur le test set</a:t>
+            </a:r>
+          </a:p>
+        </p:txBody>
+      </p:sp>
+      <p:sp>
+        <p:nvSpPr>
+          <p:cNvPr id="9" name="TextBox 8"/>
+          <p:cNvSpPr txBox="1"/>
+          <p:nvPr/>
+        </p:nvSpPr>
+        <p:spPr>
+          <a:xfrm>
+            <a:off x="5943600" y="5852160"/>
+            <a:ext cx="5852160" cy="365760"/>
+          </a:xfrm>
+          <a:prstGeom prst="rect">
+            <a:avLst/>
+          </a:prstGeom>
+          <a:noFill/>
+        </p:spPr>
+        <p:txBody>
+          <a:bodyPr wrap="square">
+            <a:spAutoFit/>
+          </a:bodyPr>
+          <a:lstStyle/>
+          <a:p>
+            <a:pPr algn="ctr"/>
+            <a:r>
+              <a:rPr sz="1100" b="0">
+                <a:solidFill>
+                  <a:srgbClr val="7F8C8D"/>
+                </a:solidFill>
+                <a:latin typeface="Calibri"/>
+              </a:rPr>
+              <a:t>Top 15 features par importance gain — PageValues domine largement</a:t>
             </a:r>
           </a:p>
         </p:txBody>
@@ -5110,7 +5199,7 @@
         <p:spPr>
           <a:xfrm>
             <a:off x="0" y="0"/>
-            <a:ext cx="12191695" cy="822960"/>
+            <a:ext cx="12191695" cy="777240"/>
           </a:xfrm>
           <a:prstGeom prst="rect">
             <a:avLst/>
@@ -5152,8 +5241,8 @@
         </p:nvSpPr>
         <p:spPr>
           <a:xfrm>
-            <a:off x="457200" y="164592"/>
-            <a:ext cx="11247120" cy="548640"/>
+            <a:off x="457200" y="146304"/>
+            <a:ext cx="11247120" cy="502920"/>
           </a:xfrm>
           <a:prstGeom prst="rect">
             <a:avLst/>
@@ -5168,13 +5257,13 @@
           <a:p>
             <a:pPr algn="l"/>
             <a:r>
-              <a:rPr sz="2600" b="1">
+              <a:rPr sz="2400" b="1">
                 <a:solidFill>
                   <a:srgbClr val="FFFFFF"/>
                 </a:solidFill>
                 <a:latin typeface="Calibri"/>
               </a:rPr>
-              <a:t>À retenir</a:t>
+              <a:t>Threshold tuning intégré au pipeline</a:t>
             </a:r>
           </a:p>
         </p:txBody>
@@ -5187,8 +5276,8 @@
         </p:nvSpPr>
         <p:spPr>
           <a:xfrm>
-            <a:off x="457200" y="868680"/>
-            <a:ext cx="11247120" cy="365760"/>
+            <a:off x="457200" y="566928"/>
+            <a:ext cx="11247120" cy="274320"/>
           </a:xfrm>
           <a:prstGeom prst="rect">
             <a:avLst/>
@@ -5203,13 +5292,13 @@
           <a:p>
             <a:pPr algn="l"/>
             <a:r>
-              <a:rPr sz="1400" b="0">
-                <a:solidFill>
-                  <a:srgbClr val="7F8C8D"/>
-                </a:solidFill>
-                <a:latin typeface="Calibri"/>
-              </a:rPr>
-              <a:t>Synthèse</a:t>
+              <a:rPr sz="1200" b="0">
+                <a:solidFill>
+                  <a:srgbClr val="CFDCE7"/>
+                </a:solidFill>
+                <a:latin typeface="Calibri"/>
+              </a:rPr>
+              <a:t>TunedThresholdClassifierCV — anti-leakage par construction</a:t>
             </a:r>
           </a:p>
         </p:txBody>
@@ -5222,8 +5311,8 @@
         </p:nvSpPr>
         <p:spPr>
           <a:xfrm>
-            <a:off x="10698480" y="228600"/>
-            <a:ext cx="1188720" cy="457200"/>
+            <a:off x="10698480" y="201168"/>
+            <a:ext cx="1188720" cy="411480"/>
           </a:xfrm>
           <a:prstGeom prst="rect">
             <a:avLst/>
@@ -5238,27 +5327,51 @@
           <a:p>
             <a:pPr algn="r"/>
             <a:r>
-              <a:rPr sz="1200" b="0">
+              <a:rPr sz="1100" b="0">
                 <a:solidFill>
                   <a:srgbClr val="FFFFFF"/>
                 </a:solidFill>
                 <a:latin typeface="Calibri"/>
               </a:rPr>
-              <a:t>14 / 14</a:t>
-            </a:r>
-          </a:p>
-        </p:txBody>
-      </p:sp>
-      <p:sp>
-        <p:nvSpPr>
-          <p:cNvPr id="6" name="TextBox 5"/>
+              <a:t>14 / 16</a:t>
+            </a:r>
+          </a:p>
+        </p:txBody>
+      </p:sp>
+      <p:pic>
+        <p:nvPicPr>
+          <p:cNvPr id="6" name="Picture 5" descr="threshold_tuning_xgb.png"/>
+          <p:cNvPicPr>
+            <a:picLocks noChangeAspect="1"/>
+          </p:cNvPicPr>
+          <p:nvPr/>
+        </p:nvPicPr>
+        <p:blipFill>
+          <a:blip r:embed="rId2"/>
+          <a:stretch>
+            <a:fillRect/>
+          </a:stretch>
+        </p:blipFill>
+        <p:spPr>
+          <a:xfrm>
+            <a:off x="1371600" y="1005840"/>
+            <a:ext cx="9418320" cy="5650992"/>
+          </a:xfrm>
+          <a:prstGeom prst="rect">
+            <a:avLst/>
+          </a:prstGeom>
+        </p:spPr>
+      </p:pic>
+      <p:sp>
+        <p:nvSpPr>
+          <p:cNvPr id="7" name="TextBox 6"/>
           <p:cNvSpPr txBox="1"/>
           <p:nvPr/>
         </p:nvSpPr>
         <p:spPr>
           <a:xfrm>
-            <a:off x="731520" y="1280160"/>
-            <a:ext cx="10698480" cy="5029200"/>
+            <a:off x="457200" y="5212080"/>
+            <a:ext cx="11247120" cy="365760"/>
           </a:xfrm>
           <a:prstGeom prst="rect">
             <a:avLst/>
@@ -5271,122 +5384,788 @@
           </a:bodyPr>
           <a:lstStyle/>
           <a:p>
+            <a:pPr algn="ctr"/>
+            <a:r>
+              <a:rPr sz="1200" b="0">
+                <a:solidFill>
+                  <a:srgbClr val="2C3E50"/>
+                </a:solidFill>
+                <a:latin typeface="Calibri"/>
+              </a:rPr>
+              <a:t>Seuil retenu pour XGBoost : 0.305 (appris en CV sur le train). F1 = 0.6731 vs 0.6562 à 0.5.</a:t>
+            </a:r>
+          </a:p>
+        </p:txBody>
+      </p:sp>
+      <p:sp>
+        <p:nvSpPr>
+          <p:cNvPr id="8" name="TextBox 7"/>
+          <p:cNvSpPr txBox="1"/>
+          <p:nvPr/>
+        </p:nvSpPr>
+        <p:spPr>
+          <a:xfrm>
+            <a:off x="457200" y="5760720"/>
+            <a:ext cx="11247120" cy="1005840"/>
+          </a:xfrm>
+          <a:prstGeom prst="rect">
+            <a:avLst/>
+          </a:prstGeom>
+          <a:noFill/>
+        </p:spPr>
+        <p:txBody>
+          <a:bodyPr wrap="square">
+            <a:spAutoFit/>
+          </a:bodyPr>
+          <a:lstStyle/>
+          <a:p>
             <a:pPr algn="l">
               <a:spcAft>
-                <a:spcPts val="600"/>
+                <a:spcPts val="400"/>
               </a:spcAft>
             </a:pPr>
             <a:r>
-              <a:rPr sz="1700">
+              <a:rPr sz="1300">
                 <a:solidFill>
                   <a:srgbClr val="2C3E50"/>
                 </a:solidFill>
                 <a:latin typeface="Calibri"/>
               </a:rPr>
-              <a:t>• Choix dataset : public, business-relevant, déséquilibré (réaliste)</a:t>
+              <a:t>• Chaque modèle wrappé dans TunedThresholdClassifierCV(scoring='f1', cv=5) — fit sur train uniquement</a:t>
             </a:r>
           </a:p>
           <a:p>
             <a:pPr algn="l">
               <a:spcAft>
-                <a:spcPts val="600"/>
+                <a:spcPts val="400"/>
               </a:spcAft>
             </a:pPr>
             <a:r>
-              <a:rPr sz="1700">
+              <a:rPr sz="1300">
                 <a:solidFill>
                   <a:srgbClr val="2C3E50"/>
                 </a:solidFill>
                 <a:latin typeface="Calibri"/>
               </a:rPr>
-              <a:t>• Métrique principale : F1 sur classe positive (imbalanced + coût FP ≈ FN)</a:t>
-            </a:r>
-          </a:p>
+              <a:t>• Gain de +4 à +7 points de F1 selon le modèle, intégré au pipeline production</a:t>
+            </a:r>
+          </a:p>
+        </p:txBody>
+      </p:sp>
+    </p:spTree>
+  </p:cSld>
+  <p:clrMapOvr>
+    <a:masterClrMapping/>
+  </p:clrMapOvr>
+</p:sld>
+</file>
+
+<file path=ppt/slides/slide15.xml><?xml version="1.0" encoding="utf-8"?>
+<p:sld xmlns:a="http://schemas.openxmlformats.org/drawingml/2006/main" xmlns:p="http://schemas.openxmlformats.org/presentationml/2006/main" xmlns:r="http://schemas.openxmlformats.org/officeDocument/2006/relationships">
+  <p:cSld>
+    <p:spTree>
+      <p:nvGrpSpPr>
+        <p:cNvPr id="1" name=""/>
+        <p:cNvGrpSpPr/>
+        <p:nvPr/>
+      </p:nvGrpSpPr>
+      <p:grpSpPr/>
+      <p:sp>
+        <p:nvSpPr>
+          <p:cNvPr id="2" name="Rectangle 1"/>
+          <p:cNvSpPr/>
+          <p:nvPr/>
+        </p:nvSpPr>
+        <p:spPr>
+          <a:xfrm>
+            <a:off x="0" y="0"/>
+            <a:ext cx="12191695" cy="777240"/>
+          </a:xfrm>
+          <a:prstGeom prst="rect">
+            <a:avLst/>
+          </a:prstGeom>
+          <a:solidFill>
+            <a:srgbClr val="1F3A5F"/>
+          </a:solidFill>
+          <a:ln>
+            <a:noFill/>
+          </a:ln>
+        </p:spPr>
+        <p:style>
+          <a:lnRef idx="1">
+            <a:schemeClr val="accent1"/>
+          </a:lnRef>
+          <a:fillRef idx="3">
+            <a:schemeClr val="accent1"/>
+          </a:fillRef>
+          <a:effectRef idx="2">
+            <a:schemeClr val="accent1"/>
+          </a:effectRef>
+          <a:fontRef idx="minor">
+            <a:schemeClr val="lt1"/>
+          </a:fontRef>
+        </p:style>
+        <p:txBody>
+          <a:bodyPr rtlCol="0" anchor="ctr"/>
+          <a:lstStyle/>
+          <a:p>
+            <a:pPr algn="ctr"/>
+          </a:p>
+        </p:txBody>
+      </p:sp>
+      <p:sp>
+        <p:nvSpPr>
+          <p:cNvPr id="3" name="TextBox 2"/>
+          <p:cNvSpPr txBox="1"/>
+          <p:nvPr/>
+        </p:nvSpPr>
+        <p:spPr>
+          <a:xfrm>
+            <a:off x="457200" y="146304"/>
+            <a:ext cx="11247120" cy="502920"/>
+          </a:xfrm>
+          <a:prstGeom prst="rect">
+            <a:avLst/>
+          </a:prstGeom>
+          <a:noFill/>
+        </p:spPr>
+        <p:txBody>
+          <a:bodyPr wrap="square">
+            <a:spAutoFit/>
+          </a:bodyPr>
+          <a:lstStyle/>
+          <a:p>
+            <a:pPr algn="l"/>
+            <a:r>
+              <a:rPr sz="2400" b="1">
+                <a:solidFill>
+                  <a:srgbClr val="FFFFFF"/>
+                </a:solidFill>
+                <a:latin typeface="Calibri"/>
+              </a:rPr>
+              <a:t>Démo Streamlit</a:t>
+            </a:r>
+          </a:p>
+        </p:txBody>
+      </p:sp>
+      <p:sp>
+        <p:nvSpPr>
+          <p:cNvPr id="4" name="TextBox 3"/>
+          <p:cNvSpPr txBox="1"/>
+          <p:nvPr/>
+        </p:nvSpPr>
+        <p:spPr>
+          <a:xfrm>
+            <a:off x="457200" y="566928"/>
+            <a:ext cx="11247120" cy="274320"/>
+          </a:xfrm>
+          <a:prstGeom prst="rect">
+            <a:avLst/>
+          </a:prstGeom>
+          <a:noFill/>
+        </p:spPr>
+        <p:txBody>
+          <a:bodyPr wrap="square">
+            <a:spAutoFit/>
+          </a:bodyPr>
+          <a:lstStyle/>
+          <a:p>
+            <a:pPr algn="l"/>
+            <a:r>
+              <a:rPr sz="1200" b="0">
+                <a:solidFill>
+                  <a:srgbClr val="CFDCE7"/>
+                </a:solidFill>
+                <a:latin typeface="Calibri"/>
+              </a:rPr>
+              <a:t>src/app.py — comment je présenterais ça à un client</a:t>
+            </a:r>
+          </a:p>
+        </p:txBody>
+      </p:sp>
+      <p:sp>
+        <p:nvSpPr>
+          <p:cNvPr id="5" name="TextBox 4"/>
+          <p:cNvSpPr txBox="1"/>
+          <p:nvPr/>
+        </p:nvSpPr>
+        <p:spPr>
+          <a:xfrm>
+            <a:off x="10698480" y="201168"/>
+            <a:ext cx="1188720" cy="411480"/>
+          </a:xfrm>
+          <a:prstGeom prst="rect">
+            <a:avLst/>
+          </a:prstGeom>
+          <a:noFill/>
+        </p:spPr>
+        <p:txBody>
+          <a:bodyPr wrap="square">
+            <a:spAutoFit/>
+          </a:bodyPr>
+          <a:lstStyle/>
+          <a:p>
+            <a:pPr algn="r"/>
+            <a:r>
+              <a:rPr sz="1100" b="0">
+                <a:solidFill>
+                  <a:srgbClr val="FFFFFF"/>
+                </a:solidFill>
+                <a:latin typeface="Calibri"/>
+              </a:rPr>
+              <a:t>15 / 16</a:t>
+            </a:r>
+          </a:p>
+        </p:txBody>
+      </p:sp>
+      <p:sp>
+        <p:nvSpPr>
+          <p:cNvPr id="6" name="TextBox 5"/>
+          <p:cNvSpPr txBox="1"/>
+          <p:nvPr/>
+        </p:nvSpPr>
+        <p:spPr>
+          <a:xfrm>
+            <a:off x="457200" y="1097280"/>
+            <a:ext cx="11247120" cy="5029200"/>
+          </a:xfrm>
+          <a:prstGeom prst="rect">
+            <a:avLst/>
+          </a:prstGeom>
+          <a:noFill/>
+        </p:spPr>
+        <p:txBody>
+          <a:bodyPr wrap="square">
+            <a:spAutoFit/>
+          </a:bodyPr>
+          <a:lstStyle/>
           <a:p>
             <a:pPr algn="l">
               <a:spcAft>
-                <a:spcPts val="600"/>
+                <a:spcPts val="400"/>
               </a:spcAft>
             </a:pPr>
             <a:r>
-              <a:rPr sz="1700">
+              <a:rPr sz="1400">
                 <a:solidFill>
                   <a:srgbClr val="2C3E50"/>
                 </a:solidFill>
                 <a:latin typeface="Calibri"/>
               </a:rPr>
-              <a:t>• Pipeline sklearn ColumnTransformer = garantie zéro fuite test → train</a:t>
+              <a:t>• Section 1 — Contexte business + KPIs (sessions, taux de conversion, métriques modèle)</a:t>
             </a:r>
           </a:p>
           <a:p>
             <a:pPr algn="l">
               <a:spcAft>
-                <a:spcPts val="600"/>
+                <a:spcPts val="400"/>
               </a:spcAft>
             </a:pPr>
             <a:r>
-              <a:rPr sz="1700">
+              <a:rPr sz="1400">
                 <a:solidFill>
                   <a:srgbClr val="2C3E50"/>
                 </a:solidFill>
                 <a:latin typeface="Calibri"/>
               </a:rPr>
-              <a:t>• Optuna (TPE) &gt; Grid Search pour des espaces continus</a:t>
+              <a:t>• Section 2 — EDA interactive : class imbalance, conversion par segment (Month/VisitorType/...), top corrélations</a:t>
             </a:r>
           </a:p>
           <a:p>
             <a:pPr algn="l">
               <a:spcAft>
-                <a:spcPts val="600"/>
+                <a:spcPts val="400"/>
               </a:spcAft>
             </a:pPr>
             <a:r>
-              <a:rPr sz="1700">
+              <a:rPr sz="1400">
                 <a:solidFill>
                   <a:srgbClr val="2C3E50"/>
                 </a:solidFill>
                 <a:latin typeface="Calibri"/>
               </a:rPr>
-              <a:t>• MLflow = mémoire persistante de toutes les expériences</a:t>
+              <a:t>• Section 3 — Comparaison des modèles : tableau + barchart par métrique + plots ROC/PR/CM</a:t>
             </a:r>
           </a:p>
           <a:p>
             <a:pPr algn="l">
               <a:spcAft>
-                <a:spcPts val="600"/>
+                <a:spcPts val="400"/>
               </a:spcAft>
             </a:pPr>
             <a:r>
-              <a:rPr sz="1700">
+              <a:rPr sz="1400">
                 <a:solidFill>
                   <a:srgbClr val="2C3E50"/>
                 </a:solidFill>
                 <a:latin typeface="Calibri"/>
               </a:rPr>
-              <a:t>• XGBoost gagne avec F1 = 0.6542 et ROC-AUC = 0.9303</a:t>
+              <a:t>• Section 4 — Démo : sliders sur PageValues / BounceRates / VisitorType / Month → proba prédite + jauge</a:t>
             </a:r>
           </a:p>
           <a:p>
             <a:pPr algn="l">
               <a:spcAft>
-                <a:spcPts val="600"/>
+                <a:spcPts val="400"/>
               </a:spcAft>
             </a:pPr>
             <a:r>
-              <a:rPr sz="1700">
+              <a:rPr sz="1400">
                 <a:solidFill>
                   <a:srgbClr val="2C3E50"/>
                 </a:solidFill>
                 <a:latin typeface="Calibri"/>
               </a:rPr>
-              <a:t>• Tout est reproductible en 4 commandes</a:t>
-            </a:r>
-          </a:p>
-        </p:txBody>
-      </p:sp>
-      <p:sp>
-        <p:nvSpPr>
-          <p:cNvPr id="7" name="Rectangle 6"/>
+              <a:t>• Section 5 — Threshold playground : matrice de confusion live sur le test à seuil ajustable</a:t>
+            </a:r>
+          </a:p>
+          <a:p>
+            <a:pPr algn="l">
+              <a:spcAft>
+                <a:spcPts val="400"/>
+              </a:spcAft>
+            </a:pPr>
+            <a:r>
+              <a:rPr sz="1400">
+                <a:solidFill>
+                  <a:srgbClr val="2C3E50"/>
+                </a:solidFill>
+                <a:latin typeface="Calibri"/>
+              </a:rPr>
+              <a:t>• Lancement : python scripts/main.py  (ou)  streamlit run src/app.py</a:t>
+            </a:r>
+          </a:p>
+        </p:txBody>
+      </p:sp>
+    </p:spTree>
+  </p:cSld>
+  <p:clrMapOvr>
+    <a:masterClrMapping/>
+  </p:clrMapOvr>
+</p:sld>
+</file>
+
+<file path=ppt/slides/slide16.xml><?xml version="1.0" encoding="utf-8"?>
+<p:sld xmlns:a="http://schemas.openxmlformats.org/drawingml/2006/main" xmlns:p="http://schemas.openxmlformats.org/presentationml/2006/main" xmlns:r="http://schemas.openxmlformats.org/officeDocument/2006/relationships">
+  <p:cSld>
+    <p:spTree>
+      <p:nvGrpSpPr>
+        <p:cNvPr id="1" name=""/>
+        <p:cNvGrpSpPr/>
+        <p:nvPr/>
+      </p:nvGrpSpPr>
+      <p:grpSpPr/>
+      <p:sp>
+        <p:nvSpPr>
+          <p:cNvPr id="2" name="Rectangle 1"/>
+          <p:cNvSpPr/>
+          <p:nvPr/>
+        </p:nvSpPr>
+        <p:spPr>
+          <a:xfrm>
+            <a:off x="0" y="0"/>
+            <a:ext cx="12191695" cy="777240"/>
+          </a:xfrm>
+          <a:prstGeom prst="rect">
+            <a:avLst/>
+          </a:prstGeom>
+          <a:solidFill>
+            <a:srgbClr val="1F3A5F"/>
+          </a:solidFill>
+          <a:ln>
+            <a:noFill/>
+          </a:ln>
+        </p:spPr>
+        <p:style>
+          <a:lnRef idx="1">
+            <a:schemeClr val="accent1"/>
+          </a:lnRef>
+          <a:fillRef idx="3">
+            <a:schemeClr val="accent1"/>
+          </a:fillRef>
+          <a:effectRef idx="2">
+            <a:schemeClr val="accent1"/>
+          </a:effectRef>
+          <a:fontRef idx="minor">
+            <a:schemeClr val="lt1"/>
+          </a:fontRef>
+        </p:style>
+        <p:txBody>
+          <a:bodyPr rtlCol="0" anchor="ctr"/>
+          <a:lstStyle/>
+          <a:p>
+            <a:pPr algn="ctr"/>
+          </a:p>
+        </p:txBody>
+      </p:sp>
+      <p:sp>
+        <p:nvSpPr>
+          <p:cNvPr id="3" name="TextBox 2"/>
+          <p:cNvSpPr txBox="1"/>
+          <p:nvPr/>
+        </p:nvSpPr>
+        <p:spPr>
+          <a:xfrm>
+            <a:off x="457200" y="146304"/>
+            <a:ext cx="11247120" cy="502920"/>
+          </a:xfrm>
+          <a:prstGeom prst="rect">
+            <a:avLst/>
+          </a:prstGeom>
+          <a:noFill/>
+        </p:spPr>
+        <p:txBody>
+          <a:bodyPr wrap="square">
+            <a:spAutoFit/>
+          </a:bodyPr>
+          <a:lstStyle/>
+          <a:p>
+            <a:pPr algn="l"/>
+            <a:r>
+              <a:rPr sz="2400" b="1">
+                <a:solidFill>
+                  <a:srgbClr val="FFFFFF"/>
+                </a:solidFill>
+                <a:latin typeface="Calibri"/>
+              </a:rPr>
+              <a:t>À retenir + prochaines étapes</a:t>
+            </a:r>
+          </a:p>
+        </p:txBody>
+      </p:sp>
+      <p:sp>
+        <p:nvSpPr>
+          <p:cNvPr id="4" name="TextBox 3"/>
+          <p:cNvSpPr txBox="1"/>
+          <p:nvPr/>
+        </p:nvSpPr>
+        <p:spPr>
+          <a:xfrm>
+            <a:off x="457200" y="566928"/>
+            <a:ext cx="11247120" cy="274320"/>
+          </a:xfrm>
+          <a:prstGeom prst="rect">
+            <a:avLst/>
+          </a:prstGeom>
+          <a:noFill/>
+        </p:spPr>
+        <p:txBody>
+          <a:bodyPr wrap="square">
+            <a:spAutoFit/>
+          </a:bodyPr>
+          <a:lstStyle/>
+          <a:p>
+            <a:pPr algn="l"/>
+            <a:r>
+              <a:rPr sz="1200" b="0">
+                <a:solidFill>
+                  <a:srgbClr val="CFDCE7"/>
+                </a:solidFill>
+                <a:latin typeface="Calibri"/>
+              </a:rPr>
+              <a:t>Synthèse</a:t>
+            </a:r>
+          </a:p>
+        </p:txBody>
+      </p:sp>
+      <p:sp>
+        <p:nvSpPr>
+          <p:cNvPr id="5" name="TextBox 4"/>
+          <p:cNvSpPr txBox="1"/>
+          <p:nvPr/>
+        </p:nvSpPr>
+        <p:spPr>
+          <a:xfrm>
+            <a:off x="10698480" y="201168"/>
+            <a:ext cx="1188720" cy="411480"/>
+          </a:xfrm>
+          <a:prstGeom prst="rect">
+            <a:avLst/>
+          </a:prstGeom>
+          <a:noFill/>
+        </p:spPr>
+        <p:txBody>
+          <a:bodyPr wrap="square">
+            <a:spAutoFit/>
+          </a:bodyPr>
+          <a:lstStyle/>
+          <a:p>
+            <a:pPr algn="r"/>
+            <a:r>
+              <a:rPr sz="1100" b="0">
+                <a:solidFill>
+                  <a:srgbClr val="FFFFFF"/>
+                </a:solidFill>
+                <a:latin typeface="Calibri"/>
+              </a:rPr>
+              <a:t>16 / 16</a:t>
+            </a:r>
+          </a:p>
+        </p:txBody>
+      </p:sp>
+      <p:sp>
+        <p:nvSpPr>
+          <p:cNvPr id="6" name="TextBox 5"/>
+          <p:cNvSpPr txBox="1"/>
+          <p:nvPr/>
+        </p:nvSpPr>
+        <p:spPr>
+          <a:xfrm>
+            <a:off x="457200" y="1005840"/>
+            <a:ext cx="11247120" cy="457200"/>
+          </a:xfrm>
+          <a:prstGeom prst="rect">
+            <a:avLst/>
+          </a:prstGeom>
+          <a:noFill/>
+        </p:spPr>
+        <p:txBody>
+          <a:bodyPr wrap="square">
+            <a:spAutoFit/>
+          </a:bodyPr>
+          <a:lstStyle/>
+          <a:p>
+            <a:pPr algn="l"/>
+            <a:r>
+              <a:rPr sz="1600" b="1">
+                <a:solidFill>
+                  <a:srgbClr val="1F3A5F"/>
+                </a:solidFill>
+                <a:latin typeface="Calibri"/>
+              </a:rPr>
+              <a:t>À retenir</a:t>
+            </a:r>
+          </a:p>
+        </p:txBody>
+      </p:sp>
+      <p:sp>
+        <p:nvSpPr>
+          <p:cNvPr id="7" name="TextBox 6"/>
+          <p:cNvSpPr txBox="1"/>
+          <p:nvPr/>
+        </p:nvSpPr>
+        <p:spPr>
+          <a:xfrm>
+            <a:off x="457200" y="1463040"/>
+            <a:ext cx="11247120" cy="2743200"/>
+          </a:xfrm>
+          <a:prstGeom prst="rect">
+            <a:avLst/>
+          </a:prstGeom>
+          <a:noFill/>
+        </p:spPr>
+        <p:txBody>
+          <a:bodyPr wrap="square">
+            <a:spAutoFit/>
+          </a:bodyPr>
+          <a:lstStyle/>
+          <a:p>
+            <a:pPr algn="l">
+              <a:spcAft>
+                <a:spcPts val="400"/>
+              </a:spcAft>
+            </a:pPr>
+            <a:r>
+              <a:rPr sz="1400">
+                <a:solidFill>
+                  <a:srgbClr val="2C3E50"/>
+                </a:solidFill>
+                <a:latin typeface="Calibri"/>
+              </a:rPr>
+              <a:t>• Pipeline sklearn ColumnTransformer = garantie zéro fuite test → train (validé par tests unitaires)</a:t>
+            </a:r>
+          </a:p>
+          <a:p>
+            <a:pPr algn="l">
+              <a:spcAft>
+                <a:spcPts val="400"/>
+              </a:spcAft>
+            </a:pPr>
+            <a:r>
+              <a:rPr sz="1400">
+                <a:solidFill>
+                  <a:srgbClr val="2C3E50"/>
+                </a:solidFill>
+                <a:latin typeface="Calibri"/>
+              </a:rPr>
+              <a:t>• Trois leviers d'optimisation cumulés : Optuna + encoder par famille + threshold tuning CV</a:t>
+            </a:r>
+          </a:p>
+          <a:p>
+            <a:pPr algn="l">
+              <a:spcAft>
+                <a:spcPts val="400"/>
+              </a:spcAft>
+            </a:pPr>
+            <a:r>
+              <a:rPr sz="1400">
+                <a:solidFill>
+                  <a:srgbClr val="2C3E50"/>
+                </a:solidFill>
+                <a:latin typeface="Calibri"/>
+              </a:rPr>
+              <a:t>• XGBoost final : F1 = 0.6731, ROC-AUC = 0.9292, recall = 0.7356 (74 % des acheteurs captés)</a:t>
+            </a:r>
+          </a:p>
+          <a:p>
+            <a:pPr algn="l">
+              <a:spcAft>
+                <a:spcPts val="400"/>
+              </a:spcAft>
+            </a:pPr>
+            <a:r>
+              <a:rPr sz="1400">
+                <a:solidFill>
+                  <a:srgbClr val="2C3E50"/>
+                </a:solidFill>
+                <a:latin typeface="Calibri"/>
+              </a:rPr>
+              <a:t>• MLflow trace 52+ runs et permet de comparer toutes les configurations a posteriori</a:t>
+            </a:r>
+          </a:p>
+          <a:p>
+            <a:pPr algn="l">
+              <a:spcAft>
+                <a:spcPts val="400"/>
+              </a:spcAft>
+            </a:pPr>
+            <a:r>
+              <a:rPr sz="1400">
+                <a:solidFill>
+                  <a:srgbClr val="2C3E50"/>
+                </a:solidFill>
+                <a:latin typeface="Calibri"/>
+              </a:rPr>
+              <a:t>• Tout est reproductible en 4 commandes — tests + Streamlit + plots regénérables à la demande</a:t>
+            </a:r>
+          </a:p>
+        </p:txBody>
+      </p:sp>
+      <p:sp>
+        <p:nvSpPr>
+          <p:cNvPr id="8" name="TextBox 7"/>
+          <p:cNvSpPr txBox="1"/>
+          <p:nvPr/>
+        </p:nvSpPr>
+        <p:spPr>
+          <a:xfrm>
+            <a:off x="457200" y="4297680"/>
+            <a:ext cx="11247120" cy="457200"/>
+          </a:xfrm>
+          <a:prstGeom prst="rect">
+            <a:avLst/>
+          </a:prstGeom>
+          <a:noFill/>
+        </p:spPr>
+        <p:txBody>
+          <a:bodyPr wrap="square">
+            <a:spAutoFit/>
+          </a:bodyPr>
+          <a:lstStyle/>
+          <a:p>
+            <a:pPr algn="l"/>
+            <a:r>
+              <a:rPr sz="1600" b="1">
+                <a:solidFill>
+                  <a:srgbClr val="E67E22"/>
+                </a:solidFill>
+                <a:latin typeface="Calibri"/>
+              </a:rPr>
+              <a:t>Prochaines étapes</a:t>
+            </a:r>
+          </a:p>
+        </p:txBody>
+      </p:sp>
+      <p:sp>
+        <p:nvSpPr>
+          <p:cNvPr id="9" name="TextBox 8"/>
+          <p:cNvSpPr txBox="1"/>
+          <p:nvPr/>
+        </p:nvSpPr>
+        <p:spPr>
+          <a:xfrm>
+            <a:off x="457200" y="4754880"/>
+            <a:ext cx="11247120" cy="1828800"/>
+          </a:xfrm>
+          <a:prstGeom prst="rect">
+            <a:avLst/>
+          </a:prstGeom>
+          <a:noFill/>
+        </p:spPr>
+        <p:txBody>
+          <a:bodyPr wrap="square">
+            <a:spAutoFit/>
+          </a:bodyPr>
+          <a:lstStyle/>
+          <a:p>
+            <a:pPr algn="l">
+              <a:spcAft>
+                <a:spcPts val="400"/>
+              </a:spcAft>
+            </a:pPr>
+            <a:r>
+              <a:rPr sz="1400">
+                <a:solidFill>
+                  <a:srgbClr val="2C3E50"/>
+                </a:solidFill>
+                <a:latin typeface="Calibri"/>
+              </a:rPr>
+              <a:t>• Affiner XGBoost avec un budget Optuna élargi (50-100 trials) sur l'encoder Ordinal</a:t>
+            </a:r>
+          </a:p>
+          <a:p>
+            <a:pPr algn="l">
+              <a:spcAft>
+                <a:spcPts val="400"/>
+              </a:spcAft>
+            </a:pPr>
+            <a:r>
+              <a:rPr sz="1400">
+                <a:solidFill>
+                  <a:srgbClr val="2C3E50"/>
+                </a:solidFill>
+                <a:latin typeface="Calibri"/>
+              </a:rPr>
+              <a:t>• Ajouter PR-AUC + Brier score dans le panel de métriques (calibration des probas)</a:t>
+            </a:r>
+          </a:p>
+          <a:p>
+            <a:pPr algn="l">
+              <a:spcAft>
+                <a:spcPts val="400"/>
+              </a:spcAft>
+            </a:pPr>
+            <a:r>
+              <a:rPr sz="1400">
+                <a:solidFill>
+                  <a:srgbClr val="2C3E50"/>
+                </a:solidFill>
+                <a:latin typeface="Calibri"/>
+              </a:rPr>
+              <a:t>• Calibration de probabilités (CalibratedClassifierCV) si déploiement en scoring probabiliste</a:t>
+            </a:r>
+          </a:p>
+          <a:p>
+            <a:pPr algn="l">
+              <a:spcAft>
+                <a:spcPts val="400"/>
+              </a:spcAft>
+            </a:pPr>
+            <a:r>
+              <a:rPr sz="1400">
+                <a:solidFill>
+                  <a:srgbClr val="2C3E50"/>
+                </a:solidFill>
+                <a:latin typeface="Calibri"/>
+              </a:rPr>
+              <a:t>• Test A/B en prod : threshold 0.305 vs threshold métier (à définir avec l'équipe Growth)</a:t>
+            </a:r>
+          </a:p>
+        </p:txBody>
+      </p:sp>
+      <p:sp>
+        <p:nvSpPr>
+          <p:cNvPr id="10" name="Rectangle 9"/>
           <p:cNvSpPr/>
           <p:nvPr/>
         </p:nvSpPr>
@@ -5462,7 +6241,7 @@
         <p:spPr>
           <a:xfrm>
             <a:off x="0" y="0"/>
-            <a:ext cx="12191695" cy="822960"/>
+            <a:ext cx="12191695" cy="777240"/>
           </a:xfrm>
           <a:prstGeom prst="rect">
             <a:avLst/>
@@ -5504,8 +6283,8 @@
         </p:nvSpPr>
         <p:spPr>
           <a:xfrm>
-            <a:off x="457200" y="164592"/>
-            <a:ext cx="11247120" cy="548640"/>
+            <a:off x="457200" y="146304"/>
+            <a:ext cx="11247120" cy="502920"/>
           </a:xfrm>
           <a:prstGeom prst="rect">
             <a:avLst/>
@@ -5520,13 +6299,13 @@
           <a:p>
             <a:pPr algn="l"/>
             <a:r>
-              <a:rPr sz="2600" b="1">
+              <a:rPr sz="2400" b="1">
                 <a:solidFill>
                   <a:srgbClr val="FFFFFF"/>
                 </a:solidFill>
                 <a:latin typeface="Calibri"/>
               </a:rPr>
-              <a:t>Agenda</a:t>
+              <a:t>TL;DR</a:t>
             </a:r>
           </a:p>
         </p:txBody>
@@ -5539,8 +6318,8 @@
         </p:nvSpPr>
         <p:spPr>
           <a:xfrm>
-            <a:off x="457200" y="868680"/>
-            <a:ext cx="11247120" cy="365760"/>
+            <a:off x="457200" y="566928"/>
+            <a:ext cx="11247120" cy="274320"/>
           </a:xfrm>
           <a:prstGeom prst="rect">
             <a:avLst/>
@@ -5555,13 +6334,13 @@
           <a:p>
             <a:pPr algn="l"/>
             <a:r>
-              <a:rPr sz="1400" b="0">
-                <a:solidFill>
-                  <a:srgbClr val="7F8C8D"/>
-                </a:solidFill>
-                <a:latin typeface="Calibri"/>
-              </a:rPr>
-              <a:t>Comment lire ce deck</a:t>
+              <a:rPr sz="1200" b="0">
+                <a:solidFill>
+                  <a:srgbClr val="CFDCE7"/>
+                </a:solidFill>
+                <a:latin typeface="Calibri"/>
+              </a:rPr>
+              <a:t>Ce qu'il faut retenir en 30 secondes</a:t>
             </a:r>
           </a:p>
         </p:txBody>
@@ -5574,8 +6353,8 @@
         </p:nvSpPr>
         <p:spPr>
           <a:xfrm>
-            <a:off x="10698480" y="228600"/>
-            <a:ext cx="1188720" cy="457200"/>
+            <a:off x="10698480" y="201168"/>
+            <a:ext cx="1188720" cy="411480"/>
           </a:xfrm>
           <a:prstGeom prst="rect">
             <a:avLst/>
@@ -5590,27 +6369,325 @@
           <a:p>
             <a:pPr algn="r"/>
             <a:r>
-              <a:rPr sz="1200" b="0">
+              <a:rPr sz="1100" b="0">
                 <a:solidFill>
                   <a:srgbClr val="FFFFFF"/>
                 </a:solidFill>
                 <a:latin typeface="Calibri"/>
               </a:rPr>
-              <a:t>2 / 14</a:t>
-            </a:r>
-          </a:p>
-        </p:txBody>
-      </p:sp>
-      <p:sp>
-        <p:nvSpPr>
-          <p:cNvPr id="6" name="TextBox 5"/>
+              <a:t>2 / 16</a:t>
+            </a:r>
+          </a:p>
+        </p:txBody>
+      </p:sp>
+      <p:graphicFrame>
+        <p:nvGraphicFramePr>
+          <p:cNvPr id="6" name="Table 5"/>
+          <p:cNvGraphicFramePr>
+            <a:graphicFrameLocks noGrp="1"/>
+          </p:cNvGraphicFramePr>
+          <p:nvPr/>
+        </p:nvGraphicFramePr>
+        <p:xfrm>
+          <a:off x="457200" y="1097280"/>
+          <a:ext cx="11247120" cy="1463040"/>
+        </p:xfrm>
+        <a:graphic>
+          <a:graphicData uri="http://schemas.openxmlformats.org/drawingml/2006/table">
+            <a:tbl>
+              <a:tblPr firstRow="1" bandRow="1">
+                <a:tableStyleId>{5C22544A-7EE6-4342-B048-85BDC9FD1C3A}</a:tableStyleId>
+              </a:tblPr>
+              <a:tblGrid>
+                <a:gridCol w="1874520"/>
+                <a:gridCol w="1874520"/>
+                <a:gridCol w="1874520"/>
+                <a:gridCol w="1874520"/>
+                <a:gridCol w="1874520"/>
+                <a:gridCol w="1874520"/>
+              </a:tblGrid>
+              <a:tr h="731520">
+                <a:tc>
+                  <a:txBody>
+                    <a:bodyPr/>
+                    <a:lstStyle/>
+                    <a:p>
+                      <a:pPr algn="ctr"/>
+                      <a:r>
+                        <a:rPr b="1" sz="1300">
+                          <a:solidFill>
+                            <a:srgbClr val="FFFFFF"/>
+                          </a:solidFill>
+                        </a:rPr>
+                        <a:t>Modèle retenu</a:t>
+                      </a:r>
+                    </a:p>
+                  </a:txBody>
+                  <a:tcPr>
+                    <a:solidFill>
+                      <a:srgbClr val="1F3A5F"/>
+                    </a:solidFill>
+                  </a:tcPr>
+                </a:tc>
+                <a:tc>
+                  <a:txBody>
+                    <a:bodyPr/>
+                    <a:lstStyle/>
+                    <a:p>
+                      <a:pPr algn="ctr"/>
+                      <a:r>
+                        <a:rPr b="1" sz="1300">
+                          <a:solidFill>
+                            <a:srgbClr val="FFFFFF"/>
+                          </a:solidFill>
+                        </a:rPr>
+                        <a:t>Encoder</a:t>
+                      </a:r>
+                    </a:p>
+                  </a:txBody>
+                  <a:tcPr>
+                    <a:solidFill>
+                      <a:srgbClr val="1F3A5F"/>
+                    </a:solidFill>
+                  </a:tcPr>
+                </a:tc>
+                <a:tc>
+                  <a:txBody>
+                    <a:bodyPr/>
+                    <a:lstStyle/>
+                    <a:p>
+                      <a:pPr algn="ctr"/>
+                      <a:r>
+                        <a:rPr b="1" sz="1300">
+                          <a:solidFill>
+                            <a:srgbClr val="FFFFFF"/>
+                          </a:solidFill>
+                        </a:rPr>
+                        <a:t>Threshold</a:t>
+                      </a:r>
+                    </a:p>
+                  </a:txBody>
+                  <a:tcPr>
+                    <a:solidFill>
+                      <a:srgbClr val="1F3A5F"/>
+                    </a:solidFill>
+                  </a:tcPr>
+                </a:tc>
+                <a:tc>
+                  <a:txBody>
+                    <a:bodyPr/>
+                    <a:lstStyle/>
+                    <a:p>
+                      <a:pPr algn="ctr"/>
+                      <a:r>
+                        <a:rPr b="1" sz="1300">
+                          <a:solidFill>
+                            <a:srgbClr val="FFFFFF"/>
+                          </a:solidFill>
+                        </a:rPr>
+                        <a:t>F1 test</a:t>
+                      </a:r>
+                    </a:p>
+                  </a:txBody>
+                  <a:tcPr>
+                    <a:solidFill>
+                      <a:srgbClr val="1F3A5F"/>
+                    </a:solidFill>
+                  </a:tcPr>
+                </a:tc>
+                <a:tc>
+                  <a:txBody>
+                    <a:bodyPr/>
+                    <a:lstStyle/>
+                    <a:p>
+                      <a:pPr algn="ctr"/>
+                      <a:r>
+                        <a:rPr b="1" sz="1300">
+                          <a:solidFill>
+                            <a:srgbClr val="FFFFFF"/>
+                          </a:solidFill>
+                        </a:rPr>
+                        <a:t>ROC-AUC</a:t>
+                      </a:r>
+                    </a:p>
+                  </a:txBody>
+                  <a:tcPr>
+                    <a:solidFill>
+                      <a:srgbClr val="1F3A5F"/>
+                    </a:solidFill>
+                  </a:tcPr>
+                </a:tc>
+                <a:tc>
+                  <a:txBody>
+                    <a:bodyPr/>
+                    <a:lstStyle/>
+                    <a:p>
+                      <a:pPr algn="ctr"/>
+                      <a:r>
+                        <a:rPr b="1" sz="1300">
+                          <a:solidFill>
+                            <a:srgbClr val="FFFFFF"/>
+                          </a:solidFill>
+                        </a:rPr>
+                        <a:t>Critère</a:t>
+                      </a:r>
+                    </a:p>
+                  </a:txBody>
+                  <a:tcPr>
+                    <a:solidFill>
+                      <a:srgbClr val="1F3A5F"/>
+                    </a:solidFill>
+                  </a:tcPr>
+                </a:tc>
+              </a:tr>
+              <a:tr h="731520">
+                <a:tc>
+                  <a:txBody>
+                    <a:bodyPr/>
+                    <a:lstStyle/>
+                    <a:p>
+                      <a:pPr algn="l"/>
+                      <a:r>
+                        <a:rPr sz="1400" b="1">
+                          <a:solidFill>
+                            <a:srgbClr val="2C3E50"/>
+                          </a:solidFill>
+                        </a:rPr>
+                        <a:t>XGBoost</a:t>
+                      </a:r>
+                    </a:p>
+                  </a:txBody>
+                  <a:tcPr>
+                    <a:solidFill>
+                      <a:srgbClr val="FFFFFF"/>
+                    </a:solidFill>
+                  </a:tcPr>
+                </a:tc>
+                <a:tc>
+                  <a:txBody>
+                    <a:bodyPr/>
+                    <a:lstStyle/>
+                    <a:p>
+                      <a:pPr algn="ctr"/>
+                      <a:r>
+                        <a:rPr sz="1400">
+                          <a:solidFill>
+                            <a:srgbClr val="2C3E50"/>
+                          </a:solidFill>
+                        </a:rPr>
+                        <a:t>Ordinal</a:t>
+                      </a:r>
+                    </a:p>
+                  </a:txBody>
+                  <a:tcPr>
+                    <a:solidFill>
+                      <a:srgbClr val="FFFFFF"/>
+                    </a:solidFill>
+                  </a:tcPr>
+                </a:tc>
+                <a:tc>
+                  <a:txBody>
+                    <a:bodyPr/>
+                    <a:lstStyle/>
+                    <a:p>
+                      <a:pPr algn="ctr"/>
+                      <a:r>
+                        <a:rPr sz="1400">
+                          <a:solidFill>
+                            <a:srgbClr val="2C3E50"/>
+                          </a:solidFill>
+                        </a:rPr>
+                        <a:t>0.305</a:t>
+                      </a:r>
+                    </a:p>
+                  </a:txBody>
+                  <a:tcPr>
+                    <a:solidFill>
+                      <a:srgbClr val="FFFFFF"/>
+                    </a:solidFill>
+                  </a:tcPr>
+                </a:tc>
+                <a:tc>
+                  <a:txBody>
+                    <a:bodyPr/>
+                    <a:lstStyle/>
+                    <a:p>
+                      <a:pPr algn="ctr"/>
+                      <a:r>
+                        <a:rPr sz="1400">
+                          <a:solidFill>
+                            <a:srgbClr val="2C3E50"/>
+                          </a:solidFill>
+                        </a:rPr>
+                        <a:t>0.6731</a:t>
+                      </a:r>
+                    </a:p>
+                  </a:txBody>
+                  <a:tcPr>
+                    <a:solidFill>
+                      <a:srgbClr val="FFFFFF"/>
+                    </a:solidFill>
+                  </a:tcPr>
+                </a:tc>
+                <a:tc>
+                  <a:txBody>
+                    <a:bodyPr/>
+                    <a:lstStyle/>
+                    <a:p>
+                      <a:pPr algn="ctr"/>
+                      <a:r>
+                        <a:rPr sz="1400">
+                          <a:solidFill>
+                            <a:srgbClr val="2C3E50"/>
+                          </a:solidFill>
+                        </a:rPr>
+                        <a:t>0.9292</a:t>
+                      </a:r>
+                    </a:p>
+                  </a:txBody>
+                  <a:tcPr>
+                    <a:solidFill>
+                      <a:srgbClr val="FFFFFF"/>
+                    </a:solidFill>
+                  </a:tcPr>
+                </a:tc>
+                <a:tc>
+                  <a:txBody>
+                    <a:bodyPr/>
+                    <a:lstStyle/>
+                    <a:p>
+                      <a:pPr algn="ctr"/>
+                      <a:r>
+                        <a:rPr sz="1400">
+                          <a:solidFill>
+                            <a:srgbClr val="2C3E50"/>
+                          </a:solidFill>
+                        </a:rPr>
+                        <a:t>✅ +12% vs cible 0.60</a:t>
+                      </a:r>
+                    </a:p>
+                  </a:txBody>
+                  <a:tcPr>
+                    <a:solidFill>
+                      <a:srgbClr val="FFFFFF"/>
+                    </a:solidFill>
+                  </a:tcPr>
+                </a:tc>
+              </a:tr>
+            </a:tbl>
+          </a:graphicData>
+        </a:graphic>
+      </p:graphicFrame>
+      <p:sp>
+        <p:nvSpPr>
+          <p:cNvPr id="7" name="TextBox 6"/>
           <p:cNvSpPr txBox="1"/>
           <p:nvPr/>
         </p:nvSpPr>
         <p:spPr>
           <a:xfrm>
-            <a:off x="731520" y="1371600"/>
-            <a:ext cx="10698480" cy="5029200"/>
+            <a:off x="457200" y="2743200"/>
+            <a:ext cx="11247120" cy="457200"/>
           </a:xfrm>
           <a:prstGeom prst="rect">
             <a:avLst/>
@@ -5623,147 +6700,134 @@
           </a:bodyPr>
           <a:lstStyle/>
           <a:p>
+            <a:pPr algn="l"/>
+            <a:r>
+              <a:rPr sz="1500" b="1">
+                <a:solidFill>
+                  <a:srgbClr val="E67E22"/>
+                </a:solidFill>
+                <a:latin typeface="Calibri"/>
+              </a:rPr>
+              <a:t>Pipeline reproductible en 4 commandes — 3 niveaux d'optimisation</a:t>
+            </a:r>
+          </a:p>
+        </p:txBody>
+      </p:sp>
+      <p:sp>
+        <p:nvSpPr>
+          <p:cNvPr id="8" name="TextBox 7"/>
+          <p:cNvSpPr txBox="1"/>
+          <p:nvPr/>
+        </p:nvSpPr>
+        <p:spPr>
+          <a:xfrm>
+            <a:off x="457200" y="3108960"/>
+            <a:ext cx="11247120" cy="3657600"/>
+          </a:xfrm>
+          <a:prstGeom prst="rect">
+            <a:avLst/>
+          </a:prstGeom>
+          <a:noFill/>
+        </p:spPr>
+        <p:txBody>
+          <a:bodyPr wrap="square">
+            <a:spAutoFit/>
+          </a:bodyPr>
+          <a:lstStyle/>
+          <a:p>
             <a:pPr algn="l">
               <a:spcAft>
-                <a:spcPts val="600"/>
+                <a:spcPts val="400"/>
               </a:spcAft>
             </a:pPr>
             <a:r>
-              <a:rPr sz="1800">
+              <a:rPr sz="1400">
                 <a:solidFill>
                   <a:srgbClr val="2C3E50"/>
                 </a:solidFill>
                 <a:latin typeface="Calibri"/>
               </a:rPr>
-              <a:t>• Le problème business — quoi prédire et pourquoi</a:t>
+              <a:t>• Dataset public (UCI Online Shoppers) — 12 330 sessions, classes déséquilibrées 85/15</a:t>
             </a:r>
           </a:p>
           <a:p>
             <a:pPr algn="l">
               <a:spcAft>
-                <a:spcPts val="600"/>
+                <a:spcPts val="400"/>
               </a:spcAft>
             </a:pPr>
             <a:r>
-              <a:rPr sz="1800">
+              <a:rPr sz="1400">
                 <a:solidFill>
                   <a:srgbClr val="2C3E50"/>
                 </a:solidFill>
                 <a:latin typeface="Calibri"/>
               </a:rPr>
-              <a:t>• Le dataset — choix et limites</a:t>
+              <a:t>• Pipeline sklearn ColumnTransformer = zéro fuite test → train (validé par tests unitaires)</a:t>
             </a:r>
           </a:p>
           <a:p>
             <a:pPr algn="l">
               <a:spcAft>
-                <a:spcPts val="600"/>
+                <a:spcPts val="400"/>
               </a:spcAft>
             </a:pPr>
             <a:r>
-              <a:rPr sz="1800">
+              <a:rPr sz="1400">
                 <a:solidFill>
                   <a:srgbClr val="2C3E50"/>
                 </a:solidFill>
                 <a:latin typeface="Calibri"/>
               </a:rPr>
-              <a:t>• Setup technique — du fork au venv</a:t>
+              <a:t>• 1) Optuna (TPE) — 15 trials par modèle, espaces continus</a:t>
             </a:r>
           </a:p>
           <a:p>
             <a:pPr algn="l">
               <a:spcAft>
-                <a:spcPts val="600"/>
+                <a:spcPts val="400"/>
               </a:spcAft>
             </a:pPr>
             <a:r>
-              <a:rPr sz="1800">
+              <a:rPr sz="1400">
                 <a:solidFill>
                   <a:srgbClr val="2C3E50"/>
                 </a:solidFill>
                 <a:latin typeface="Calibri"/>
               </a:rPr>
-              <a:t>• EDA — comprendre la donnée avant de modéliser</a:t>
+              <a:t>• 2) Encoder optimal par famille (XGBoost → Ordinal, +2 F1 pts)</a:t>
             </a:r>
           </a:p>
           <a:p>
             <a:pPr algn="l">
               <a:spcAft>
-                <a:spcPts val="600"/>
+                <a:spcPts val="400"/>
               </a:spcAft>
             </a:pPr>
             <a:r>
-              <a:rPr sz="1800">
+              <a:rPr sz="1400">
                 <a:solidFill>
                   <a:srgbClr val="2C3E50"/>
                 </a:solidFill>
                 <a:latin typeface="Calibri"/>
               </a:rPr>
-              <a:t>• Feature engineering — sans data leakage</a:t>
+              <a:t>• 3) TunedThresholdClassifierCV — seuil de décision appris en CV sur le train</a:t>
             </a:r>
           </a:p>
           <a:p>
             <a:pPr algn="l">
               <a:spcAft>
-                <a:spcPts val="600"/>
+                <a:spcPts val="400"/>
               </a:spcAft>
             </a:pPr>
             <a:r>
-              <a:rPr sz="1800">
+              <a:rPr sz="1400">
                 <a:solidFill>
                   <a:srgbClr val="2C3E50"/>
                 </a:solidFill>
                 <a:latin typeface="Calibri"/>
               </a:rPr>
-              <a:t>• Modélisation — 3 familles + Optuna</a:t>
-            </a:r>
-          </a:p>
-          <a:p>
-            <a:pPr algn="l">
-              <a:spcAft>
-                <a:spcPts val="600"/>
-              </a:spcAft>
-            </a:pPr>
-            <a:r>
-              <a:rPr sz="1800">
-                <a:solidFill>
-                  <a:srgbClr val="2C3E50"/>
-                </a:solidFill>
-                <a:latin typeface="Calibri"/>
-              </a:rPr>
-              <a:t>• Tracking — MLflow</a:t>
-            </a:r>
-          </a:p>
-          <a:p>
-            <a:pPr algn="l">
-              <a:spcAft>
-                <a:spcPts val="600"/>
-              </a:spcAft>
-            </a:pPr>
-            <a:r>
-              <a:rPr sz="1800">
-                <a:solidFill>
-                  <a:srgbClr val="2C3E50"/>
-                </a:solidFill>
-                <a:latin typeface="Calibri"/>
-              </a:rPr>
-              <a:t>• Résultats — XGBoost gagne</a:t>
-            </a:r>
-          </a:p>
-          <a:p>
-            <a:pPr algn="l">
-              <a:spcAft>
-                <a:spcPts val="600"/>
-              </a:spcAft>
-            </a:pPr>
-            <a:r>
-              <a:rPr sz="1800">
-                <a:solidFill>
-                  <a:srgbClr val="2C3E50"/>
-                </a:solidFill>
-                <a:latin typeface="Calibri"/>
-              </a:rPr>
-              <a:t>• Conclusion + suite</a:t>
+              <a:t>• MLflow tracking + Streamlit demo + 7 tests unitaires verts</a:t>
             </a:r>
           </a:p>
         </p:txBody>
@@ -5795,7 +6859,7 @@
         <p:spPr>
           <a:xfrm>
             <a:off x="0" y="0"/>
-            <a:ext cx="12191695" cy="822960"/>
+            <a:ext cx="12191695" cy="777240"/>
           </a:xfrm>
           <a:prstGeom prst="rect">
             <a:avLst/>
@@ -5837,8 +6901,8 @@
         </p:nvSpPr>
         <p:spPr>
           <a:xfrm>
-            <a:off x="457200" y="164592"/>
-            <a:ext cx="11247120" cy="548640"/>
+            <a:off x="457200" y="146304"/>
+            <a:ext cx="11247120" cy="502920"/>
           </a:xfrm>
           <a:prstGeom prst="rect">
             <a:avLst/>
@@ -5853,7 +6917,7 @@
           <a:p>
             <a:pPr algn="l"/>
             <a:r>
-              <a:rPr sz="2600" b="1">
+              <a:rPr sz="2400" b="1">
                 <a:solidFill>
                   <a:srgbClr val="FFFFFF"/>
                 </a:solidFill>
@@ -5872,8 +6936,8 @@
         </p:nvSpPr>
         <p:spPr>
           <a:xfrm>
-            <a:off x="457200" y="868680"/>
-            <a:ext cx="11247120" cy="365760"/>
+            <a:off x="457200" y="566928"/>
+            <a:ext cx="11247120" cy="274320"/>
           </a:xfrm>
           <a:prstGeom prst="rect">
             <a:avLst/>
@@ -5888,9 +6952,9 @@
           <a:p>
             <a:pPr algn="l"/>
             <a:r>
-              <a:rPr sz="1400" b="0">
-                <a:solidFill>
-                  <a:srgbClr val="7F8C8D"/>
+              <a:rPr sz="1200" b="0">
+                <a:solidFill>
+                  <a:srgbClr val="CFDCE7"/>
                 </a:solidFill>
                 <a:latin typeface="Calibri"/>
               </a:rPr>
@@ -5907,8 +6971,8 @@
         </p:nvSpPr>
         <p:spPr>
           <a:xfrm>
-            <a:off x="10698480" y="228600"/>
-            <a:ext cx="1188720" cy="457200"/>
+            <a:off x="10698480" y="201168"/>
+            <a:ext cx="1188720" cy="411480"/>
           </a:xfrm>
           <a:prstGeom prst="rect">
             <a:avLst/>
@@ -5923,13 +6987,13 @@
           <a:p>
             <a:pPr algn="r"/>
             <a:r>
-              <a:rPr sz="1200" b="0">
+              <a:rPr sz="1100" b="0">
                 <a:solidFill>
                   <a:srgbClr val="FFFFFF"/>
                 </a:solidFill>
                 <a:latin typeface="Calibri"/>
               </a:rPr>
-              <a:t>3 / 14</a:t>
+              <a:t>3 / 16</a:t>
             </a:r>
           </a:p>
         </p:txBody>
@@ -5942,8 +7006,8 @@
         </p:nvSpPr>
         <p:spPr>
           <a:xfrm>
-            <a:off x="731520" y="1371600"/>
-            <a:ext cx="10698480" cy="1097280"/>
+            <a:off x="457200" y="1005840"/>
+            <a:ext cx="11247120" cy="914400"/>
           </a:xfrm>
           <a:prstGeom prst="rect">
             <a:avLst/>
@@ -5958,7 +7022,7 @@
           <a:p>
             <a:pPr algn="l"/>
             <a:r>
-              <a:rPr sz="2200" b="1">
+              <a:rPr sz="2000" b="1">
                 <a:solidFill>
                   <a:srgbClr val="1F3A5F"/>
                 </a:solidFill>
@@ -5977,8 +7041,8 @@
         </p:nvSpPr>
         <p:spPr>
           <a:xfrm>
-            <a:off x="731520" y="2468880"/>
-            <a:ext cx="10698480" cy="3657600"/>
+            <a:off x="457200" y="2103120"/>
+            <a:ext cx="11247120" cy="4114800"/>
           </a:xfrm>
           <a:prstGeom prst="rect">
             <a:avLst/>
@@ -5993,11 +7057,11 @@
           <a:p>
             <a:pPr algn="l">
               <a:spcAft>
-                <a:spcPts val="600"/>
+                <a:spcPts val="400"/>
               </a:spcAft>
             </a:pPr>
             <a:r>
-              <a:rPr sz="1700">
+              <a:rPr sz="1600">
                 <a:solidFill>
                   <a:srgbClr val="2C3E50"/>
                 </a:solidFill>
@@ -6009,11 +7073,11 @@
           <a:p>
             <a:pPr algn="l">
               <a:spcAft>
-                <a:spcPts val="600"/>
+                <a:spcPts val="400"/>
               </a:spcAft>
             </a:pPr>
             <a:r>
-              <a:rPr sz="1700">
+              <a:rPr sz="1600">
                 <a:solidFill>
                   <a:srgbClr val="2C3E50"/>
                 </a:solidFill>
@@ -6025,11 +7089,11 @@
           <a:p>
             <a:pPr algn="l">
               <a:spcAft>
-                <a:spcPts val="600"/>
+                <a:spcPts val="400"/>
               </a:spcAft>
             </a:pPr>
             <a:r>
-              <a:rPr sz="1700">
+              <a:rPr sz="1600">
                 <a:solidFill>
                   <a:srgbClr val="2C3E50"/>
                 </a:solidFill>
@@ -6041,27 +7105,27 @@
           <a:p>
             <a:pPr algn="l">
               <a:spcAft>
-                <a:spcPts val="600"/>
+                <a:spcPts val="400"/>
               </a:spcAft>
             </a:pPr>
             <a:r>
-              <a:rPr sz="1700">
+              <a:rPr sz="1600">
                 <a:solidFill>
                   <a:srgbClr val="2C3E50"/>
                 </a:solidFill>
                 <a:latin typeface="Calibri"/>
               </a:rPr>
-              <a:t>• Stakeholder cible : équipe Growth / CRM d'un retailer en ligne</a:t>
+              <a:t>• Stakeholder : équipe Growth / CRM d'un retailer en ligne</a:t>
             </a:r>
           </a:p>
           <a:p>
             <a:pPr algn="l">
               <a:spcAft>
-                <a:spcPts val="600"/>
+                <a:spcPts val="400"/>
               </a:spcAft>
             </a:pPr>
             <a:r>
-              <a:rPr sz="1700">
+              <a:rPr sz="1600">
                 <a:solidFill>
                   <a:srgbClr val="2C3E50"/>
                 </a:solidFill>
@@ -6099,7 +7163,7 @@
         <p:spPr>
           <a:xfrm>
             <a:off x="0" y="0"/>
-            <a:ext cx="12191695" cy="822960"/>
+            <a:ext cx="12191695" cy="777240"/>
           </a:xfrm>
           <a:prstGeom prst="rect">
             <a:avLst/>
@@ -6141,8 +7205,8 @@
         </p:nvSpPr>
         <p:spPr>
           <a:xfrm>
-            <a:off x="457200" y="164592"/>
-            <a:ext cx="11247120" cy="548640"/>
+            <a:off x="457200" y="146304"/>
+            <a:ext cx="11247120" cy="502920"/>
           </a:xfrm>
           <a:prstGeom prst="rect">
             <a:avLst/>
@@ -6157,7 +7221,7 @@
           <a:p>
             <a:pPr algn="l"/>
             <a:r>
-              <a:rPr sz="2600" b="1">
+              <a:rPr sz="2400" b="1">
                 <a:solidFill>
                   <a:srgbClr val="FFFFFF"/>
                 </a:solidFill>
@@ -6176,8 +7240,8 @@
         </p:nvSpPr>
         <p:spPr>
           <a:xfrm>
-            <a:off x="457200" y="868680"/>
-            <a:ext cx="11247120" cy="365760"/>
+            <a:off x="457200" y="566928"/>
+            <a:ext cx="11247120" cy="274320"/>
           </a:xfrm>
           <a:prstGeom prst="rect">
             <a:avLst/>
@@ -6192,9 +7256,9 @@
           <a:p>
             <a:pPr algn="l"/>
             <a:r>
-              <a:rPr sz="1400" b="0">
-                <a:solidFill>
-                  <a:srgbClr val="7F8C8D"/>
+              <a:rPr sz="1200" b="0">
+                <a:solidFill>
+                  <a:srgbClr val="CFDCE7"/>
                 </a:solidFill>
                 <a:latin typeface="Calibri"/>
               </a:rPr>
@@ -6211,8 +7275,8 @@
         </p:nvSpPr>
         <p:spPr>
           <a:xfrm>
-            <a:off x="10698480" y="228600"/>
-            <a:ext cx="1188720" cy="457200"/>
+            <a:off x="10698480" y="201168"/>
+            <a:ext cx="1188720" cy="411480"/>
           </a:xfrm>
           <a:prstGeom prst="rect">
             <a:avLst/>
@@ -6227,13 +7291,13 @@
           <a:p>
             <a:pPr algn="r"/>
             <a:r>
-              <a:rPr sz="1200" b="0">
+              <a:rPr sz="1100" b="0">
                 <a:solidFill>
                   <a:srgbClr val="FFFFFF"/>
                 </a:solidFill>
                 <a:latin typeface="Calibri"/>
               </a:rPr>
-              <a:t>4 / 14</a:t>
+              <a:t>4 / 16</a:t>
             </a:r>
           </a:p>
         </p:txBody>
@@ -6247,8 +7311,8 @@
           <p:nvPr/>
         </p:nvGraphicFramePr>
         <p:xfrm>
-          <a:off x="731520" y="1280160"/>
-          <a:ext cx="10698480" cy="2743200"/>
+          <a:off x="457200" y="1005840"/>
+          <a:ext cx="5943600" cy="2926080"/>
         </p:xfrm>
         <a:graphic>
           <a:graphicData uri="http://schemas.openxmlformats.org/drawingml/2006/table">
@@ -6257,10 +7321,10 @@
                 <a:tableStyleId>{5C22544A-7EE6-4342-B048-85BDC9FD1C3A}</a:tableStyleId>
               </a:tblPr>
               <a:tblGrid>
-                <a:gridCol w="5349240"/>
-                <a:gridCol w="5349240"/>
+                <a:gridCol w="2971800"/>
+                <a:gridCol w="2971800"/>
               </a:tblGrid>
-              <a:tr h="457200">
+              <a:tr h="487680">
                 <a:tc>
                   <a:txBody>
                     <a:bodyPr/>
@@ -6268,7 +7332,7 @@
                     <a:p>
                       <a:pPr algn="ctr"/>
                       <a:r>
-                        <a:rPr b="1" sz="1300">
+                        <a:rPr b="1" sz="1200">
                           <a:solidFill>
                             <a:srgbClr val="FFFFFF"/>
                           </a:solidFill>
@@ -6290,7 +7354,7 @@
                     <a:p>
                       <a:pPr algn="ctr"/>
                       <a:r>
-                        <a:rPr b="1" sz="1300">
+                        <a:rPr b="1" sz="1200">
                           <a:solidFill>
                             <a:srgbClr val="FFFFFF"/>
                           </a:solidFill>
@@ -6306,7 +7370,7 @@
                   </a:tcPr>
                 </a:tc>
               </a:tr>
-              <a:tr h="457200">
+              <a:tr h="487680">
                 <a:tc>
                   <a:txBody>
                     <a:bodyPr/>
@@ -6314,7 +7378,7 @@
                     <a:p>
                       <a:pPr algn="l"/>
                       <a:r>
-                        <a:rPr sz="1200" b="1">
+                        <a:rPr sz="1100" b="1">
                           <a:solidFill>
                             <a:srgbClr val="2C3E50"/>
                           </a:solidFill>
@@ -6336,12 +7400,12 @@
                     <a:p>
                       <a:pPr algn="ctr"/>
                       <a:r>
-                        <a:rPr sz="1200">
+                        <a:rPr sz="1100">
                           <a:solidFill>
                             <a:srgbClr val="2C3E50"/>
                           </a:solidFill>
                         </a:rPr>
-                        <a:t>UCI Machine Learning Repository (CC BY 4.0)</a:t>
+                        <a:t>UCI ML Repository (CC BY 4.0)</a:t>
                       </a:r>
                     </a:p>
                   </a:txBody>
@@ -6352,7 +7416,7 @@
                   </a:tcPr>
                 </a:tc>
               </a:tr>
-              <a:tr h="457200">
+              <a:tr h="487680">
                 <a:tc>
                   <a:txBody>
                     <a:bodyPr/>
@@ -6360,7 +7424,7 @@
                     <a:p>
                       <a:pPr algn="l"/>
                       <a:r>
-                        <a:rPr sz="1200" b="1">
+                        <a:rPr sz="1100" b="1">
                           <a:solidFill>
                             <a:srgbClr val="2C3E50"/>
                           </a:solidFill>
@@ -6382,7 +7446,7 @@
                     <a:p>
                       <a:pPr algn="ctr"/>
                       <a:r>
-                        <a:rPr sz="1200">
+                        <a:rPr sz="1100">
                           <a:solidFill>
                             <a:srgbClr val="2C3E50"/>
                           </a:solidFill>
@@ -6398,7 +7462,7 @@
                   </a:tcPr>
                 </a:tc>
               </a:tr>
-              <a:tr h="457200">
+              <a:tr h="487680">
                 <a:tc>
                   <a:txBody>
                     <a:bodyPr/>
@@ -6406,7 +7470,7 @@
                     <a:p>
                       <a:pPr algn="l"/>
                       <a:r>
-                        <a:rPr sz="1200" b="1">
+                        <a:rPr sz="1100" b="1">
                           <a:solidFill>
                             <a:srgbClr val="2C3E50"/>
                           </a:solidFill>
@@ -6428,7 +7492,7 @@
                     <a:p>
                       <a:pPr algn="ctr"/>
                       <a:r>
-                        <a:rPr sz="1200">
+                        <a:rPr sz="1100">
                           <a:solidFill>
                             <a:srgbClr val="2C3E50"/>
                           </a:solidFill>
@@ -6444,7 +7508,7 @@
                   </a:tcPr>
                 </a:tc>
               </a:tr>
-              <a:tr h="457200">
+              <a:tr h="487680">
                 <a:tc>
                   <a:txBody>
                     <a:bodyPr/>
@@ -6452,7 +7516,7 @@
                     <a:p>
                       <a:pPr algn="l"/>
                       <a:r>
-                        <a:rPr sz="1200" b="1">
+                        <a:rPr sz="1100" b="1">
                           <a:solidFill>
                             <a:srgbClr val="2C3E50"/>
                           </a:solidFill>
@@ -6474,12 +7538,12 @@
                     <a:p>
                       <a:pPr algn="ctr"/>
                       <a:r>
-                        <a:rPr sz="1200">
+                        <a:rPr sz="1100">
                           <a:solidFill>
                             <a:srgbClr val="2C3E50"/>
                           </a:solidFill>
                         </a:rPr>
-                        <a:t>Revenue (booléen → achat ou non)</a:t>
+                        <a:t>Revenue (booléen)</a:t>
                       </a:r>
                     </a:p>
                   </a:txBody>
@@ -6490,7 +7554,7 @@
                   </a:tcPr>
                 </a:tc>
               </a:tr>
-              <a:tr h="457200">
+              <a:tr h="487680">
                 <a:tc>
                   <a:txBody>
                     <a:bodyPr/>
@@ -6498,12 +7562,12 @@
                     <a:p>
                       <a:pPr algn="l"/>
                       <a:r>
-                        <a:rPr sz="1200" b="1">
+                        <a:rPr sz="1100" b="1">
                           <a:solidFill>
                             <a:srgbClr val="2C3E50"/>
                           </a:solidFill>
                         </a:rPr>
-                        <a:t>Balance des classes</a:t>
+                        <a:t>Balance</a:t>
                       </a:r>
                     </a:p>
                   </a:txBody>
@@ -6520,12 +7584,12 @@
                     <a:p>
                       <a:pPr algn="ctr"/>
                       <a:r>
-                        <a:rPr sz="1200">
+                        <a:rPr sz="1100">
                           <a:solidFill>
                             <a:srgbClr val="2C3E50"/>
                           </a:solidFill>
                         </a:rPr>
-                        <a:t>84.5 % False / 15.5 % True (déséquilibré)</a:t>
+                        <a:t>84.5 % False / 15.5 % True</a:t>
                       </a:r>
                     </a:p>
                   </a:txBody>
@@ -6540,16 +7604,40 @@
           </a:graphicData>
         </a:graphic>
       </p:graphicFrame>
-      <p:sp>
-        <p:nvSpPr>
-          <p:cNvPr id="7" name="TextBox 6"/>
+      <p:pic>
+        <p:nvPicPr>
+          <p:cNvPr id="7" name="Picture 6" descr="eda_target_balance.png"/>
+          <p:cNvPicPr>
+            <a:picLocks noChangeAspect="1"/>
+          </p:cNvPicPr>
+          <p:nvPr/>
+        </p:nvPicPr>
+        <p:blipFill>
+          <a:blip r:embed="rId2"/>
+          <a:stretch>
+            <a:fillRect/>
+          </a:stretch>
+        </p:blipFill>
+        <p:spPr>
+          <a:xfrm>
+            <a:off x="6766560" y="1005840"/>
+            <a:ext cx="4937760" cy="2734759"/>
+          </a:xfrm>
+          <a:prstGeom prst="rect">
+            <a:avLst/>
+          </a:prstGeom>
+        </p:spPr>
+      </p:pic>
+      <p:sp>
+        <p:nvSpPr>
+          <p:cNvPr id="8" name="TextBox 7"/>
           <p:cNvSpPr txBox="1"/>
           <p:nvPr/>
         </p:nvSpPr>
         <p:spPr>
           <a:xfrm>
-            <a:off x="731520" y="4297680"/>
-            <a:ext cx="10698480" cy="457200"/>
+            <a:off x="457200" y="4206240"/>
+            <a:ext cx="5943600" cy="457200"/>
           </a:xfrm>
           <a:prstGeom prst="rect">
             <a:avLst/>
@@ -6564,7 +7652,7 @@
           <a:p>
             <a:pPr algn="l"/>
             <a:r>
-              <a:rPr sz="1700" b="1">
+              <a:rPr sz="1500" b="1">
                 <a:solidFill>
                   <a:srgbClr val="E67E22"/>
                 </a:solidFill>
@@ -6577,14 +7665,14 @@
       </p:sp>
       <p:sp>
         <p:nvSpPr>
-          <p:cNvPr id="8" name="TextBox 7"/>
+          <p:cNvPr id="9" name="TextBox 8"/>
           <p:cNvSpPr txBox="1"/>
           <p:nvPr/>
         </p:nvSpPr>
         <p:spPr>
           <a:xfrm>
-            <a:off x="731520" y="4754880"/>
-            <a:ext cx="10698480" cy="1828800"/>
+            <a:off x="457200" y="4572000"/>
+            <a:ext cx="5943600" cy="2011680"/>
           </a:xfrm>
           <a:prstGeom prst="rect">
             <a:avLst/>
@@ -6599,11 +7687,11 @@
           <a:p>
             <a:pPr algn="l">
               <a:spcAft>
-                <a:spcPts val="600"/>
+                <a:spcPts val="400"/>
               </a:spcAft>
             </a:pPr>
             <a:r>
-              <a:rPr sz="1500">
+              <a:rPr sz="1300">
                 <a:solidFill>
                   <a:srgbClr val="2C3E50"/>
                 </a:solidFill>
@@ -6615,11 +7703,11 @@
           <a:p>
             <a:pPr algn="l">
               <a:spcAft>
-                <a:spcPts val="600"/>
+                <a:spcPts val="400"/>
               </a:spcAft>
             </a:pPr>
             <a:r>
-              <a:rPr sz="1500">
+              <a:rPr sz="1300">
                 <a:solidFill>
                   <a:srgbClr val="2C3E50"/>
                 </a:solidFill>
@@ -6631,17 +7719,52 @@
           <a:p>
             <a:pPr algn="l">
               <a:spcAft>
-                <a:spcPts val="600"/>
+                <a:spcPts val="400"/>
               </a:spcAft>
             </a:pPr>
             <a:r>
-              <a:rPr sz="1500">
+              <a:rPr sz="1300">
                 <a:solidFill>
                   <a:srgbClr val="2C3E50"/>
                 </a:solidFill>
                 <a:latin typeface="Calibri"/>
               </a:rPr>
-              <a:t>• Modalités catégorielles anonymisées (Region 1-9, OS 1-8…)</a:t>
+              <a:t>• Modalités catégorielles anonymisées (Region 1-9, OS 1-8)</a:t>
+            </a:r>
+          </a:p>
+        </p:txBody>
+      </p:sp>
+      <p:sp>
+        <p:nvSpPr>
+          <p:cNvPr id="10" name="TextBox 9"/>
+          <p:cNvSpPr txBox="1"/>
+          <p:nvPr/>
+        </p:nvSpPr>
+        <p:spPr>
+          <a:xfrm>
+            <a:off x="6766560" y="6126480"/>
+            <a:ext cx="4937760" cy="365760"/>
+          </a:xfrm>
+          <a:prstGeom prst="rect">
+            <a:avLst/>
+          </a:prstGeom>
+          <a:noFill/>
+        </p:spPr>
+        <p:txBody>
+          <a:bodyPr wrap="square">
+            <a:spAutoFit/>
+          </a:bodyPr>
+          <a:lstStyle/>
+          <a:p>
+            <a:pPr algn="ctr"/>
+            <a:r>
+              <a:rPr sz="1100" b="0">
+                <a:solidFill>
+                  <a:srgbClr val="7F8C8D"/>
+                </a:solidFill>
+                <a:latin typeface="Calibri"/>
+              </a:rPr>
+              <a:t>Distribution de la cible — fort déséquilibre</a:t>
             </a:r>
           </a:p>
         </p:txBody>
@@ -6673,7 +7796,7 @@
         <p:spPr>
           <a:xfrm>
             <a:off x="0" y="0"/>
-            <a:ext cx="12191695" cy="822960"/>
+            <a:ext cx="12191695" cy="777240"/>
           </a:xfrm>
           <a:prstGeom prst="rect">
             <a:avLst/>
@@ -6715,8 +7838,8 @@
         </p:nvSpPr>
         <p:spPr>
           <a:xfrm>
-            <a:off x="457200" y="164592"/>
-            <a:ext cx="11247120" cy="548640"/>
+            <a:off x="457200" y="146304"/>
+            <a:ext cx="11247120" cy="502920"/>
           </a:xfrm>
           <a:prstGeom prst="rect">
             <a:avLst/>
@@ -6731,7 +7854,7 @@
           <a:p>
             <a:pPr algn="l"/>
             <a:r>
-              <a:rPr sz="2600" b="1">
+              <a:rPr sz="2400" b="1">
                 <a:solidFill>
                   <a:srgbClr val="FFFFFF"/>
                 </a:solidFill>
@@ -6750,8 +7873,8 @@
         </p:nvSpPr>
         <p:spPr>
           <a:xfrm>
-            <a:off x="457200" y="868680"/>
-            <a:ext cx="11247120" cy="365760"/>
+            <a:off x="457200" y="566928"/>
+            <a:ext cx="11247120" cy="274320"/>
           </a:xfrm>
           <a:prstGeom prst="rect">
             <a:avLst/>
@@ -6766,9 +7889,9 @@
           <a:p>
             <a:pPr algn="l"/>
             <a:r>
-              <a:rPr sz="1400" b="0">
-                <a:solidFill>
-                  <a:srgbClr val="7F8C8D"/>
+              <a:rPr sz="1200" b="0">
+                <a:solidFill>
+                  <a:srgbClr val="CFDCE7"/>
                 </a:solidFill>
                 <a:latin typeface="Calibri"/>
               </a:rPr>
@@ -6785,8 +7908,8 @@
         </p:nvSpPr>
         <p:spPr>
           <a:xfrm>
-            <a:off x="10698480" y="228600"/>
-            <a:ext cx="1188720" cy="457200"/>
+            <a:off x="10698480" y="201168"/>
+            <a:ext cx="1188720" cy="411480"/>
           </a:xfrm>
           <a:prstGeom prst="rect">
             <a:avLst/>
@@ -6801,13 +7924,13 @@
           <a:p>
             <a:pPr algn="r"/>
             <a:r>
-              <a:rPr sz="1200" b="0">
+              <a:rPr sz="1100" b="0">
                 <a:solidFill>
                   <a:srgbClr val="FFFFFF"/>
                 </a:solidFill>
                 <a:latin typeface="Calibri"/>
               </a:rPr>
-              <a:t>5 / 14</a:t>
+              <a:t>5 / 16</a:t>
             </a:r>
           </a:p>
         </p:txBody>
@@ -6821,8 +7944,8 @@
           <p:nvPr/>
         </p:nvGraphicFramePr>
         <p:xfrm>
-          <a:off x="731520" y="1280160"/>
-          <a:ext cx="10698480" cy="3200400"/>
+          <a:off x="457200" y="1005840"/>
+          <a:ext cx="11247120" cy="3108960"/>
         </p:xfrm>
         <a:graphic>
           <a:graphicData uri="http://schemas.openxmlformats.org/drawingml/2006/table">
@@ -6831,11 +7954,11 @@
                 <a:tableStyleId>{5C22544A-7EE6-4342-B048-85BDC9FD1C3A}</a:tableStyleId>
               </a:tblPr>
               <a:tblGrid>
-                <a:gridCol w="3566160"/>
-                <a:gridCol w="3566160"/>
-                <a:gridCol w="3566160"/>
+                <a:gridCol w="3749040"/>
+                <a:gridCol w="3749040"/>
+                <a:gridCol w="3749040"/>
               </a:tblGrid>
-              <a:tr h="457200">
+              <a:tr h="444137">
                 <a:tc>
                   <a:txBody>
                     <a:bodyPr/>
@@ -6843,7 +7966,7 @@
                     <a:p>
                       <a:pPr algn="ctr"/>
                       <a:r>
-                        <a:rPr b="1" sz="1300">
+                        <a:rPr b="1" sz="1200">
                           <a:solidFill>
                             <a:srgbClr val="FFFFFF"/>
                           </a:solidFill>
@@ -6865,7 +7988,7 @@
                     <a:p>
                       <a:pPr algn="ctr"/>
                       <a:r>
-                        <a:rPr b="1" sz="1300">
+                        <a:rPr b="1" sz="1200">
                           <a:solidFill>
                             <a:srgbClr val="FFFFFF"/>
                           </a:solidFill>
@@ -6887,7 +8010,7 @@
                     <a:p>
                       <a:pPr algn="ctr"/>
                       <a:r>
-                        <a:rPr b="1" sz="1300">
+                        <a:rPr b="1" sz="1200">
                           <a:solidFill>
                             <a:srgbClr val="FFFFFF"/>
                           </a:solidFill>
@@ -6903,7 +8026,7 @@
                   </a:tcPr>
                 </a:tc>
               </a:tr>
-              <a:tr h="457200">
+              <a:tr h="444137">
                 <a:tc>
                   <a:txBody>
                     <a:bodyPr/>
@@ -6911,7 +8034,7 @@
                     <a:p>
                       <a:pPr algn="l"/>
                       <a:r>
-                        <a:rPr sz="1200" b="1">
+                        <a:rPr sz="1100" b="1">
                           <a:solidFill>
                             <a:srgbClr val="2C3E50"/>
                           </a:solidFill>
@@ -6933,7 +8056,7 @@
                     <a:p>
                       <a:pPr algn="ctr"/>
                       <a:r>
-                        <a:rPr sz="1200">
+                        <a:rPr sz="1100">
                           <a:solidFill>
                             <a:srgbClr val="2C3E50"/>
                           </a:solidFill>
@@ -6955,7 +8078,7 @@
                     <a:p>
                       <a:pPr algn="ctr"/>
                       <a:r>
-                        <a:rPr sz="1200">
+                        <a:rPr sz="1100">
                           <a:solidFill>
                             <a:srgbClr val="2C3E50"/>
                           </a:solidFill>
@@ -6971,7 +8094,7 @@
                   </a:tcPr>
                 </a:tc>
               </a:tr>
-              <a:tr h="457200">
+              <a:tr h="444137">
                 <a:tc>
                   <a:txBody>
                     <a:bodyPr/>
@@ -6979,7 +8102,7 @@
                     <a:p>
                       <a:pPr algn="l"/>
                       <a:r>
-                        <a:rPr sz="1200" b="1">
+                        <a:rPr sz="1100" b="1">
                           <a:solidFill>
                             <a:srgbClr val="2C3E50"/>
                           </a:solidFill>
@@ -7001,7 +8124,7 @@
                     <a:p>
                       <a:pPr algn="ctr"/>
                       <a:r>
-                        <a:rPr sz="1200">
+                        <a:rPr sz="1100">
                           <a:solidFill>
                             <a:srgbClr val="2C3E50"/>
                           </a:solidFill>
@@ -7023,7 +8146,7 @@
                     <a:p>
                       <a:pPr algn="ctr"/>
                       <a:r>
-                        <a:rPr sz="1200">
+                        <a:rPr sz="1100">
                           <a:solidFill>
                             <a:srgbClr val="2C3E50"/>
                           </a:solidFill>
@@ -7039,7 +8162,7 @@
                   </a:tcPr>
                 </a:tc>
               </a:tr>
-              <a:tr h="457200">
+              <a:tr h="444137">
                 <a:tc>
                   <a:txBody>
                     <a:bodyPr/>
@@ -7047,7 +8170,7 @@
                     <a:p>
                       <a:pPr algn="l"/>
                       <a:r>
-                        <a:rPr sz="1200" b="1">
+                        <a:rPr sz="1100" b="1">
                           <a:solidFill>
                             <a:srgbClr val="2C3E50"/>
                           </a:solidFill>
@@ -7069,7 +8192,7 @@
                     <a:p>
                       <a:pPr algn="ctr"/>
                       <a:r>
-                        <a:rPr sz="1200">
+                        <a:rPr sz="1100">
                           <a:solidFill>
                             <a:srgbClr val="2C3E50"/>
                           </a:solidFill>
@@ -7091,7 +8214,7 @@
                     <a:p>
                       <a:pPr algn="ctr"/>
                       <a:r>
-                        <a:rPr sz="1200">
+                        <a:rPr sz="1100">
                           <a:solidFill>
                             <a:srgbClr val="2C3E50"/>
                           </a:solidFill>
@@ -7107,7 +8230,7 @@
                   </a:tcPr>
                 </a:tc>
               </a:tr>
-              <a:tr h="457200">
+              <a:tr h="444137">
                 <a:tc>
                   <a:txBody>
                     <a:bodyPr/>
@@ -7115,7 +8238,7 @@
                     <a:p>
                       <a:pPr algn="l"/>
                       <a:r>
-                        <a:rPr sz="1200" b="1">
+                        <a:rPr sz="1100" b="1">
                           <a:solidFill>
                             <a:srgbClr val="2C3E50"/>
                           </a:solidFill>
@@ -7137,7 +8260,7 @@
                     <a:p>
                       <a:pPr algn="ctr"/>
                       <a:r>
-                        <a:rPr sz="1200">
+                        <a:rPr sz="1100">
                           <a:solidFill>
                             <a:srgbClr val="2C3E50"/>
                           </a:solidFill>
@@ -7159,7 +8282,7 @@
                     <a:p>
                       <a:pPr algn="ctr"/>
                       <a:r>
-                        <a:rPr sz="1200">
+                        <a:rPr sz="1100">
                           <a:solidFill>
                             <a:srgbClr val="2C3E50"/>
                           </a:solidFill>
@@ -7175,7 +8298,7 @@
                   </a:tcPr>
                 </a:tc>
               </a:tr>
-              <a:tr h="457200">
+              <a:tr h="444137">
                 <a:tc>
                   <a:txBody>
                     <a:bodyPr/>
@@ -7183,7 +8306,7 @@
                     <a:p>
                       <a:pPr algn="l"/>
                       <a:r>
-                        <a:rPr sz="1200" b="1">
+                        <a:rPr sz="1100" b="1">
                           <a:solidFill>
                             <a:srgbClr val="2C3E50"/>
                           </a:solidFill>
@@ -7205,7 +8328,7 @@
                     <a:p>
                       <a:pPr algn="ctr"/>
                       <a:r>
-                        <a:rPr sz="1200">
+                        <a:rPr sz="1100">
                           <a:solidFill>
                             <a:srgbClr val="2C3E50"/>
                           </a:solidFill>
@@ -7227,7 +8350,7 @@
                     <a:p>
                       <a:pPr algn="ctr"/>
                       <a:r>
-                        <a:rPr sz="1200">
+                        <a:rPr sz="1100">
                           <a:solidFill>
                             <a:srgbClr val="2C3E50"/>
                           </a:solidFill>
@@ -7243,7 +8366,7 @@
                   </a:tcPr>
                 </a:tc>
               </a:tr>
-              <a:tr h="457200">
+              <a:tr h="444138">
                 <a:tc>
                   <a:txBody>
                     <a:bodyPr/>
@@ -7251,7 +8374,7 @@
                     <a:p>
                       <a:pPr algn="l"/>
                       <a:r>
-                        <a:rPr sz="1200" b="1">
+                        <a:rPr sz="1100" b="1">
                           <a:solidFill>
                             <a:srgbClr val="2C3E50"/>
                           </a:solidFill>
@@ -7273,7 +8396,7 @@
                     <a:p>
                       <a:pPr algn="ctr"/>
                       <a:r>
-                        <a:rPr sz="1200">
+                        <a:rPr sz="1100">
                           <a:solidFill>
                             <a:srgbClr val="2C3E50"/>
                           </a:solidFill>
@@ -7295,7 +8418,7 @@
                     <a:p>
                       <a:pPr algn="ctr"/>
                       <a:r>
-                        <a:rPr sz="1200">
+                        <a:rPr sz="1100">
                           <a:solidFill>
                             <a:srgbClr val="2C3E50"/>
                           </a:solidFill>
@@ -7323,8 +8446,8 @@
         </p:nvSpPr>
         <p:spPr>
           <a:xfrm>
-            <a:off x="731520" y="4754880"/>
-            <a:ext cx="10698480" cy="1463040"/>
+            <a:off x="457200" y="4389120"/>
+            <a:ext cx="11247120" cy="365760"/>
           </a:xfrm>
           <a:prstGeom prst="rect">
             <a:avLst/>
@@ -7339,7 +8462,7 @@
           <a:p>
             <a:pPr algn="l"/>
             <a:r>
-              <a:rPr sz="1600" b="1">
+              <a:rPr sz="1500" b="1">
                 <a:solidFill>
                   <a:srgbClr val="E67E22"/>
                 </a:solidFill>
@@ -7358,8 +8481,8 @@
         </p:nvSpPr>
         <p:spPr>
           <a:xfrm>
-            <a:off x="731520" y="5120640"/>
-            <a:ext cx="10698480" cy="1463040"/>
+            <a:off x="457200" y="4754880"/>
+            <a:ext cx="11247120" cy="1828800"/>
           </a:xfrm>
           <a:prstGeom prst="rect">
             <a:avLst/>
@@ -7374,7 +8497,7 @@
           <a:p>
             <a:pPr algn="l">
               <a:spcAft>
-                <a:spcPts val="600"/>
+                <a:spcPts val="400"/>
               </a:spcAft>
             </a:pPr>
             <a:r>
@@ -7390,7 +8513,7 @@
           <a:p>
             <a:pPr algn="l">
               <a:spcAft>
-                <a:spcPts val="600"/>
+                <a:spcPts val="400"/>
               </a:spcAft>
             </a:pPr>
             <a:r>
@@ -7406,7 +8529,7 @@
           <a:p>
             <a:pPr algn="l">
               <a:spcAft>
-                <a:spcPts val="600"/>
+                <a:spcPts val="400"/>
               </a:spcAft>
             </a:pPr>
             <a:r>
@@ -7422,7 +8545,7 @@
           <a:p>
             <a:pPr algn="l">
               <a:spcAft>
-                <a:spcPts val="600"/>
+                <a:spcPts val="400"/>
               </a:spcAft>
             </a:pPr>
             <a:r>
@@ -7464,7 +8587,7 @@
         <p:spPr>
           <a:xfrm>
             <a:off x="0" y="0"/>
-            <a:ext cx="12191695" cy="822960"/>
+            <a:ext cx="12191695" cy="777240"/>
           </a:xfrm>
           <a:prstGeom prst="rect">
             <a:avLst/>
@@ -7506,8 +8629,8 @@
         </p:nvSpPr>
         <p:spPr>
           <a:xfrm>
-            <a:off x="457200" y="164592"/>
-            <a:ext cx="11247120" cy="548640"/>
+            <a:off x="457200" y="146304"/>
+            <a:ext cx="11247120" cy="502920"/>
           </a:xfrm>
           <a:prstGeom prst="rect">
             <a:avLst/>
@@ -7522,7 +8645,7 @@
           <a:p>
             <a:pPr algn="l"/>
             <a:r>
-              <a:rPr sz="2600" b="1">
+              <a:rPr sz="2400" b="1">
                 <a:solidFill>
                   <a:srgbClr val="FFFFFF"/>
                 </a:solidFill>
@@ -7541,8 +8664,8 @@
         </p:nvSpPr>
         <p:spPr>
           <a:xfrm>
-            <a:off x="457200" y="868680"/>
-            <a:ext cx="11247120" cy="365760"/>
+            <a:off x="457200" y="566928"/>
+            <a:ext cx="11247120" cy="274320"/>
           </a:xfrm>
           <a:prstGeom prst="rect">
             <a:avLst/>
@@ -7557,9 +8680,9 @@
           <a:p>
             <a:pPr algn="l"/>
             <a:r>
-              <a:rPr sz="1400" b="0">
-                <a:solidFill>
-                  <a:srgbClr val="7F8C8D"/>
+              <a:rPr sz="1200" b="0">
+                <a:solidFill>
+                  <a:srgbClr val="CFDCE7"/>
                 </a:solidFill>
                 <a:latin typeface="Calibri"/>
               </a:rPr>
@@ -7576,8 +8699,8 @@
         </p:nvSpPr>
         <p:spPr>
           <a:xfrm>
-            <a:off x="10698480" y="228600"/>
-            <a:ext cx="1188720" cy="457200"/>
+            <a:off x="10698480" y="201168"/>
+            <a:ext cx="1188720" cy="411480"/>
           </a:xfrm>
           <a:prstGeom prst="rect">
             <a:avLst/>
@@ -7592,13 +8715,13 @@
           <a:p>
             <a:pPr algn="r"/>
             <a:r>
-              <a:rPr sz="1200" b="0">
+              <a:rPr sz="1100" b="0">
                 <a:solidFill>
                   <a:srgbClr val="FFFFFF"/>
                 </a:solidFill>
                 <a:latin typeface="Calibri"/>
               </a:rPr>
-              <a:t>6 / 14</a:t>
+              <a:t>6 / 16</a:t>
             </a:r>
           </a:p>
         </p:txBody>
@@ -7612,8 +8735,8 @@
           <p:nvPr/>
         </p:nvGraphicFramePr>
         <p:xfrm>
-          <a:off x="457200" y="1280160"/>
-          <a:ext cx="11247120" cy="4114800"/>
+          <a:off x="457200" y="1005840"/>
+          <a:ext cx="11247120" cy="3474720"/>
         </p:xfrm>
         <a:graphic>
           <a:graphicData uri="http://schemas.openxmlformats.org/drawingml/2006/table">
@@ -7626,7 +8749,7 @@
                 <a:gridCol w="3749040"/>
                 <a:gridCol w="3749040"/>
               </a:tblGrid>
-              <a:tr h="587828">
+              <a:tr h="496388">
                 <a:tc>
                   <a:txBody>
                     <a:bodyPr/>
@@ -7634,7 +8757,7 @@
                     <a:p>
                       <a:pPr algn="ctr"/>
                       <a:r>
-                        <a:rPr b="1" sz="1300">
+                        <a:rPr b="1" sz="1200">
                           <a:solidFill>
                             <a:srgbClr val="FFFFFF"/>
                           </a:solidFill>
@@ -7656,7 +8779,7 @@
                     <a:p>
                       <a:pPr algn="ctr"/>
                       <a:r>
-                        <a:rPr b="1" sz="1300">
+                        <a:rPr b="1" sz="1200">
                           <a:solidFill>
                             <a:srgbClr val="FFFFFF"/>
                           </a:solidFill>
@@ -7678,7 +8801,7 @@
                     <a:p>
                       <a:pPr algn="ctr"/>
                       <a:r>
-                        <a:rPr b="1" sz="1300">
+                        <a:rPr b="1" sz="1200">
                           <a:solidFill>
                             <a:srgbClr val="FFFFFF"/>
                           </a:solidFill>
@@ -7694,7 +8817,7 @@
                   </a:tcPr>
                 </a:tc>
               </a:tr>
-              <a:tr h="587828">
+              <a:tr h="496388">
                 <a:tc>
                   <a:txBody>
                     <a:bodyPr/>
@@ -7702,7 +8825,7 @@
                     <a:p>
                       <a:pPr algn="l"/>
                       <a:r>
-                        <a:rPr sz="1200" b="1">
+                        <a:rPr sz="1100" b="1">
                           <a:solidFill>
                             <a:srgbClr val="2C3E50"/>
                           </a:solidFill>
@@ -7724,7 +8847,7 @@
                     <a:p>
                       <a:pPr algn="ctr"/>
                       <a:r>
-                        <a:rPr sz="1200">
+                        <a:rPr sz="1100">
                           <a:solidFill>
                             <a:srgbClr val="2C3E50"/>
                           </a:solidFill>
@@ -7746,7 +8869,7 @@
                     <a:p>
                       <a:pPr algn="ctr"/>
                       <a:r>
-                        <a:rPr sz="1200">
+                        <a:rPr sz="1100">
                           <a:solidFill>
                             <a:srgbClr val="2C3E50"/>
                           </a:solidFill>
@@ -7762,7 +8885,7 @@
                   </a:tcPr>
                 </a:tc>
               </a:tr>
-              <a:tr h="587828">
+              <a:tr h="496388">
                 <a:tc>
                   <a:txBody>
                     <a:bodyPr/>
@@ -7770,7 +8893,7 @@
                     <a:p>
                       <a:pPr algn="l"/>
                       <a:r>
-                        <a:rPr sz="1200" b="1">
+                        <a:rPr sz="1100" b="1">
                           <a:solidFill>
                             <a:srgbClr val="2C3E50"/>
                           </a:solidFill>
@@ -7792,7 +8915,7 @@
                     <a:p>
                       <a:pPr algn="ctr"/>
                       <a:r>
-                        <a:rPr sz="1200">
+                        <a:rPr sz="1100">
                           <a:solidFill>
                             <a:srgbClr val="2C3E50"/>
                           </a:solidFill>
@@ -7814,7 +8937,7 @@
                     <a:p>
                       <a:pPr algn="ctr"/>
                       <a:r>
-                        <a:rPr sz="1200">
+                        <a:rPr sz="1100">
                           <a:solidFill>
                             <a:srgbClr val="2C3E50"/>
                           </a:solidFill>
@@ -7830,7 +8953,7 @@
                   </a:tcPr>
                 </a:tc>
               </a:tr>
-              <a:tr h="587828">
+              <a:tr h="496388">
                 <a:tc>
                   <a:txBody>
                     <a:bodyPr/>
@@ -7838,12 +8961,12 @@
                     <a:p>
                       <a:pPr algn="l"/>
                       <a:r>
-                        <a:rPr sz="1200" b="1">
+                        <a:rPr sz="1100" b="1">
                           <a:solidFill>
                             <a:srgbClr val="2C3E50"/>
                           </a:solidFill>
                         </a:rPr>
-                        <a:t>Outliers IQR (&gt;1.5 IQR)</a:t>
+                        <a:t>Outliers IQR</a:t>
                       </a:r>
                     </a:p>
                   </a:txBody>
@@ -7860,7 +8983,7 @@
                     <a:p>
                       <a:pPr algn="ctr"/>
                       <a:r>
-                        <a:rPr sz="1200">
+                        <a:rPr sz="1100">
                           <a:solidFill>
                             <a:srgbClr val="2C3E50"/>
                           </a:solidFill>
@@ -7882,12 +9005,12 @@
                     <a:p>
                       <a:pPr algn="ctr"/>
                       <a:r>
-                        <a:rPr sz="1200">
+                        <a:rPr sz="1100">
                           <a:solidFill>
                             <a:srgbClr val="2C3E50"/>
                           </a:solidFill>
                         </a:rPr>
-                        <a:t>log1p + scaling, pas de suppression</a:t>
+                        <a:t>log1p + scaling</a:t>
                       </a:r>
                     </a:p>
                   </a:txBody>
@@ -7898,7 +9021,7 @@
                   </a:tcPr>
                 </a:tc>
               </a:tr>
-              <a:tr h="587828">
+              <a:tr h="496388">
                 <a:tc>
                   <a:txBody>
                     <a:bodyPr/>
@@ -7906,12 +9029,12 @@
                     <a:p>
                       <a:pPr algn="l"/>
                       <a:r>
-                        <a:rPr sz="1200" b="1">
+                        <a:rPr sz="1100" b="1">
                           <a:solidFill>
                             <a:srgbClr val="2C3E50"/>
                           </a:solidFill>
                         </a:rPr>
-                        <a:t>Drift (1ère vs 2ème moitié)</a:t>
+                        <a:t>Drift</a:t>
                       </a:r>
                     </a:p>
                   </a:txBody>
@@ -7928,7 +9051,7 @@
                     <a:p>
                       <a:pPr algn="ctr"/>
                       <a:r>
-                        <a:rPr sz="1200">
+                        <a:rPr sz="1100">
                           <a:solidFill>
                             <a:srgbClr val="2C3E50"/>
                           </a:solidFill>
@@ -7950,7 +9073,7 @@
                     <a:p>
                       <a:pPr algn="ctr"/>
                       <a:r>
-                        <a:rPr sz="1200">
+                        <a:rPr sz="1100">
                           <a:solidFill>
                             <a:srgbClr val="2C3E50"/>
                           </a:solidFill>
@@ -7966,7 +9089,7 @@
                   </a:tcPr>
                 </a:tc>
               </a:tr>
-              <a:tr h="587828">
+              <a:tr h="496388">
                 <a:tc>
                   <a:txBody>
                     <a:bodyPr/>
@@ -7974,7 +9097,7 @@
                     <a:p>
                       <a:pPr algn="l"/>
                       <a:r>
-                        <a:rPr sz="1200" b="1">
+                        <a:rPr sz="1100" b="1">
                           <a:solidFill>
                             <a:srgbClr val="2C3E50"/>
                           </a:solidFill>
@@ -7996,7 +9119,7 @@
                     <a:p>
                       <a:pPr algn="ctr"/>
                       <a:r>
-                        <a:rPr sz="1200">
+                        <a:rPr sz="1100">
                           <a:solidFill>
                             <a:srgbClr val="2C3E50"/>
                           </a:solidFill>
@@ -8018,7 +9141,7 @@
                     <a:p>
                       <a:pPr algn="ctr"/>
                       <a:r>
-                        <a:rPr sz="1200">
+                        <a:rPr sz="1100">
                           <a:solidFill>
                             <a:srgbClr val="2C3E50"/>
                           </a:solidFill>
@@ -8034,7 +9157,7 @@
                   </a:tcPr>
                 </a:tc>
               </a:tr>
-              <a:tr h="587832">
+              <a:tr h="496392">
                 <a:tc>
                   <a:txBody>
                     <a:bodyPr/>
@@ -8042,7 +9165,7 @@
                     <a:p>
                       <a:pPr algn="l"/>
                       <a:r>
-                        <a:rPr sz="1200" b="1">
+                        <a:rPr sz="1100" b="1">
                           <a:solidFill>
                             <a:srgbClr val="2C3E50"/>
                           </a:solidFill>
@@ -8064,7 +9187,7 @@
                     <a:p>
                       <a:pPr algn="ctr"/>
                       <a:r>
-                        <a:rPr sz="1200">
+                        <a:rPr sz="1100">
                           <a:solidFill>
                             <a:srgbClr val="2C3E50"/>
                           </a:solidFill>
@@ -8086,7 +9209,7 @@
                     <a:p>
                       <a:pPr algn="ctr"/>
                       <a:r>
-                        <a:rPr sz="1200">
+                        <a:rPr sz="1100">
                           <a:solidFill>
                             <a:srgbClr val="2C3E50"/>
                           </a:solidFill>
@@ -8114,8 +9237,8 @@
         </p:nvSpPr>
         <p:spPr>
           <a:xfrm>
-            <a:off x="731520" y="5577840"/>
-            <a:ext cx="10698480" cy="914400"/>
+            <a:off x="457200" y="4754880"/>
+            <a:ext cx="11247120" cy="457200"/>
           </a:xfrm>
           <a:prstGeom prst="rect">
             <a:avLst/>
@@ -8168,7 +9291,7 @@
         <p:spPr>
           <a:xfrm>
             <a:off x="0" y="0"/>
-            <a:ext cx="12191695" cy="822960"/>
+            <a:ext cx="12191695" cy="777240"/>
           </a:xfrm>
           <a:prstGeom prst="rect">
             <a:avLst/>
@@ -8210,8 +9333,8 @@
         </p:nvSpPr>
         <p:spPr>
           <a:xfrm>
-            <a:off x="457200" y="164592"/>
-            <a:ext cx="11247120" cy="548640"/>
+            <a:off x="457200" y="146304"/>
+            <a:ext cx="11247120" cy="502920"/>
           </a:xfrm>
           <a:prstGeom prst="rect">
             <a:avLst/>
@@ -8226,13 +9349,13 @@
           <a:p>
             <a:pPr algn="l"/>
             <a:r>
-              <a:rPr sz="2600" b="1">
+              <a:rPr sz="2400" b="1">
                 <a:solidFill>
                   <a:srgbClr val="FFFFFF"/>
                 </a:solidFill>
                 <a:latin typeface="Calibri"/>
               </a:rPr>
-              <a:t>Feature engineering</a:t>
+              <a:t>EDA — taux de conversion par segment</a:t>
             </a:r>
           </a:p>
         </p:txBody>
@@ -8245,8 +9368,8 @@
         </p:nvSpPr>
         <p:spPr>
           <a:xfrm>
-            <a:off x="457200" y="868680"/>
-            <a:ext cx="11247120" cy="365760"/>
+            <a:off x="457200" y="566928"/>
+            <a:ext cx="11247120" cy="274320"/>
           </a:xfrm>
           <a:prstGeom prst="rect">
             <a:avLst/>
@@ -8261,13 +9384,13 @@
           <a:p>
             <a:pPr algn="l"/>
             <a:r>
-              <a:rPr sz="1400" b="0">
-                <a:solidFill>
-                  <a:srgbClr val="7F8C8D"/>
-                </a:solidFill>
-                <a:latin typeface="Calibri"/>
-              </a:rPr>
-              <a:t>Pipeline anti-leakage par construction</a:t>
+              <a:rPr sz="1200" b="0">
+                <a:solidFill>
+                  <a:srgbClr val="CFDCE7"/>
+                </a:solidFill>
+                <a:latin typeface="Calibri"/>
+              </a:rPr>
+              <a:t>Comprendre où sont les acheteurs</a:t>
             </a:r>
           </a:p>
         </p:txBody>
@@ -8280,8 +9403,8 @@
         </p:nvSpPr>
         <p:spPr>
           <a:xfrm>
-            <a:off x="10698480" y="228600"/>
-            <a:ext cx="1188720" cy="457200"/>
+            <a:off x="10698480" y="201168"/>
+            <a:ext cx="1188720" cy="411480"/>
           </a:xfrm>
           <a:prstGeom prst="rect">
             <a:avLst/>
@@ -8296,27 +9419,51 @@
           <a:p>
             <a:pPr algn="r"/>
             <a:r>
-              <a:rPr sz="1200" b="0">
+              <a:rPr sz="1100" b="0">
                 <a:solidFill>
                   <a:srgbClr val="FFFFFF"/>
                 </a:solidFill>
                 <a:latin typeface="Calibri"/>
               </a:rPr>
-              <a:t>7 / 14</a:t>
-            </a:r>
-          </a:p>
-        </p:txBody>
-      </p:sp>
-      <p:sp>
-        <p:nvSpPr>
-          <p:cNvPr id="6" name="TextBox 5"/>
+              <a:t>7 / 16</a:t>
+            </a:r>
+          </a:p>
+        </p:txBody>
+      </p:sp>
+      <p:pic>
+        <p:nvPicPr>
+          <p:cNvPr id="6" name="Picture 5" descr="eda_conversion_by_segment.png"/>
+          <p:cNvPicPr>
+            <a:picLocks noChangeAspect="1"/>
+          </p:cNvPicPr>
+          <p:nvPr/>
+        </p:nvPicPr>
+        <p:blipFill>
+          <a:blip r:embed="rId2"/>
+          <a:stretch>
+            <a:fillRect/>
+          </a:stretch>
+        </p:blipFill>
+        <p:spPr>
+          <a:xfrm>
+            <a:off x="640080" y="1188720"/>
+            <a:ext cx="10972800" cy="3545058"/>
+          </a:xfrm>
+          <a:prstGeom prst="rect">
+            <a:avLst/>
+          </a:prstGeom>
+        </p:spPr>
+      </p:pic>
+      <p:sp>
+        <p:nvSpPr>
+          <p:cNvPr id="7" name="TextBox 6"/>
           <p:cNvSpPr txBox="1"/>
           <p:nvPr/>
         </p:nvSpPr>
         <p:spPr>
           <a:xfrm>
-            <a:off x="731520" y="1280160"/>
-            <a:ext cx="10698480" cy="548640"/>
+            <a:off x="457200" y="5212080"/>
+            <a:ext cx="11247120" cy="365760"/>
           </a:xfrm>
           <a:prstGeom prst="rect">
             <a:avLst/>
@@ -8329,29 +9476,29 @@
           </a:bodyPr>
           <a:lstStyle/>
           <a:p>
-            <a:pPr algn="l"/>
-            <a:r>
-              <a:rPr sz="1600" b="1">
-                <a:solidFill>
-                  <a:srgbClr val="1F3A5F"/>
-                </a:solidFill>
-                <a:latin typeface="Calibri"/>
-              </a:rPr>
-              <a:t>src/features.py — un seul ColumnTransformer dans un Pipeline sklearn</a:t>
-            </a:r>
-          </a:p>
-        </p:txBody>
-      </p:sp>
-      <p:sp>
-        <p:nvSpPr>
-          <p:cNvPr id="7" name="TextBox 6"/>
+            <a:pPr algn="ctr"/>
+            <a:r>
+              <a:rPr sz="1100" b="0">
+                <a:solidFill>
+                  <a:srgbClr val="7F8C8D"/>
+                </a:solidFill>
+                <a:latin typeface="Calibri"/>
+              </a:rPr>
+              <a:t>Taux de conversion par mois (gauche) et par type de visiteur (droite). Ligne rouge = moyenne globale.</a:t>
+            </a:r>
+          </a:p>
+        </p:txBody>
+      </p:sp>
+      <p:sp>
+        <p:nvSpPr>
+          <p:cNvPr id="8" name="TextBox 7"/>
           <p:cNvSpPr txBox="1"/>
           <p:nvPr/>
         </p:nvSpPr>
         <p:spPr>
           <a:xfrm>
-            <a:off x="731520" y="1828800"/>
-            <a:ext cx="10698480" cy="2743200"/>
+            <a:off x="457200" y="5669280"/>
+            <a:ext cx="11247120" cy="1097280"/>
           </a:xfrm>
           <a:prstGeom prst="rect">
             <a:avLst/>
@@ -8366,171 +9513,33 @@
           <a:p>
             <a:pPr algn="l">
               <a:spcAft>
-                <a:spcPts val="600"/>
+                <a:spcPts val="400"/>
               </a:spcAft>
             </a:pPr>
             <a:r>
-              <a:rPr sz="1500">
+              <a:rPr sz="1300">
                 <a:solidFill>
                   <a:srgbClr val="2C3E50"/>
                 </a:solidFill>
                 <a:latin typeface="Calibri"/>
               </a:rPr>
-              <a:t>• Skewed numeric (durations, PageValues) → log1p puis StandardScaler</a:t>
+              <a:t>• Pic Nov-Sep-Oct : effet Black Friday + rentrée</a:t>
             </a:r>
           </a:p>
           <a:p>
             <a:pPr algn="l">
               <a:spcAft>
-                <a:spcPts val="600"/>
+                <a:spcPts val="400"/>
               </a:spcAft>
             </a:pPr>
             <a:r>
-              <a:rPr sz="1500">
+              <a:rPr sz="1300">
                 <a:solidFill>
                   <a:srgbClr val="2C3E50"/>
                 </a:solidFill>
                 <a:latin typeface="Calibri"/>
               </a:rPr>
-              <a:t>• Numeric standard → StandardScaler</a:t>
-            </a:r>
-          </a:p>
-          <a:p>
-            <a:pPr algn="l">
-              <a:spcAft>
-                <a:spcPts val="600"/>
-              </a:spcAft>
-            </a:pPr>
-            <a:r>
-              <a:rPr sz="1500">
-                <a:solidFill>
-                  <a:srgbClr val="2C3E50"/>
-                </a:solidFill>
-                <a:latin typeface="Calibri"/>
-              </a:rPr>
-              <a:t>• Catégoriels → OneHotEncoder(handle_unknown='ignore')</a:t>
-            </a:r>
-          </a:p>
-          <a:p>
-            <a:pPr algn="l">
-              <a:spcAft>
-                <a:spcPts val="600"/>
-              </a:spcAft>
-            </a:pPr>
-            <a:r>
-              <a:rPr sz="1500">
-                <a:solidFill>
-                  <a:srgbClr val="2C3E50"/>
-                </a:solidFill>
-                <a:latin typeface="Calibri"/>
-              </a:rPr>
-              <a:t>• Engineered binaires → passthrough</a:t>
-            </a:r>
-          </a:p>
-        </p:txBody>
-      </p:sp>
-      <p:sp>
-        <p:nvSpPr>
-          <p:cNvPr id="8" name="TextBox 7"/>
-          <p:cNvSpPr txBox="1"/>
-          <p:nvPr/>
-        </p:nvSpPr>
-        <p:spPr>
-          <a:xfrm>
-            <a:off x="731520" y="4663440"/>
-            <a:ext cx="10698480" cy="457200"/>
-          </a:xfrm>
-          <a:prstGeom prst="rect">
-            <a:avLst/>
-          </a:prstGeom>
-          <a:noFill/>
-        </p:spPr>
-        <p:txBody>
-          <a:bodyPr wrap="square">
-            <a:spAutoFit/>
-          </a:bodyPr>
-          <a:lstStyle/>
-          <a:p>
-            <a:pPr algn="l"/>
-            <a:r>
-              <a:rPr sz="1600" b="1">
-                <a:solidFill>
-                  <a:srgbClr val="E67E22"/>
-                </a:solidFill>
-                <a:latin typeface="Calibri"/>
-              </a:rPr>
-              <a:t>Pourquoi un Pipeline ?</a:t>
-            </a:r>
-          </a:p>
-        </p:txBody>
-      </p:sp>
-      <p:sp>
-        <p:nvSpPr>
-          <p:cNvPr id="9" name="TextBox 8"/>
-          <p:cNvSpPr txBox="1"/>
-          <p:nvPr/>
-        </p:nvSpPr>
-        <p:spPr>
-          <a:xfrm>
-            <a:off x="731520" y="5029200"/>
-            <a:ext cx="10698480" cy="1645920"/>
-          </a:xfrm>
-          <a:prstGeom prst="rect">
-            <a:avLst/>
-          </a:prstGeom>
-          <a:noFill/>
-        </p:spPr>
-        <p:txBody>
-          <a:bodyPr wrap="square">
-            <a:spAutoFit/>
-          </a:bodyPr>
-          <a:lstStyle/>
-          <a:p>
-            <a:pPr algn="l">
-              <a:spcAft>
-                <a:spcPts val="600"/>
-              </a:spcAft>
-            </a:pPr>
-            <a:r>
-              <a:rPr sz="1400">
-                <a:solidFill>
-                  <a:srgbClr val="2C3E50"/>
-                </a:solidFill>
-                <a:latin typeface="Calibri"/>
-              </a:rPr>
-              <a:t>• fit() est appelé uniquement sur le train (et sur les folds train de la CV)</a:t>
-            </a:r>
-          </a:p>
-          <a:p>
-            <a:pPr algn="l">
-              <a:spcAft>
-                <a:spcPts val="600"/>
-              </a:spcAft>
-            </a:pPr>
-            <a:r>
-              <a:rPr sz="1400">
-                <a:solidFill>
-                  <a:srgbClr val="2C3E50"/>
-                </a:solidFill>
-                <a:latin typeface="Calibri"/>
-              </a:rPr>
-              <a:t>• transform() applique au test les statistiques apprises sur le train</a:t>
-            </a:r>
-          </a:p>
-          <a:p>
-            <a:pPr algn="l">
-              <a:spcAft>
-                <a:spcPts val="600"/>
-              </a:spcAft>
-            </a:pPr>
-            <a:r>
-              <a:rPr sz="1400">
-                <a:solidFill>
-                  <a:srgbClr val="2C3E50"/>
-                </a:solidFill>
-                <a:latin typeface="Calibri"/>
-              </a:rPr>
-              <a:t>• → aucune fuite test → train possible. Garantie standard sklearn.</a:t>
+              <a:t>• New_Visitor 2× au-dessus de la moyenne — contre-intuitif mais signal fort</a:t>
             </a:r>
           </a:p>
         </p:txBody>
@@ -8562,7 +9571,7 @@
         <p:spPr>
           <a:xfrm>
             <a:off x="0" y="0"/>
-            <a:ext cx="12191695" cy="822960"/>
+            <a:ext cx="12191695" cy="777240"/>
           </a:xfrm>
           <a:prstGeom prst="rect">
             <a:avLst/>
@@ -8604,8 +9613,8 @@
         </p:nvSpPr>
         <p:spPr>
           <a:xfrm>
-            <a:off x="457200" y="164592"/>
-            <a:ext cx="11247120" cy="548640"/>
+            <a:off x="457200" y="146304"/>
+            <a:ext cx="11247120" cy="502920"/>
           </a:xfrm>
           <a:prstGeom prst="rect">
             <a:avLst/>
@@ -8620,13 +9629,13 @@
           <a:p>
             <a:pPr algn="l"/>
             <a:r>
-              <a:rPr sz="2600" b="1">
+              <a:rPr sz="2400" b="1">
                 <a:solidFill>
                   <a:srgbClr val="FFFFFF"/>
                 </a:solidFill>
                 <a:latin typeface="Calibri"/>
               </a:rPr>
-              <a:t>Features ajoutées</a:t>
+              <a:t>Feature engineering</a:t>
             </a:r>
           </a:p>
         </p:txBody>
@@ -8639,8 +9648,8 @@
         </p:nvSpPr>
         <p:spPr>
           <a:xfrm>
-            <a:off x="457200" y="868680"/>
-            <a:ext cx="11247120" cy="365760"/>
+            <a:off x="457200" y="566928"/>
+            <a:ext cx="11247120" cy="274320"/>
           </a:xfrm>
           <a:prstGeom prst="rect">
             <a:avLst/>
@@ -8655,13 +9664,13 @@
           <a:p>
             <a:pPr algn="l"/>
             <a:r>
-              <a:rPr sz="1400" b="0">
-                <a:solidFill>
-                  <a:srgbClr val="7F8C8D"/>
-                </a:solidFill>
-                <a:latin typeface="Calibri"/>
-              </a:rPr>
-              <a:t>Transformations row-wise stateless</a:t>
+              <a:rPr sz="1200" b="0">
+                <a:solidFill>
+                  <a:srgbClr val="CFDCE7"/>
+                </a:solidFill>
+                <a:latin typeface="Calibri"/>
+              </a:rPr>
+              <a:t>Pipeline anti-leakage par construction</a:t>
             </a:r>
           </a:p>
         </p:txBody>
@@ -8674,8 +9683,8 @@
         </p:nvSpPr>
         <p:spPr>
           <a:xfrm>
-            <a:off x="10698480" y="228600"/>
-            <a:ext cx="1188720" cy="457200"/>
+            <a:off x="10698480" y="201168"/>
+            <a:ext cx="1188720" cy="411480"/>
           </a:xfrm>
           <a:prstGeom prst="rect">
             <a:avLst/>
@@ -8690,598 +9699,27 @@
           <a:p>
             <a:pPr algn="r"/>
             <a:r>
-              <a:rPr sz="1200" b="0">
+              <a:rPr sz="1100" b="0">
                 <a:solidFill>
                   <a:srgbClr val="FFFFFF"/>
                 </a:solidFill>
                 <a:latin typeface="Calibri"/>
               </a:rPr>
-              <a:t>8 / 14</a:t>
-            </a:r>
-          </a:p>
-        </p:txBody>
-      </p:sp>
-      <p:graphicFrame>
-        <p:nvGraphicFramePr>
-          <p:cNvPr id="6" name="Table 5"/>
-          <p:cNvGraphicFramePr>
-            <a:graphicFrameLocks noGrp="1"/>
-          </p:cNvGraphicFramePr>
-          <p:nvPr/>
-        </p:nvGraphicFramePr>
-        <p:xfrm>
-          <a:off x="457200" y="1280160"/>
-          <a:ext cx="11247120" cy="4572000"/>
-        </p:xfrm>
-        <a:graphic>
-          <a:graphicData uri="http://schemas.openxmlformats.org/drawingml/2006/table">
-            <a:tbl>
-              <a:tblPr firstRow="1" bandRow="1">
-                <a:tableStyleId>{5C22544A-7EE6-4342-B048-85BDC9FD1C3A}</a:tableStyleId>
-              </a:tblPr>
-              <a:tblGrid>
-                <a:gridCol w="3749040"/>
-                <a:gridCol w="3749040"/>
-                <a:gridCol w="3749040"/>
-              </a:tblGrid>
-              <a:tr h="571500">
-                <a:tc>
-                  <a:txBody>
-                    <a:bodyPr/>
-                    <a:lstStyle/>
-                    <a:p>
-                      <a:pPr algn="ctr"/>
-                      <a:r>
-                        <a:rPr b="1" sz="1300">
-                          <a:solidFill>
-                            <a:srgbClr val="FFFFFF"/>
-                          </a:solidFill>
-                        </a:rPr>
-                        <a:t>Feature</a:t>
-                      </a:r>
-                    </a:p>
-                  </a:txBody>
-                  <a:tcPr>
-                    <a:solidFill>
-                      <a:srgbClr val="1F3A5F"/>
-                    </a:solidFill>
-                  </a:tcPr>
-                </a:tc>
-                <a:tc>
-                  <a:txBody>
-                    <a:bodyPr/>
-                    <a:lstStyle/>
-                    <a:p>
-                      <a:pPr algn="ctr"/>
-                      <a:r>
-                        <a:rPr b="1" sz="1300">
-                          <a:solidFill>
-                            <a:srgbClr val="FFFFFF"/>
-                          </a:solidFill>
-                        </a:rPr>
-                        <a:t>Définition</a:t>
-                      </a:r>
-                    </a:p>
-                  </a:txBody>
-                  <a:tcPr>
-                    <a:solidFill>
-                      <a:srgbClr val="1F3A5F"/>
-                    </a:solidFill>
-                  </a:tcPr>
-                </a:tc>
-                <a:tc>
-                  <a:txBody>
-                    <a:bodyPr/>
-                    <a:lstStyle/>
-                    <a:p>
-                      <a:pPr algn="ctr"/>
-                      <a:r>
-                        <a:rPr b="1" sz="1300">
-                          <a:solidFill>
-                            <a:srgbClr val="FFFFFF"/>
-                          </a:solidFill>
-                        </a:rPr>
-                        <a:t>Intuition métier</a:t>
-                      </a:r>
-                    </a:p>
-                  </a:txBody>
-                  <a:tcPr>
-                    <a:solidFill>
-                      <a:srgbClr val="1F3A5F"/>
-                    </a:solidFill>
-                  </a:tcPr>
-                </a:tc>
-              </a:tr>
-              <a:tr h="571500">
-                <a:tc>
-                  <a:txBody>
-                    <a:bodyPr/>
-                    <a:lstStyle/>
-                    <a:p>
-                      <a:pPr algn="l"/>
-                      <a:r>
-                        <a:rPr sz="1200" b="1">
-                          <a:solidFill>
-                            <a:srgbClr val="2C3E50"/>
-                          </a:solidFill>
-                        </a:rPr>
-                        <a:t>TotalPages</a:t>
-                      </a:r>
-                    </a:p>
-                  </a:txBody>
-                  <a:tcPr>
-                    <a:solidFill>
-                      <a:srgbClr val="FFFFFF"/>
-                    </a:solidFill>
-                  </a:tcPr>
-                </a:tc>
-                <a:tc>
-                  <a:txBody>
-                    <a:bodyPr/>
-                    <a:lstStyle/>
-                    <a:p>
-                      <a:pPr algn="ctr"/>
-                      <a:r>
-                        <a:rPr sz="1200">
-                          <a:solidFill>
-                            <a:srgbClr val="2C3E50"/>
-                          </a:solidFill>
-                        </a:rPr>
-                        <a:t>Σ des compteurs de pages</a:t>
-                      </a:r>
-                    </a:p>
-                  </a:txBody>
-                  <a:tcPr>
-                    <a:solidFill>
-                      <a:srgbClr val="FFFFFF"/>
-                    </a:solidFill>
-                  </a:tcPr>
-                </a:tc>
-                <a:tc>
-                  <a:txBody>
-                    <a:bodyPr/>
-                    <a:lstStyle/>
-                    <a:p>
-                      <a:pPr algn="ctr"/>
-                      <a:r>
-                        <a:rPr sz="1200">
-                          <a:solidFill>
-                            <a:srgbClr val="2C3E50"/>
-                          </a:solidFill>
-                        </a:rPr>
-                        <a:t>Volume global d'engagement</a:t>
-                      </a:r>
-                    </a:p>
-                  </a:txBody>
-                  <a:tcPr>
-                    <a:solidFill>
-                      <a:srgbClr val="FFFFFF"/>
-                    </a:solidFill>
-                  </a:tcPr>
-                </a:tc>
-              </a:tr>
-              <a:tr h="571500">
-                <a:tc>
-                  <a:txBody>
-                    <a:bodyPr/>
-                    <a:lstStyle/>
-                    <a:p>
-                      <a:pPr algn="l"/>
-                      <a:r>
-                        <a:rPr sz="1200" b="1">
-                          <a:solidFill>
-                            <a:srgbClr val="2C3E50"/>
-                          </a:solidFill>
-                        </a:rPr>
-                        <a:t>TotalDuration</a:t>
-                      </a:r>
-                    </a:p>
-                  </a:txBody>
-                  <a:tcPr>
-                    <a:solidFill>
-                      <a:srgbClr val="F4F6F8"/>
-                    </a:solidFill>
-                  </a:tcPr>
-                </a:tc>
-                <a:tc>
-                  <a:txBody>
-                    <a:bodyPr/>
-                    <a:lstStyle/>
-                    <a:p>
-                      <a:pPr algn="ctr"/>
-                      <a:r>
-                        <a:rPr sz="1200">
-                          <a:solidFill>
-                            <a:srgbClr val="2C3E50"/>
-                          </a:solidFill>
-                        </a:rPr>
-                        <a:t>Σ des durations</a:t>
-                      </a:r>
-                    </a:p>
-                  </a:txBody>
-                  <a:tcPr>
-                    <a:solidFill>
-                      <a:srgbClr val="F4F6F8"/>
-                    </a:solidFill>
-                  </a:tcPr>
-                </a:tc>
-                <a:tc>
-                  <a:txBody>
-                    <a:bodyPr/>
-                    <a:lstStyle/>
-                    <a:p>
-                      <a:pPr algn="ctr"/>
-                      <a:r>
-                        <a:rPr sz="1200">
-                          <a:solidFill>
-                            <a:srgbClr val="2C3E50"/>
-                          </a:solidFill>
-                        </a:rPr>
-                        <a:t>Temps passé total</a:t>
-                      </a:r>
-                    </a:p>
-                  </a:txBody>
-                  <a:tcPr>
-                    <a:solidFill>
-                      <a:srgbClr val="F4F6F8"/>
-                    </a:solidFill>
-                  </a:tcPr>
-                </a:tc>
-              </a:tr>
-              <a:tr h="571500">
-                <a:tc>
-                  <a:txBody>
-                    <a:bodyPr/>
-                    <a:lstStyle/>
-                    <a:p>
-                      <a:pPr algn="l"/>
-                      <a:r>
-                        <a:rPr sz="1200" b="1">
-                          <a:solidFill>
-                            <a:srgbClr val="2C3E50"/>
-                          </a:solidFill>
-                        </a:rPr>
-                        <a:t>AvgTimePerPage</a:t>
-                      </a:r>
-                    </a:p>
-                  </a:txBody>
-                  <a:tcPr>
-                    <a:solidFill>
-                      <a:srgbClr val="FFFFFF"/>
-                    </a:solidFill>
-                  </a:tcPr>
-                </a:tc>
-                <a:tc>
-                  <a:txBody>
-                    <a:bodyPr/>
-                    <a:lstStyle/>
-                    <a:p>
-                      <a:pPr algn="ctr"/>
-                      <a:r>
-                        <a:rPr sz="1200">
-                          <a:solidFill>
-                            <a:srgbClr val="2C3E50"/>
-                          </a:solidFill>
-                        </a:rPr>
-                        <a:t>duration / pages</a:t>
-                      </a:r>
-                    </a:p>
-                  </a:txBody>
-                  <a:tcPr>
-                    <a:solidFill>
-                      <a:srgbClr val="FFFFFF"/>
-                    </a:solidFill>
-                  </a:tcPr>
-                </a:tc>
-                <a:tc>
-                  <a:txBody>
-                    <a:bodyPr/>
-                    <a:lstStyle/>
-                    <a:p>
-                      <a:pPr algn="ctr"/>
-                      <a:r>
-                        <a:rPr sz="1200">
-                          <a:solidFill>
-                            <a:srgbClr val="2C3E50"/>
-                          </a:solidFill>
-                        </a:rPr>
-                        <a:t>Profondeur de lecture</a:t>
-                      </a:r>
-                    </a:p>
-                  </a:txBody>
-                  <a:tcPr>
-                    <a:solidFill>
-                      <a:srgbClr val="FFFFFF"/>
-                    </a:solidFill>
-                  </a:tcPr>
-                </a:tc>
-              </a:tr>
-              <a:tr h="571500">
-                <a:tc>
-                  <a:txBody>
-                    <a:bodyPr/>
-                    <a:lstStyle/>
-                    <a:p>
-                      <a:pPr algn="l"/>
-                      <a:r>
-                        <a:rPr sz="1200" b="1">
-                          <a:solidFill>
-                            <a:srgbClr val="2C3E50"/>
-                          </a:solidFill>
-                        </a:rPr>
-                        <a:t>ProductRelatedRatio</a:t>
-                      </a:r>
-                    </a:p>
-                  </a:txBody>
-                  <a:tcPr>
-                    <a:solidFill>
-                      <a:srgbClr val="F4F6F8"/>
-                    </a:solidFill>
-                  </a:tcPr>
-                </a:tc>
-                <a:tc>
-                  <a:txBody>
-                    <a:bodyPr/>
-                    <a:lstStyle/>
-                    <a:p>
-                      <a:pPr algn="ctr"/>
-                      <a:r>
-                        <a:rPr sz="1200">
-                          <a:solidFill>
-                            <a:srgbClr val="2C3E50"/>
-                          </a:solidFill>
-                        </a:rPr>
-                        <a:t>pages produit / total</a:t>
-                      </a:r>
-                    </a:p>
-                  </a:txBody>
-                  <a:tcPr>
-                    <a:solidFill>
-                      <a:srgbClr val="F4F6F8"/>
-                    </a:solidFill>
-                  </a:tcPr>
-                </a:tc>
-                <a:tc>
-                  <a:txBody>
-                    <a:bodyPr/>
-                    <a:lstStyle/>
-                    <a:p>
-                      <a:pPr algn="ctr"/>
-                      <a:r>
-                        <a:rPr sz="1200">
-                          <a:solidFill>
-                            <a:srgbClr val="2C3E50"/>
-                          </a:solidFill>
-                        </a:rPr>
-                        <a:t>Focus produit</a:t>
-                      </a:r>
-                    </a:p>
-                  </a:txBody>
-                  <a:tcPr>
-                    <a:solidFill>
-                      <a:srgbClr val="F4F6F8"/>
-                    </a:solidFill>
-                  </a:tcPr>
-                </a:tc>
-              </a:tr>
-              <a:tr h="571500">
-                <a:tc>
-                  <a:txBody>
-                    <a:bodyPr/>
-                    <a:lstStyle/>
-                    <a:p>
-                      <a:pPr algn="l"/>
-                      <a:r>
-                        <a:rPr sz="1200" b="1">
-                          <a:solidFill>
-                            <a:srgbClr val="2C3E50"/>
-                          </a:solidFill>
-                        </a:rPr>
-                        <a:t>HighPageValue</a:t>
-                      </a:r>
-                    </a:p>
-                  </a:txBody>
-                  <a:tcPr>
-                    <a:solidFill>
-                      <a:srgbClr val="FFFFFF"/>
-                    </a:solidFill>
-                  </a:tcPr>
-                </a:tc>
-                <a:tc>
-                  <a:txBody>
-                    <a:bodyPr/>
-                    <a:lstStyle/>
-                    <a:p>
-                      <a:pPr algn="ctr"/>
-                      <a:r>
-                        <a:rPr sz="1200">
-                          <a:solidFill>
-                            <a:srgbClr val="2C3E50"/>
-                          </a:solidFill>
-                        </a:rPr>
-                        <a:t>PageValues &gt; 0</a:t>
-                      </a:r>
-                    </a:p>
-                  </a:txBody>
-                  <a:tcPr>
-                    <a:solidFill>
-                      <a:srgbClr val="FFFFFF"/>
-                    </a:solidFill>
-                  </a:tcPr>
-                </a:tc>
-                <a:tc>
-                  <a:txBody>
-                    <a:bodyPr/>
-                    <a:lstStyle/>
-                    <a:p>
-                      <a:pPr algn="ctr"/>
-                      <a:r>
-                        <a:rPr sz="1200">
-                          <a:solidFill>
-                            <a:srgbClr val="2C3E50"/>
-                          </a:solidFill>
-                        </a:rPr>
-                        <a:t>Flag session marchande</a:t>
-                      </a:r>
-                    </a:p>
-                  </a:txBody>
-                  <a:tcPr>
-                    <a:solidFill>
-                      <a:srgbClr val="FFFFFF"/>
-                    </a:solidFill>
-                  </a:tcPr>
-                </a:tc>
-              </a:tr>
-              <a:tr h="571500">
-                <a:tc>
-                  <a:txBody>
-                    <a:bodyPr/>
-                    <a:lstStyle/>
-                    <a:p>
-                      <a:pPr algn="l"/>
-                      <a:r>
-                        <a:rPr sz="1200" b="1">
-                          <a:solidFill>
-                            <a:srgbClr val="2C3E50"/>
-                          </a:solidFill>
-                        </a:rPr>
-                        <a:t>IsHighBounce</a:t>
-                      </a:r>
-                    </a:p>
-                  </a:txBody>
-                  <a:tcPr>
-                    <a:solidFill>
-                      <a:srgbClr val="F4F6F8"/>
-                    </a:solidFill>
-                  </a:tcPr>
-                </a:tc>
-                <a:tc>
-                  <a:txBody>
-                    <a:bodyPr/>
-                    <a:lstStyle/>
-                    <a:p>
-                      <a:pPr algn="ctr"/>
-                      <a:r>
-                        <a:rPr sz="1200">
-                          <a:solidFill>
-                            <a:srgbClr val="2C3E50"/>
-                          </a:solidFill>
-                        </a:rPr>
-                        <a:t>BounceRates &gt; Q3</a:t>
-                      </a:r>
-                    </a:p>
-                  </a:txBody>
-                  <a:tcPr>
-                    <a:solidFill>
-                      <a:srgbClr val="F4F6F8"/>
-                    </a:solidFill>
-                  </a:tcPr>
-                </a:tc>
-                <a:tc>
-                  <a:txBody>
-                    <a:bodyPr/>
-                    <a:lstStyle/>
-                    <a:p>
-                      <a:pPr algn="ctr"/>
-                      <a:r>
-                        <a:rPr sz="1200">
-                          <a:solidFill>
-                            <a:srgbClr val="2C3E50"/>
-                          </a:solidFill>
-                        </a:rPr>
-                        <a:t>Flag session zappée</a:t>
-                      </a:r>
-                    </a:p>
-                  </a:txBody>
-                  <a:tcPr>
-                    <a:solidFill>
-                      <a:srgbClr val="F4F6F8"/>
-                    </a:solidFill>
-                  </a:tcPr>
-                </a:tc>
-              </a:tr>
-              <a:tr h="571500">
-                <a:tc>
-                  <a:txBody>
-                    <a:bodyPr/>
-                    <a:lstStyle/>
-                    <a:p>
-                      <a:pPr algn="l"/>
-                      <a:r>
-                        <a:rPr sz="1200" b="1">
-                          <a:solidFill>
-                            <a:srgbClr val="2C3E50"/>
-                          </a:solidFill>
-                        </a:rPr>
-                        <a:t>IsSpecialDay</a:t>
-                      </a:r>
-                    </a:p>
-                  </a:txBody>
-                  <a:tcPr>
-                    <a:solidFill>
-                      <a:srgbClr val="FFFFFF"/>
-                    </a:solidFill>
-                  </a:tcPr>
-                </a:tc>
-                <a:tc>
-                  <a:txBody>
-                    <a:bodyPr/>
-                    <a:lstStyle/>
-                    <a:p>
-                      <a:pPr algn="ctr"/>
-                      <a:r>
-                        <a:rPr sz="1200">
-                          <a:solidFill>
-                            <a:srgbClr val="2C3E50"/>
-                          </a:solidFill>
-                        </a:rPr>
-                        <a:t>SpecialDay &gt; 0</a:t>
-                      </a:r>
-                    </a:p>
-                  </a:txBody>
-                  <a:tcPr>
-                    <a:solidFill>
-                      <a:srgbClr val="FFFFFF"/>
-                    </a:solidFill>
-                  </a:tcPr>
-                </a:tc>
-                <a:tc>
-                  <a:txBody>
-                    <a:bodyPr/>
-                    <a:lstStyle/>
-                    <a:p>
-                      <a:pPr algn="ctr"/>
-                      <a:r>
-                        <a:rPr sz="1200">
-                          <a:solidFill>
-                            <a:srgbClr val="2C3E50"/>
-                          </a:solidFill>
-                        </a:rPr>
-                        <a:t>Jour spécial (St-Valentin, etc.)</a:t>
-                      </a:r>
-                    </a:p>
-                  </a:txBody>
-                  <a:tcPr>
-                    <a:solidFill>
-                      <a:srgbClr val="FFFFFF"/>
-                    </a:solidFill>
-                  </a:tcPr>
-                </a:tc>
-              </a:tr>
-            </a:tbl>
-          </a:graphicData>
-        </a:graphic>
-      </p:graphicFrame>
-      <p:sp>
-        <p:nvSpPr>
-          <p:cNvPr id="7" name="TextBox 6"/>
+              <a:t>8 / 16</a:t>
+            </a:r>
+          </a:p>
+        </p:txBody>
+      </p:sp>
+      <p:sp>
+        <p:nvSpPr>
+          <p:cNvPr id="6" name="TextBox 5"/>
           <p:cNvSpPr txBox="1"/>
           <p:nvPr/>
         </p:nvSpPr>
         <p:spPr>
           <a:xfrm>
-            <a:off x="731520" y="6126480"/>
-            <a:ext cx="10698480" cy="457200"/>
+            <a:off x="457200" y="1005840"/>
+            <a:ext cx="11247120" cy="457200"/>
           </a:xfrm>
           <a:prstGeom prst="rect">
             <a:avLst/>
@@ -9296,13 +9734,206 @@
           <a:p>
             <a:pPr algn="l"/>
             <a:r>
-              <a:rPr sz="1300" b="0">
-                <a:solidFill>
-                  <a:srgbClr val="7F8C8D"/>
-                </a:solidFill>
-                <a:latin typeface="Calibri"/>
-              </a:rPr>
-              <a:t>Toutes ces transformations sont déterministes ligne par ligne — pas de fit, donc pas de leakage.</a:t>
+              <a:rPr sz="1500" b="1">
+                <a:solidFill>
+                  <a:srgbClr val="1F3A5F"/>
+                </a:solidFill>
+                <a:latin typeface="Calibri"/>
+              </a:rPr>
+              <a:t>src/features.py — un seul ColumnTransformer dans un Pipeline sklearn</a:t>
+            </a:r>
+          </a:p>
+        </p:txBody>
+      </p:sp>
+      <p:sp>
+        <p:nvSpPr>
+          <p:cNvPr id="7" name="TextBox 6"/>
+          <p:cNvSpPr txBox="1"/>
+          <p:nvPr/>
+        </p:nvSpPr>
+        <p:spPr>
+          <a:xfrm>
+            <a:off x="457200" y="1554480"/>
+            <a:ext cx="11247120" cy="2377440"/>
+          </a:xfrm>
+          <a:prstGeom prst="rect">
+            <a:avLst/>
+          </a:prstGeom>
+          <a:noFill/>
+        </p:spPr>
+        <p:txBody>
+          <a:bodyPr wrap="square">
+            <a:spAutoFit/>
+          </a:bodyPr>
+          <a:lstStyle/>
+          <a:p>
+            <a:pPr algn="l">
+              <a:spcAft>
+                <a:spcPts val="400"/>
+              </a:spcAft>
+            </a:pPr>
+            <a:r>
+              <a:rPr sz="1400">
+                <a:solidFill>
+                  <a:srgbClr val="2C3E50"/>
+                </a:solidFill>
+                <a:latin typeface="Calibri"/>
+              </a:rPr>
+              <a:t>• Skewed numeric (durations, PageValues) → log1p puis StandardScaler</a:t>
+            </a:r>
+          </a:p>
+          <a:p>
+            <a:pPr algn="l">
+              <a:spcAft>
+                <a:spcPts val="400"/>
+              </a:spcAft>
+            </a:pPr>
+            <a:r>
+              <a:rPr sz="1400">
+                <a:solidFill>
+                  <a:srgbClr val="2C3E50"/>
+                </a:solidFill>
+                <a:latin typeface="Calibri"/>
+              </a:rPr>
+              <a:t>• Numeric standard → StandardScaler</a:t>
+            </a:r>
+          </a:p>
+          <a:p>
+            <a:pPr algn="l">
+              <a:spcAft>
+                <a:spcPts val="400"/>
+              </a:spcAft>
+            </a:pPr>
+            <a:r>
+              <a:rPr sz="1400">
+                <a:solidFill>
+                  <a:srgbClr val="2C3E50"/>
+                </a:solidFill>
+                <a:latin typeface="Calibri"/>
+              </a:rPr>
+              <a:t>• Catégoriels → OneHotEncoder(handle_unknown='ignore')</a:t>
+            </a:r>
+          </a:p>
+          <a:p>
+            <a:pPr algn="l">
+              <a:spcAft>
+                <a:spcPts val="400"/>
+              </a:spcAft>
+            </a:pPr>
+            <a:r>
+              <a:rPr sz="1400">
+                <a:solidFill>
+                  <a:srgbClr val="2C3E50"/>
+                </a:solidFill>
+                <a:latin typeface="Calibri"/>
+              </a:rPr>
+              <a:t>• Engineered binaires → passthrough</a:t>
+            </a:r>
+          </a:p>
+        </p:txBody>
+      </p:sp>
+      <p:sp>
+        <p:nvSpPr>
+          <p:cNvPr id="8" name="TextBox 7"/>
+          <p:cNvSpPr txBox="1"/>
+          <p:nvPr/>
+        </p:nvSpPr>
+        <p:spPr>
+          <a:xfrm>
+            <a:off x="457200" y="4114800"/>
+            <a:ext cx="11247120" cy="457200"/>
+          </a:xfrm>
+          <a:prstGeom prst="rect">
+            <a:avLst/>
+          </a:prstGeom>
+          <a:noFill/>
+        </p:spPr>
+        <p:txBody>
+          <a:bodyPr wrap="square">
+            <a:spAutoFit/>
+          </a:bodyPr>
+          <a:lstStyle/>
+          <a:p>
+            <a:pPr algn="l"/>
+            <a:r>
+              <a:rPr sz="1500" b="1">
+                <a:solidFill>
+                  <a:srgbClr val="E67E22"/>
+                </a:solidFill>
+                <a:latin typeface="Calibri"/>
+              </a:rPr>
+              <a:t>Pourquoi un Pipeline ?</a:t>
+            </a:r>
+          </a:p>
+        </p:txBody>
+      </p:sp>
+      <p:sp>
+        <p:nvSpPr>
+          <p:cNvPr id="9" name="TextBox 8"/>
+          <p:cNvSpPr txBox="1"/>
+          <p:nvPr/>
+        </p:nvSpPr>
+        <p:spPr>
+          <a:xfrm>
+            <a:off x="457200" y="4480560"/>
+            <a:ext cx="11247120" cy="2011680"/>
+          </a:xfrm>
+          <a:prstGeom prst="rect">
+            <a:avLst/>
+          </a:prstGeom>
+          <a:noFill/>
+        </p:spPr>
+        <p:txBody>
+          <a:bodyPr wrap="square">
+            <a:spAutoFit/>
+          </a:bodyPr>
+          <a:lstStyle/>
+          <a:p>
+            <a:pPr algn="l">
+              <a:spcAft>
+                <a:spcPts val="400"/>
+              </a:spcAft>
+            </a:pPr>
+            <a:r>
+              <a:rPr sz="1400">
+                <a:solidFill>
+                  <a:srgbClr val="2C3E50"/>
+                </a:solidFill>
+                <a:latin typeface="Calibri"/>
+              </a:rPr>
+              <a:t>• fit() est appelé uniquement sur le train (et sur les folds train de la CV)</a:t>
+            </a:r>
+          </a:p>
+          <a:p>
+            <a:pPr algn="l">
+              <a:spcAft>
+                <a:spcPts val="400"/>
+              </a:spcAft>
+            </a:pPr>
+            <a:r>
+              <a:rPr sz="1400">
+                <a:solidFill>
+                  <a:srgbClr val="2C3E50"/>
+                </a:solidFill>
+                <a:latin typeface="Calibri"/>
+              </a:rPr>
+              <a:t>• transform() applique au test les statistiques apprises sur le train</a:t>
+            </a:r>
+          </a:p>
+          <a:p>
+            <a:pPr algn="l">
+              <a:spcAft>
+                <a:spcPts val="400"/>
+              </a:spcAft>
+            </a:pPr>
+            <a:r>
+              <a:rPr sz="1400">
+                <a:solidFill>
+                  <a:srgbClr val="2C3E50"/>
+                </a:solidFill>
+                <a:latin typeface="Calibri"/>
+              </a:rPr>
+              <a:t>• → aucune fuite test → train possible. Garantie standard sklearn.</a:t>
             </a:r>
           </a:p>
         </p:txBody>
@@ -9334,7 +9965,7 @@
         <p:spPr>
           <a:xfrm>
             <a:off x="0" y="0"/>
-            <a:ext cx="12191695" cy="822960"/>
+            <a:ext cx="12191695" cy="777240"/>
           </a:xfrm>
           <a:prstGeom prst="rect">
             <a:avLst/>
@@ -9376,8 +10007,8 @@
         </p:nvSpPr>
         <p:spPr>
           <a:xfrm>
-            <a:off x="457200" y="164592"/>
-            <a:ext cx="11247120" cy="548640"/>
+            <a:off x="457200" y="146304"/>
+            <a:ext cx="11247120" cy="502920"/>
           </a:xfrm>
           <a:prstGeom prst="rect">
             <a:avLst/>
@@ -9392,13 +10023,13 @@
           <a:p>
             <a:pPr algn="l"/>
             <a:r>
-              <a:rPr sz="2600" b="1">
+              <a:rPr sz="2400" b="1">
                 <a:solidFill>
                   <a:srgbClr val="FFFFFF"/>
                 </a:solidFill>
                 <a:latin typeface="Calibri"/>
               </a:rPr>
-              <a:t>Les 3 modèles testés</a:t>
+              <a:t>Features ajoutées</a:t>
             </a:r>
           </a:p>
         </p:txBody>
@@ -9411,8 +10042,8 @@
         </p:nvSpPr>
         <p:spPr>
           <a:xfrm>
-            <a:off x="457200" y="868680"/>
-            <a:ext cx="11247120" cy="365760"/>
+            <a:off x="457200" y="566928"/>
+            <a:ext cx="11247120" cy="274320"/>
           </a:xfrm>
           <a:prstGeom prst="rect">
             <a:avLst/>
@@ -9427,13 +10058,13 @@
           <a:p>
             <a:pPr algn="l"/>
             <a:r>
-              <a:rPr sz="1400" b="0">
-                <a:solidFill>
-                  <a:srgbClr val="7F8C8D"/>
-                </a:solidFill>
-                <a:latin typeface="Calibri"/>
-              </a:rPr>
-              <a:t>Couvrir 3 familles différentes</a:t>
+              <a:rPr sz="1200" b="0">
+                <a:solidFill>
+                  <a:srgbClr val="CFDCE7"/>
+                </a:solidFill>
+                <a:latin typeface="Calibri"/>
+              </a:rPr>
+              <a:t>Transformations row-wise stateless (leakage-safe)</a:t>
             </a:r>
           </a:p>
         </p:txBody>
@@ -9446,8 +10077,8 @@
         </p:nvSpPr>
         <p:spPr>
           <a:xfrm>
-            <a:off x="10698480" y="228600"/>
-            <a:ext cx="1188720" cy="457200"/>
+            <a:off x="10698480" y="201168"/>
+            <a:ext cx="1188720" cy="411480"/>
           </a:xfrm>
           <a:prstGeom prst="rect">
             <a:avLst/>
@@ -9462,13 +10093,13 @@
           <a:p>
             <a:pPr algn="r"/>
             <a:r>
-              <a:rPr sz="1200" b="0">
+              <a:rPr sz="1100" b="0">
                 <a:solidFill>
                   <a:srgbClr val="FFFFFF"/>
                 </a:solidFill>
                 <a:latin typeface="Calibri"/>
               </a:rPr>
-              <a:t>9 / 14</a:t>
+              <a:t>9 / 16</a:t>
             </a:r>
           </a:p>
         </p:txBody>
@@ -9482,8 +10113,8 @@
           <p:nvPr/>
         </p:nvGraphicFramePr>
         <p:xfrm>
-          <a:off x="731520" y="1280160"/>
-          <a:ext cx="10698480" cy="2743200"/>
+          <a:off x="457200" y="1005840"/>
+          <a:ext cx="11247120" cy="4572000"/>
         </p:xfrm>
         <a:graphic>
           <a:graphicData uri="http://schemas.openxmlformats.org/drawingml/2006/table">
@@ -9492,10 +10123,11 @@
                 <a:tableStyleId>{5C22544A-7EE6-4342-B048-85BDC9FD1C3A}</a:tableStyleId>
               </a:tblPr>
               <a:tblGrid>
-                <a:gridCol w="5349240"/>
-                <a:gridCol w="5349240"/>
+                <a:gridCol w="3749040"/>
+                <a:gridCol w="3749040"/>
+                <a:gridCol w="3749040"/>
               </a:tblGrid>
-              <a:tr h="685800">
+              <a:tr h="571500">
                 <a:tc>
                   <a:txBody>
                     <a:bodyPr/>
@@ -9503,12 +10135,12 @@
                     <a:p>
                       <a:pPr algn="ctr"/>
                       <a:r>
-                        <a:rPr b="1" sz="1300">
+                        <a:rPr b="1" sz="1200">
                           <a:solidFill>
                             <a:srgbClr val="FFFFFF"/>
                           </a:solidFill>
                         </a:rPr>
-                        <a:t>Famille</a:t>
+                        <a:t>Feature</a:t>
                       </a:r>
                     </a:p>
                   </a:txBody>
@@ -9525,12 +10157,12 @@
                     <a:p>
                       <a:pPr algn="ctr"/>
                       <a:r>
-                        <a:rPr b="1" sz="1300">
+                        <a:rPr b="1" sz="1200">
                           <a:solidFill>
                             <a:srgbClr val="FFFFFF"/>
                           </a:solidFill>
                         </a:rPr>
-                        <a:t>Pourquoi</a:t>
+                        <a:t>Définition</a:t>
                       </a:r>
                     </a:p>
                   </a:txBody>
@@ -9540,8 +10172,30 @@
                     </a:solidFill>
                   </a:tcPr>
                 </a:tc>
+                <a:tc>
+                  <a:txBody>
+                    <a:bodyPr/>
+                    <a:lstStyle/>
+                    <a:p>
+                      <a:pPr algn="ctr"/>
+                      <a:r>
+                        <a:rPr b="1" sz="1200">
+                          <a:solidFill>
+                            <a:srgbClr val="FFFFFF"/>
+                          </a:solidFill>
+                        </a:rPr>
+                        <a:t>Intuition métier</a:t>
+                      </a:r>
+                    </a:p>
+                  </a:txBody>
+                  <a:tcPr>
+                    <a:solidFill>
+                      <a:srgbClr val="1F3A5F"/>
+                    </a:solidFill>
+                  </a:tcPr>
+                </a:tc>
               </a:tr>
-              <a:tr h="685800">
+              <a:tr h="571500">
                 <a:tc>
                   <a:txBody>
                     <a:bodyPr/>
@@ -9554,7 +10208,7 @@
                             <a:srgbClr val="2C3E50"/>
                           </a:solidFill>
                         </a:rPr>
-                        <a:t>Logistic Regression</a:t>
+                        <a:t>TotalPages</a:t>
                       </a:r>
                     </a:p>
                   </a:txBody>
@@ -9576,7 +10230,7 @@
                             <a:srgbClr val="2C3E50"/>
                           </a:solidFill>
                         </a:rPr>
-                        <a:t>Baseline interprétable et rapide</a:t>
+                        <a:t>Σ des compteurs de pages</a:t>
                       </a:r>
                     </a:p>
                   </a:txBody>
@@ -9586,8 +10240,30 @@
                     </a:solidFill>
                   </a:tcPr>
                 </a:tc>
+                <a:tc>
+                  <a:txBody>
+                    <a:bodyPr/>
+                    <a:lstStyle/>
+                    <a:p>
+                      <a:pPr algn="ctr"/>
+                      <a:r>
+                        <a:rPr sz="1200">
+                          <a:solidFill>
+                            <a:srgbClr val="2C3E50"/>
+                          </a:solidFill>
+                        </a:rPr>
+                        <a:t>Volume global d'engagement</a:t>
+                      </a:r>
+                    </a:p>
+                  </a:txBody>
+                  <a:tcPr>
+                    <a:solidFill>
+                      <a:srgbClr val="FFFFFF"/>
+                    </a:solidFill>
+                  </a:tcPr>
+                </a:tc>
               </a:tr>
-              <a:tr h="685800">
+              <a:tr h="571500">
                 <a:tc>
                   <a:txBody>
                     <a:bodyPr/>
@@ -9600,7 +10276,7 @@
                             <a:srgbClr val="2C3E50"/>
                           </a:solidFill>
                         </a:rPr>
-                        <a:t>Random Forest</a:t>
+                        <a:t>TotalDuration</a:t>
                       </a:r>
                     </a:p>
                   </a:txBody>
@@ -9622,7 +10298,7 @@
                             <a:srgbClr val="2C3E50"/>
                           </a:solidFill>
                         </a:rPr>
-                        <a:t>Robuste, gère les features mixtes, peu de tuning</a:t>
+                        <a:t>Σ des durations</a:t>
                       </a:r>
                     </a:p>
                   </a:txBody>
@@ -9632,8 +10308,30 @@
                     </a:solidFill>
                   </a:tcPr>
                 </a:tc>
+                <a:tc>
+                  <a:txBody>
+                    <a:bodyPr/>
+                    <a:lstStyle/>
+                    <a:p>
+                      <a:pPr algn="ctr"/>
+                      <a:r>
+                        <a:rPr sz="1200">
+                          <a:solidFill>
+                            <a:srgbClr val="2C3E50"/>
+                          </a:solidFill>
+                        </a:rPr>
+                        <a:t>Temps passé total</a:t>
+                      </a:r>
+                    </a:p>
+                  </a:txBody>
+                  <a:tcPr>
+                    <a:solidFill>
+                      <a:srgbClr val="F4F6F8"/>
+                    </a:solidFill>
+                  </a:tcPr>
+                </a:tc>
               </a:tr>
-              <a:tr h="685800">
+              <a:tr h="571500">
                 <a:tc>
                   <a:txBody>
                     <a:bodyPr/>
@@ -9646,7 +10344,7 @@
                             <a:srgbClr val="2C3E50"/>
                           </a:solidFill>
                         </a:rPr>
-                        <a:t>XGBoost</a:t>
+                        <a:t>AvgTimePerPage</a:t>
                       </a:r>
                     </a:p>
                   </a:txBody>
@@ -9668,7 +10366,301 @@
                             <a:srgbClr val="2C3E50"/>
                           </a:solidFill>
                         </a:rPr>
-                        <a:t>State-of-the-art sur du tabulaire (gradient boosting)</a:t>
+                        <a:t>duration / pages</a:t>
+                      </a:r>
+                    </a:p>
+                  </a:txBody>
+                  <a:tcPr>
+                    <a:solidFill>
+                      <a:srgbClr val="FFFFFF"/>
+                    </a:solidFill>
+                  </a:tcPr>
+                </a:tc>
+                <a:tc>
+                  <a:txBody>
+                    <a:bodyPr/>
+                    <a:lstStyle/>
+                    <a:p>
+                      <a:pPr algn="ctr"/>
+                      <a:r>
+                        <a:rPr sz="1200">
+                          <a:solidFill>
+                            <a:srgbClr val="2C3E50"/>
+                          </a:solidFill>
+                        </a:rPr>
+                        <a:t>Profondeur de lecture</a:t>
+                      </a:r>
+                    </a:p>
+                  </a:txBody>
+                  <a:tcPr>
+                    <a:solidFill>
+                      <a:srgbClr val="FFFFFF"/>
+                    </a:solidFill>
+                  </a:tcPr>
+                </a:tc>
+              </a:tr>
+              <a:tr h="571500">
+                <a:tc>
+                  <a:txBody>
+                    <a:bodyPr/>
+                    <a:lstStyle/>
+                    <a:p>
+                      <a:pPr algn="l"/>
+                      <a:r>
+                        <a:rPr sz="1200" b="1">
+                          <a:solidFill>
+                            <a:srgbClr val="2C3E50"/>
+                          </a:solidFill>
+                        </a:rPr>
+                        <a:t>ProductRelatedRatio</a:t>
+                      </a:r>
+                    </a:p>
+                  </a:txBody>
+                  <a:tcPr>
+                    <a:solidFill>
+                      <a:srgbClr val="F4F6F8"/>
+                    </a:solidFill>
+                  </a:tcPr>
+                </a:tc>
+                <a:tc>
+                  <a:txBody>
+                    <a:bodyPr/>
+                    <a:lstStyle/>
+                    <a:p>
+                      <a:pPr algn="ctr"/>
+                      <a:r>
+                        <a:rPr sz="1200">
+                          <a:solidFill>
+                            <a:srgbClr val="2C3E50"/>
+                          </a:solidFill>
+                        </a:rPr>
+                        <a:t>pages produit / total</a:t>
+                      </a:r>
+                    </a:p>
+                  </a:txBody>
+                  <a:tcPr>
+                    <a:solidFill>
+                      <a:srgbClr val="F4F6F8"/>
+                    </a:solidFill>
+                  </a:tcPr>
+                </a:tc>
+                <a:tc>
+                  <a:txBody>
+                    <a:bodyPr/>
+                    <a:lstStyle/>
+                    <a:p>
+                      <a:pPr algn="ctr"/>
+                      <a:r>
+                        <a:rPr sz="1200">
+                          <a:solidFill>
+                            <a:srgbClr val="2C3E50"/>
+                          </a:solidFill>
+                        </a:rPr>
+                        <a:t>Focus produit</a:t>
+                      </a:r>
+                    </a:p>
+                  </a:txBody>
+                  <a:tcPr>
+                    <a:solidFill>
+                      <a:srgbClr val="F4F6F8"/>
+                    </a:solidFill>
+                  </a:tcPr>
+                </a:tc>
+              </a:tr>
+              <a:tr h="571500">
+                <a:tc>
+                  <a:txBody>
+                    <a:bodyPr/>
+                    <a:lstStyle/>
+                    <a:p>
+                      <a:pPr algn="l"/>
+                      <a:r>
+                        <a:rPr sz="1200" b="1">
+                          <a:solidFill>
+                            <a:srgbClr val="2C3E50"/>
+                          </a:solidFill>
+                        </a:rPr>
+                        <a:t>HighPageValue</a:t>
+                      </a:r>
+                    </a:p>
+                  </a:txBody>
+                  <a:tcPr>
+                    <a:solidFill>
+                      <a:srgbClr val="FFFFFF"/>
+                    </a:solidFill>
+                  </a:tcPr>
+                </a:tc>
+                <a:tc>
+                  <a:txBody>
+                    <a:bodyPr/>
+                    <a:lstStyle/>
+                    <a:p>
+                      <a:pPr algn="ctr"/>
+                      <a:r>
+                        <a:rPr sz="1200">
+                          <a:solidFill>
+                            <a:srgbClr val="2C3E50"/>
+                          </a:solidFill>
+                        </a:rPr>
+                        <a:t>PageValues &gt; 0</a:t>
+                      </a:r>
+                    </a:p>
+                  </a:txBody>
+                  <a:tcPr>
+                    <a:solidFill>
+                      <a:srgbClr val="FFFFFF"/>
+                    </a:solidFill>
+                  </a:tcPr>
+                </a:tc>
+                <a:tc>
+                  <a:txBody>
+                    <a:bodyPr/>
+                    <a:lstStyle/>
+                    <a:p>
+                      <a:pPr algn="ctr"/>
+                      <a:r>
+                        <a:rPr sz="1200">
+                          <a:solidFill>
+                            <a:srgbClr val="2C3E50"/>
+                          </a:solidFill>
+                        </a:rPr>
+                        <a:t>Flag session marchande</a:t>
+                      </a:r>
+                    </a:p>
+                  </a:txBody>
+                  <a:tcPr>
+                    <a:solidFill>
+                      <a:srgbClr val="FFFFFF"/>
+                    </a:solidFill>
+                  </a:tcPr>
+                </a:tc>
+              </a:tr>
+              <a:tr h="571500">
+                <a:tc>
+                  <a:txBody>
+                    <a:bodyPr/>
+                    <a:lstStyle/>
+                    <a:p>
+                      <a:pPr algn="l"/>
+                      <a:r>
+                        <a:rPr sz="1200" b="1">
+                          <a:solidFill>
+                            <a:srgbClr val="2C3E50"/>
+                          </a:solidFill>
+                        </a:rPr>
+                        <a:t>IsHighBounce</a:t>
+                      </a:r>
+                    </a:p>
+                  </a:txBody>
+                  <a:tcPr>
+                    <a:solidFill>
+                      <a:srgbClr val="F4F6F8"/>
+                    </a:solidFill>
+                  </a:tcPr>
+                </a:tc>
+                <a:tc>
+                  <a:txBody>
+                    <a:bodyPr/>
+                    <a:lstStyle/>
+                    <a:p>
+                      <a:pPr algn="ctr"/>
+                      <a:r>
+                        <a:rPr sz="1200">
+                          <a:solidFill>
+                            <a:srgbClr val="2C3E50"/>
+                          </a:solidFill>
+                        </a:rPr>
+                        <a:t>BounceRates &gt; Q3</a:t>
+                      </a:r>
+                    </a:p>
+                  </a:txBody>
+                  <a:tcPr>
+                    <a:solidFill>
+                      <a:srgbClr val="F4F6F8"/>
+                    </a:solidFill>
+                  </a:tcPr>
+                </a:tc>
+                <a:tc>
+                  <a:txBody>
+                    <a:bodyPr/>
+                    <a:lstStyle/>
+                    <a:p>
+                      <a:pPr algn="ctr"/>
+                      <a:r>
+                        <a:rPr sz="1200">
+                          <a:solidFill>
+                            <a:srgbClr val="2C3E50"/>
+                          </a:solidFill>
+                        </a:rPr>
+                        <a:t>Flag session zappée</a:t>
+                      </a:r>
+                    </a:p>
+                  </a:txBody>
+                  <a:tcPr>
+                    <a:solidFill>
+                      <a:srgbClr val="F4F6F8"/>
+                    </a:solidFill>
+                  </a:tcPr>
+                </a:tc>
+              </a:tr>
+              <a:tr h="571500">
+                <a:tc>
+                  <a:txBody>
+                    <a:bodyPr/>
+                    <a:lstStyle/>
+                    <a:p>
+                      <a:pPr algn="l"/>
+                      <a:r>
+                        <a:rPr sz="1200" b="1">
+                          <a:solidFill>
+                            <a:srgbClr val="2C3E50"/>
+                          </a:solidFill>
+                        </a:rPr>
+                        <a:t>IsSpecialDay</a:t>
+                      </a:r>
+                    </a:p>
+                  </a:txBody>
+                  <a:tcPr>
+                    <a:solidFill>
+                      <a:srgbClr val="FFFFFF"/>
+                    </a:solidFill>
+                  </a:tcPr>
+                </a:tc>
+                <a:tc>
+                  <a:txBody>
+                    <a:bodyPr/>
+                    <a:lstStyle/>
+                    <a:p>
+                      <a:pPr algn="ctr"/>
+                      <a:r>
+                        <a:rPr sz="1200">
+                          <a:solidFill>
+                            <a:srgbClr val="2C3E50"/>
+                          </a:solidFill>
+                        </a:rPr>
+                        <a:t>SpecialDay &gt; 0</a:t>
+                      </a:r>
+                    </a:p>
+                  </a:txBody>
+                  <a:tcPr>
+                    <a:solidFill>
+                      <a:srgbClr val="FFFFFF"/>
+                    </a:solidFill>
+                  </a:tcPr>
+                </a:tc>
+                <a:tc>
+                  <a:txBody>
+                    <a:bodyPr/>
+                    <a:lstStyle/>
+                    <a:p>
+                      <a:pPr algn="ctr"/>
+                      <a:r>
+                        <a:rPr sz="1200">
+                          <a:solidFill>
+                            <a:srgbClr val="2C3E50"/>
+                          </a:solidFill>
+                        </a:rPr>
+                        <a:t>Jour spécial</a:t>
                       </a:r>
                     </a:p>
                   </a:txBody>
@@ -9691,8 +10683,8 @@
         </p:nvSpPr>
         <p:spPr>
           <a:xfrm>
-            <a:off x="731520" y="4297680"/>
-            <a:ext cx="10698480" cy="457200"/>
+            <a:off x="457200" y="5852160"/>
+            <a:ext cx="11247120" cy="457200"/>
           </a:xfrm>
           <a:prstGeom prst="rect">
             <a:avLst/>
@@ -9707,100 +10699,13 @@
           <a:p>
             <a:pPr algn="l"/>
             <a:r>
-              <a:rPr sz="1500" b="1">
-                <a:solidFill>
-                  <a:srgbClr val="E67E22"/>
-                </a:solidFill>
-                <a:latin typeface="Calibri"/>
-              </a:rPr>
-              <a:t>Tous dans la même pipeline preprocessor → classifieur</a:t>
-            </a:r>
-          </a:p>
-        </p:txBody>
-      </p:sp>
-      <p:sp>
-        <p:nvSpPr>
-          <p:cNvPr id="8" name="TextBox 7"/>
-          <p:cNvSpPr txBox="1"/>
-          <p:nvPr/>
-        </p:nvSpPr>
-        <p:spPr>
-          <a:xfrm>
-            <a:off x="731520" y="4754880"/>
-            <a:ext cx="10698480" cy="1645920"/>
-          </a:xfrm>
-          <a:prstGeom prst="rect">
-            <a:avLst/>
-          </a:prstGeom>
-          <a:noFill/>
-        </p:spPr>
-        <p:txBody>
-          <a:bodyPr wrap="square">
-            <a:spAutoFit/>
-          </a:bodyPr>
-          <a:lstStyle/>
-          <a:p>
-            <a:pPr algn="l">
-              <a:spcAft>
-                <a:spcPts val="600"/>
-              </a:spcAft>
-            </a:pPr>
-            <a:r>
-              <a:rPr sz="1400">
-                <a:solidFill>
-                  <a:srgbClr val="2C3E50"/>
-                </a:solidFill>
-                <a:latin typeface="Calibri"/>
-              </a:rPr>
-              <a:t>• Optimisation : Optuna avec sampler TPE (recherche bayésienne)</a:t>
-            </a:r>
-          </a:p>
-          <a:p>
-            <a:pPr algn="l">
-              <a:spcAft>
-                <a:spcPts val="600"/>
-              </a:spcAft>
-            </a:pPr>
-            <a:r>
-              <a:rPr sz="1400">
-                <a:solidFill>
-                  <a:srgbClr val="2C3E50"/>
-                </a:solidFill>
-                <a:latin typeface="Calibri"/>
-              </a:rPr>
-              <a:t>• Validation : 3-fold stratified CV sur le train uniquement</a:t>
-            </a:r>
-          </a:p>
-          <a:p>
-            <a:pPr algn="l">
-              <a:spcAft>
-                <a:spcPts val="600"/>
-              </a:spcAft>
-            </a:pPr>
-            <a:r>
-              <a:rPr sz="1400">
-                <a:solidFill>
-                  <a:srgbClr val="2C3E50"/>
-                </a:solidFill>
-                <a:latin typeface="Calibri"/>
-              </a:rPr>
-              <a:t>• Objectif : maximiser le F1 (classe positive)</a:t>
-            </a:r>
-          </a:p>
-          <a:p>
-            <a:pPr algn="l">
-              <a:spcAft>
-                <a:spcPts val="600"/>
-              </a:spcAft>
-            </a:pPr>
-            <a:r>
-              <a:rPr sz="1400">
-                <a:solidFill>
-                  <a:srgbClr val="2C3E50"/>
-                </a:solidFill>
-                <a:latin typeface="Calibri"/>
-              </a:rPr>
-              <a:t>• class_weight='balanced' / scale_pos_weight pour compenser le 85/15</a:t>
+              <a:rPr sz="1200" b="0">
+                <a:solidFill>
+                  <a:srgbClr val="7F8C8D"/>
+                </a:solidFill>
+                <a:latin typeface="Calibri"/>
+              </a:rPr>
+              <a:t>Toutes ces transformations sont déterministes ligne par ligne — pas de fit, donc pas de leakage.</a:t>
             </a:r>
           </a:p>
         </p:txBody>
